--- a/docs/pharmacy-bin-keeper-deck.pptx
+++ b/docs/pharmacy-bin-keeper-deck.pptx
@@ -3192,8 +3192,8 @@
         </p:nvSpPr>
         <p:spPr>
           <a:xfrm>
-            <a:off x="548640" y="1645920"/>
-            <a:ext cx="7315200" cy="1097280"/>
+            <a:off x="594360" y="1463040"/>
+            <a:ext cx="9144000" cy="1188720"/>
           </a:xfrm>
           <a:prstGeom prst="rect">
             <a:avLst/>
@@ -3208,12 +3208,12 @@
           <a:p>
             <a:pPr algn="l"/>
             <a:r>
-              <a:rPr sz="4800" b="1" i="0">
+              <a:rPr sz="4400" b="1" i="0">
                 <a:solidFill>
                   <a:srgbClr val="FFFFFF"/>
                 </a:solidFill>
               </a:rPr>
-              <a:t>Pharmacy Bin Keeper</a:t>
+              <a:t>Pharmacy Drug Monitoring System</a:t>
             </a:r>
           </a:p>
         </p:txBody>
@@ -3226,8 +3226,8 @@
         </p:nvSpPr>
         <p:spPr>
           <a:xfrm>
-            <a:off x="548640" y="2743200"/>
-            <a:ext cx="8229600" cy="731520"/>
+            <a:off x="594360" y="2788920"/>
+            <a:ext cx="9144000" cy="914400"/>
           </a:xfrm>
           <a:prstGeom prst="rect">
             <a:avLst/>
@@ -3247,7 +3247,8 @@
                   <a:srgbClr val="A8C4E8"/>
                 </a:solidFill>
               </a:rPr>
-              <a:t>Smart Drug Inventory &amp; Dispensing Management for Klinik Kesihatan</a:t>
+              <a:t>Digitising Quota Drug Requests &amp; Antibiotic Forms
+for Klinik Kesihatan</a:t>
             </a:r>
           </a:p>
         </p:txBody>
@@ -3260,7 +3261,7 @@
         </p:nvSpPr>
         <p:spPr>
           <a:xfrm>
-            <a:off x="548640" y="3657600"/>
+            <a:off x="594360" y="3840480"/>
             <a:ext cx="6400800" cy="457200"/>
           </a:xfrm>
           <a:prstGeom prst="rect">
@@ -3337,7 +3338,7 @@
         </p:nvSpPr>
         <p:spPr>
           <a:xfrm>
-            <a:off x="548640" y="6309360"/>
+            <a:off x="594360" y="6309360"/>
             <a:ext cx="5486400" cy="548640"/>
           </a:xfrm>
           <a:prstGeom prst="rect">
@@ -3396,7 +3397,7 @@
             <a:avLst/>
           </a:prstGeom>
           <a:solidFill>
-            <a:srgbClr val="FFFFFF"/>
+            <a:srgbClr val="F0F4F8"/>
           </a:solidFill>
           <a:ln>
             <a:noFill/>
@@ -3518,8 +3519,8 @@
         </p:nvSpPr>
         <p:spPr>
           <a:xfrm>
-            <a:off x="502920" y="228600"/>
-            <a:ext cx="9144000" cy="731520"/>
+            <a:off x="502920" y="201168"/>
+            <a:ext cx="10058400" cy="777240"/>
           </a:xfrm>
           <a:prstGeom prst="rect">
             <a:avLst/>
@@ -3552,8 +3553,8 @@
         </p:nvSpPr>
         <p:spPr>
           <a:xfrm>
-            <a:off x="502920" y="777240"/>
-            <a:ext cx="10058400" cy="457200"/>
+            <a:off x="502920" y="804672"/>
+            <a:ext cx="10058400" cy="438912"/>
           </a:xfrm>
           <a:prstGeom prst="rect">
             <a:avLst/>
@@ -3573,7 +3574,7 @@
                   <a:srgbClr val="B0C8E8"/>
                 </a:solidFill>
               </a:rPr>
-              <a:t>From single clinic to network-wide rollout</a:t>
+              <a:t>From single KK to network-wide rollout</a:t>
             </a:r>
           </a:p>
         </p:txBody>
@@ -3586,14 +3587,14 @@
         </p:nvSpPr>
         <p:spPr>
           <a:xfrm>
-            <a:off x="457200" y="1508760"/>
-            <a:ext cx="3383280" cy="5029200"/>
-          </a:xfrm>
-          <a:prstGeom prst="rect">
-            <a:avLst/>
-          </a:prstGeom>
-          <a:solidFill>
-            <a:srgbClr val="F0F4F8"/>
+            <a:off x="457200" y="1463040"/>
+            <a:ext cx="3383280" cy="5120640"/>
+          </a:xfrm>
+          <a:prstGeom prst="rect">
+            <a:avLst/>
+          </a:prstGeom>
+          <a:solidFill>
+            <a:srgbClr val="FFFFFF"/>
           </a:solidFill>
           <a:ln>
             <a:noFill/>
@@ -3629,8 +3630,8 @@
         </p:nvSpPr>
         <p:spPr>
           <a:xfrm>
-            <a:off x="457200" y="1508760"/>
-            <a:ext cx="3383280" cy="73152"/>
+            <a:off x="457200" y="1463040"/>
+            <a:ext cx="3383280" cy="64008"/>
           </a:xfrm>
           <a:prstGeom prst="rect">
             <a:avLst/>
@@ -3672,8 +3673,8 @@
         </p:nvSpPr>
         <p:spPr>
           <a:xfrm>
-            <a:off x="640080" y="1645920"/>
-            <a:ext cx="3108960" cy="640080"/>
+            <a:off x="640080" y="1627632"/>
+            <a:ext cx="3108960" cy="685800"/>
           </a:xfrm>
           <a:prstGeom prst="rect">
             <a:avLst/>
@@ -3708,7 +3709,7 @@
         <p:spPr>
           <a:xfrm>
             <a:off x="640080" y="2377440"/>
-            <a:ext cx="3108960" cy="4023360"/>
+            <a:ext cx="3108960" cy="4114800"/>
           </a:xfrm>
           <a:prstGeom prst="rect">
             <a:avLst/>
@@ -3732,7 +3733,7 @@
                   <a:srgbClr val="4A5568"/>
                 </a:solidFill>
               </a:rPr>
-              <a:t>• Core drug master &amp; stock ledger</a:t>
+              <a:t>• Quota drug request workflow</a:t>
             </a:r>
           </a:p>
           <a:p>
@@ -3747,7 +3748,7 @@
                   <a:srgbClr val="4A5568"/>
                 </a:solidFill>
               </a:rPr>
-              <a:t>• MO dispensing request flow</a:t>
+              <a:t>• Antibiotic form (NAG 2024) workflow</a:t>
             </a:r>
           </a:p>
           <a:p>
@@ -3762,7 +3763,7 @@
                   <a:srgbClr val="4A5568"/>
                 </a:solidFill>
               </a:rPr>
-              <a:t>• FMS specialist approval dashboard</a:t>
+              <a:t>• MO → FMS → Pharmacy approval chain</a:t>
             </a:r>
           </a:p>
           <a:p>
@@ -3777,7 +3778,7 @@
                   <a:srgbClr val="4A5568"/>
                 </a:solidFill>
               </a:rPr>
-              <a:t>• Antibiotic stewardship (NAG 2024)</a:t>
+              <a:t>• Annual quota monitoring per drug</a:t>
             </a:r>
           </a:p>
           <a:p>
@@ -3792,7 +3793,7 @@
                   <a:srgbClr val="4A5568"/>
                 </a:solidFill>
               </a:rPr>
-              <a:t>• Pharmacist fulfilment queue</a:t>
+              <a:t>• Patient registry &amp; drug history</a:t>
             </a:r>
           </a:p>
           <a:p>
@@ -3807,7 +3808,7 @@
                   <a:srgbClr val="4A5568"/>
                 </a:solidFill>
               </a:rPr>
-              <a:t>• Patient registry &amp; drug history</a:t>
+              <a:t>• Full audit trail &amp; reporting</a:t>
             </a:r>
           </a:p>
           <a:p>
@@ -3822,7 +3823,7 @@
                   <a:srgbClr val="4A5568"/>
                 </a:solidFill>
               </a:rPr>
-              <a:t>• Annual quota tracking</a:t>
+              <a:t>• Role-based dashboards (MO / FMS / Pharmacist)</a:t>
             </a:r>
           </a:p>
         </p:txBody>
@@ -3835,14 +3836,14 @@
         </p:nvSpPr>
         <p:spPr>
           <a:xfrm>
-            <a:off x="4206239" y="1508760"/>
-            <a:ext cx="3383280" cy="5029200"/>
-          </a:xfrm>
-          <a:prstGeom prst="rect">
-            <a:avLst/>
-          </a:prstGeom>
-          <a:solidFill>
-            <a:srgbClr val="F0F4F8"/>
+            <a:off x="4206239" y="1463040"/>
+            <a:ext cx="3383280" cy="5120640"/>
+          </a:xfrm>
+          <a:prstGeom prst="rect">
+            <a:avLst/>
+          </a:prstGeom>
+          <a:solidFill>
+            <a:srgbClr val="FFFFFF"/>
           </a:solidFill>
           <a:ln>
             <a:noFill/>
@@ -3878,8 +3879,8 @@
         </p:nvSpPr>
         <p:spPr>
           <a:xfrm>
-            <a:off x="4206239" y="1508760"/>
-            <a:ext cx="3383280" cy="73152"/>
+            <a:off x="4206239" y="1463040"/>
+            <a:ext cx="3383280" cy="64008"/>
           </a:xfrm>
           <a:prstGeom prst="rect">
             <a:avLst/>
@@ -3921,8 +3922,8 @@
         </p:nvSpPr>
         <p:spPr>
           <a:xfrm>
-            <a:off x="4389119" y="1645920"/>
-            <a:ext cx="3108960" cy="640080"/>
+            <a:off x="4389119" y="1627632"/>
+            <a:ext cx="3108960" cy="685800"/>
           </a:xfrm>
           <a:prstGeom prst="rect">
             <a:avLst/>
@@ -3957,7 +3958,7 @@
         <p:spPr>
           <a:xfrm>
             <a:off x="4389119" y="2377440"/>
-            <a:ext cx="3108960" cy="4023360"/>
+            <a:ext cx="3108960" cy="4114800"/>
           </a:xfrm>
           <a:prstGeom prst="rect">
             <a:avLst/>
@@ -3981,7 +3982,7 @@
                   <a:srgbClr val="4A5568"/>
                 </a:solidFill>
               </a:rPr>
-              <a:t>• E-prescription PDF export</a:t>
+              <a:t>• PDF export for antibiotic forms</a:t>
             </a:r>
           </a:p>
           <a:p>
@@ -3996,7 +3997,7 @@
                   <a:srgbClr val="4A5568"/>
                 </a:solidFill>
               </a:rPr>
-              <a:t>• SMS / push notifications (pending approval)</a:t>
+              <a:t>• Push / in-app notifications on approval</a:t>
             </a:r>
           </a:p>
           <a:p>
@@ -4011,7 +4012,7 @@
                   <a:srgbClr val="4A5568"/>
                 </a:solidFill>
               </a:rPr>
-              <a:t>• Barcode / QR scanning for drug receipt</a:t>
+              <a:t>• Advanced laporan (XLSX export)</a:t>
             </a:r>
           </a:p>
           <a:p>
@@ -4026,7 +4027,7 @@
                   <a:srgbClr val="4A5568"/>
                 </a:solidFill>
               </a:rPr>
-              <a:t>• Advanced laporan (XLSX / PDF exports)</a:t>
+              <a:t>• Drug interaction alerts</a:t>
             </a:r>
           </a:p>
           <a:p>
@@ -4054,14 +4055,14 @@
         </p:nvSpPr>
         <p:spPr>
           <a:xfrm>
-            <a:off x="7955278" y="1508760"/>
-            <a:ext cx="3383280" cy="5029200"/>
-          </a:xfrm>
-          <a:prstGeom prst="rect">
-            <a:avLst/>
-          </a:prstGeom>
-          <a:solidFill>
-            <a:srgbClr val="F0F4F8"/>
+            <a:off x="7955278" y="1463040"/>
+            <a:ext cx="3383280" cy="5120640"/>
+          </a:xfrm>
+          <a:prstGeom prst="rect">
+            <a:avLst/>
+          </a:prstGeom>
+          <a:solidFill>
+            <a:srgbClr val="FFFFFF"/>
           </a:solidFill>
           <a:ln>
             <a:noFill/>
@@ -4097,8 +4098,8 @@
         </p:nvSpPr>
         <p:spPr>
           <a:xfrm>
-            <a:off x="7955278" y="1508760"/>
-            <a:ext cx="3383280" cy="73152"/>
+            <a:off x="7955278" y="1463040"/>
+            <a:ext cx="3383280" cy="64008"/>
           </a:xfrm>
           <a:prstGeom prst="rect">
             <a:avLst/>
@@ -4140,8 +4141,8 @@
         </p:nvSpPr>
         <p:spPr>
           <a:xfrm>
-            <a:off x="8138158" y="1645920"/>
-            <a:ext cx="3108960" cy="640080"/>
+            <a:off x="8138158" y="1627632"/>
+            <a:ext cx="3108960" cy="685800"/>
           </a:xfrm>
           <a:prstGeom prst="rect">
             <a:avLst/>
@@ -4176,7 +4177,7 @@
         <p:spPr>
           <a:xfrm>
             <a:off x="8138158" y="2377440"/>
-            <a:ext cx="3108960" cy="4023360"/>
+            <a:ext cx="3108960" cy="4114800"/>
           </a:xfrm>
           <a:prstGeom prst="rect">
             <a:avLst/>
@@ -4200,7 +4201,7 @@
                   <a:srgbClr val="4A5568"/>
                 </a:solidFill>
               </a:rPr>
-              <a:t>• MOH JKN integration (eLesen / ePerolehan)</a:t>
+              <a:t>• MOH / JKN system integration</a:t>
             </a:r>
           </a:p>
           <a:p>
@@ -4215,7 +4216,7 @@
                   <a:srgbClr val="4A5568"/>
                 </a:solidFill>
               </a:rPr>
-              <a:t>• AI-powered stock forecasting</a:t>
+              <a:t>• AI-powered quota forecasting</a:t>
             </a:r>
           </a:p>
           <a:p>
@@ -4230,7 +4231,7 @@
                   <a:srgbClr val="4A5568"/>
                 </a:solidFill>
               </a:rPr>
-              <a:t>• Drug interaction alerts</a:t>
+              <a:t>• Mobile-friendly PWA wrapper</a:t>
             </a:r>
           </a:p>
           <a:p>
@@ -4260,7 +4261,7 @@
                   <a:srgbClr val="4A5568"/>
                 </a:solidFill>
               </a:rPr>
-              <a:t>• Mobile app (React Native wrapper)</a:t>
+              <a:t>• Batch antibiotic form review for FMS</a:t>
             </a:r>
           </a:p>
         </p:txBody>
@@ -4377,8 +4378,8 @@
         </p:nvSpPr>
         <p:spPr>
           <a:xfrm>
-            <a:off x="548640" y="1371600"/>
-            <a:ext cx="9144000" cy="1005840"/>
+            <a:off x="594360" y="1280160"/>
+            <a:ext cx="9601200" cy="1097280"/>
           </a:xfrm>
           <a:prstGeom prst="rect">
             <a:avLst/>
@@ -4393,12 +4394,12 @@
           <a:p>
             <a:pPr algn="l"/>
             <a:r>
-              <a:rPr sz="4400" b="1" i="0">
+              <a:rPr sz="4000" b="1" i="0">
                 <a:solidFill>
                   <a:srgbClr val="FFFFFF"/>
                 </a:solidFill>
               </a:rPr>
-              <a:t>Pharmacy Bin Keeper</a:t>
+              <a:t>Pharmacy Drug Monitoring System</a:t>
             </a:r>
           </a:p>
         </p:txBody>
@@ -4411,7 +4412,7 @@
         </p:nvSpPr>
         <p:spPr>
           <a:xfrm>
-            <a:off x="548640" y="2514600"/>
+            <a:off x="594360" y="2514600"/>
             <a:ext cx="9144000" cy="1097280"/>
           </a:xfrm>
           <a:prstGeom prst="rect">
@@ -4427,67 +4428,33 @@
           <a:p>
             <a:pPr algn="l"/>
             <a:r>
-              <a:rPr sz="2000" b="0" i="1">
+              <a:rPr sz="2100" b="0" i="1">
                 <a:solidFill>
                   <a:srgbClr val="A8C4E8"/>
                 </a:solidFill>
               </a:rPr>
-              <a:t>Digitising drug inventory management for Malaysian public-sector clinics —
-one request, one approval, one dispense at a time.</a:t>
-            </a:r>
-          </a:p>
-        </p:txBody>
-      </p:sp>
-      <p:sp>
-        <p:nvSpPr>
-          <p:cNvPr id="6" name="TextBox 5"/>
-          <p:cNvSpPr txBox="1"/>
-          <p:nvPr/>
-        </p:nvSpPr>
-        <p:spPr>
-          <a:xfrm>
-            <a:off x="548640" y="4206240"/>
-            <a:ext cx="7315200" cy="548640"/>
-          </a:xfrm>
-          <a:prstGeom prst="rect">
-            <a:avLst/>
-          </a:prstGeom>
-          <a:noFill/>
-        </p:spPr>
-        <p:txBody>
-          <a:bodyPr wrap="square">
-            <a:spAutoFit/>
-          </a:bodyPr>
-          <a:lstStyle/>
-          <a:p>
-            <a:pPr algn="l"/>
-            <a:r>
-              <a:rPr sz="1600" b="0" i="0">
-                <a:solidFill>
-                  <a:srgbClr val="27AE60"/>
-                </a:solidFill>
-              </a:rPr>
-              <a:t>Contact  ·  admin@vvsdigitalsolutions.com</a:t>
-            </a:r>
-          </a:p>
-        </p:txBody>
-      </p:sp>
-      <p:sp>
-        <p:nvSpPr>
-          <p:cNvPr id="7" name="Rectangle 6"/>
+              <a:t>Replacing Google Sheets and paper forms with a lean,
+digital workflow — for every Klinik Kesihatan.</a:t>
+            </a:r>
+          </a:p>
+        </p:txBody>
+      </p:sp>
+      <p:sp>
+        <p:nvSpPr>
+          <p:cNvPr id="6" name="Rectangle 5"/>
           <p:cNvSpPr/>
           <p:nvPr/>
         </p:nvSpPr>
         <p:spPr>
           <a:xfrm>
-            <a:off x="0" y="6309360"/>
-            <a:ext cx="12188952" cy="548640"/>
-          </a:xfrm>
-          <a:prstGeom prst="rect">
-            <a:avLst/>
-          </a:prstGeom>
-          <a:solidFill>
-            <a:srgbClr val="123562"/>
+            <a:off x="594360" y="3840480"/>
+            <a:ext cx="5029200" cy="868680"/>
+          </a:xfrm>
+          <a:prstGeom prst="rect">
+            <a:avLst/>
+          </a:prstGeom>
+          <a:solidFill>
+            <a:srgbClr val="173A6E"/>
           </a:solidFill>
           <a:ln>
             <a:noFill/>
@@ -4517,13 +4484,201 @@
       </p:sp>
       <p:sp>
         <p:nvSpPr>
-          <p:cNvPr id="8" name="TextBox 7"/>
+          <p:cNvPr id="7" name="TextBox 6"/>
           <p:cNvSpPr txBox="1"/>
           <p:nvPr/>
         </p:nvSpPr>
         <p:spPr>
           <a:xfrm>
-            <a:off x="548640" y="6309360"/>
+            <a:off x="777240" y="3977639"/>
+            <a:ext cx="4754880" cy="594360"/>
+          </a:xfrm>
+          <a:prstGeom prst="rect">
+            <a:avLst/>
+          </a:prstGeom>
+          <a:noFill/>
+        </p:spPr>
+        <p:txBody>
+          <a:bodyPr wrap="square">
+            <a:spAutoFit/>
+          </a:bodyPr>
+          <a:lstStyle/>
+          <a:p>
+            <a:pPr algn="l"/>
+            <a:r>
+              <a:rPr sz="1500" b="1" i="0">
+                <a:solidFill>
+                  <a:srgbClr val="27AE60"/>
+                </a:solidFill>
+              </a:rPr>
+              <a:t>📊  Quota drugs → off Google Sheets, onto one system</a:t>
+            </a:r>
+          </a:p>
+        </p:txBody>
+      </p:sp>
+      <p:sp>
+        <p:nvSpPr>
+          <p:cNvPr id="8" name="Rectangle 7"/>
+          <p:cNvSpPr/>
+          <p:nvPr/>
+        </p:nvSpPr>
+        <p:spPr>
+          <a:xfrm>
+            <a:off x="6217920" y="3840480"/>
+            <a:ext cx="5486400" cy="868680"/>
+          </a:xfrm>
+          <a:prstGeom prst="rect">
+            <a:avLst/>
+          </a:prstGeom>
+          <a:solidFill>
+            <a:srgbClr val="173A6E"/>
+          </a:solidFill>
+          <a:ln>
+            <a:noFill/>
+          </a:ln>
+        </p:spPr>
+        <p:style>
+          <a:lnRef idx="1">
+            <a:schemeClr val="accent1"/>
+          </a:lnRef>
+          <a:fillRef idx="3">
+            <a:schemeClr val="accent1"/>
+          </a:fillRef>
+          <a:effectRef idx="2">
+            <a:schemeClr val="accent1"/>
+          </a:effectRef>
+          <a:fontRef idx="minor">
+            <a:schemeClr val="lt1"/>
+          </a:fontRef>
+        </p:style>
+        <p:txBody>
+          <a:bodyPr rtlCol="0" anchor="ctr"/>
+          <a:lstStyle/>
+          <a:p>
+            <a:pPr algn="ctr"/>
+          </a:p>
+        </p:txBody>
+      </p:sp>
+      <p:sp>
+        <p:nvSpPr>
+          <p:cNvPr id="9" name="TextBox 8"/>
+          <p:cNvSpPr txBox="1"/>
+          <p:nvPr/>
+        </p:nvSpPr>
+        <p:spPr>
+          <a:xfrm>
+            <a:off x="6400800" y="3977639"/>
+            <a:ext cx="5212080" cy="594360"/>
+          </a:xfrm>
+          <a:prstGeom prst="rect">
+            <a:avLst/>
+          </a:prstGeom>
+          <a:noFill/>
+        </p:spPr>
+        <p:txBody>
+          <a:bodyPr wrap="square">
+            <a:spAutoFit/>
+          </a:bodyPr>
+          <a:lstStyle/>
+          <a:p>
+            <a:pPr algn="l"/>
+            <a:r>
+              <a:rPr sz="1500" b="1" i="0">
+                <a:solidFill>
+                  <a:srgbClr val="F39C12"/>
+                </a:solidFill>
+              </a:rPr>
+              <a:t>💉  Antibiotic forms → off A4 paper, zero printing cost</a:t>
+            </a:r>
+          </a:p>
+        </p:txBody>
+      </p:sp>
+      <p:sp>
+        <p:nvSpPr>
+          <p:cNvPr id="10" name="TextBox 9"/>
+          <p:cNvSpPr txBox="1"/>
+          <p:nvPr/>
+        </p:nvSpPr>
+        <p:spPr>
+          <a:xfrm>
+            <a:off x="594360" y="5212080"/>
+            <a:ext cx="8229600" cy="502920"/>
+          </a:xfrm>
+          <a:prstGeom prst="rect">
+            <a:avLst/>
+          </a:prstGeom>
+          <a:noFill/>
+        </p:spPr>
+        <p:txBody>
+          <a:bodyPr wrap="square">
+            <a:spAutoFit/>
+          </a:bodyPr>
+          <a:lstStyle/>
+          <a:p>
+            <a:pPr algn="l"/>
+            <a:r>
+              <a:rPr sz="1600" b="0" i="0">
+                <a:solidFill>
+                  <a:srgbClr val="27AE60"/>
+                </a:solidFill>
+              </a:rPr>
+              <a:t>Contact  ·  admin@vvsdigitalsolutions.com</a:t>
+            </a:r>
+          </a:p>
+        </p:txBody>
+      </p:sp>
+      <p:sp>
+        <p:nvSpPr>
+          <p:cNvPr id="11" name="Rectangle 10"/>
+          <p:cNvSpPr/>
+          <p:nvPr/>
+        </p:nvSpPr>
+        <p:spPr>
+          <a:xfrm>
+            <a:off x="0" y="6309360"/>
+            <a:ext cx="12188952" cy="548640"/>
+          </a:xfrm>
+          <a:prstGeom prst="rect">
+            <a:avLst/>
+          </a:prstGeom>
+          <a:solidFill>
+            <a:srgbClr val="123562"/>
+          </a:solidFill>
+          <a:ln>
+            <a:noFill/>
+          </a:ln>
+        </p:spPr>
+        <p:style>
+          <a:lnRef idx="1">
+            <a:schemeClr val="accent1"/>
+          </a:lnRef>
+          <a:fillRef idx="3">
+            <a:schemeClr val="accent1"/>
+          </a:fillRef>
+          <a:effectRef idx="2">
+            <a:schemeClr val="accent1"/>
+          </a:effectRef>
+          <a:fontRef idx="minor">
+            <a:schemeClr val="lt1"/>
+          </a:fontRef>
+        </p:style>
+        <p:txBody>
+          <a:bodyPr rtlCol="0" anchor="ctr"/>
+          <a:lstStyle/>
+          <a:p>
+            <a:pPr algn="ctr"/>
+          </a:p>
+        </p:txBody>
+      </p:sp>
+      <p:sp>
+        <p:nvSpPr>
+          <p:cNvPr id="12" name="TextBox 11"/>
+          <p:cNvSpPr txBox="1"/>
+          <p:nvPr/>
+        </p:nvSpPr>
+        <p:spPr>
+          <a:xfrm>
+            <a:off x="594360" y="6309360"/>
             <a:ext cx="9144000" cy="548640"/>
           </a:xfrm>
           <a:prstGeom prst="rect">
@@ -4655,7 +4810,75 @@
       </p:sp>
       <p:sp>
         <p:nvSpPr>
-          <p:cNvPr id="4" name="Rectangle 3"/>
+          <p:cNvPr id="4" name="TextBox 3"/>
+          <p:cNvSpPr txBox="1"/>
+          <p:nvPr/>
+        </p:nvSpPr>
+        <p:spPr>
+          <a:xfrm>
+            <a:off x="502920" y="201168"/>
+            <a:ext cx="10058400" cy="777240"/>
+          </a:xfrm>
+          <a:prstGeom prst="rect">
+            <a:avLst/>
+          </a:prstGeom>
+          <a:noFill/>
+        </p:spPr>
+        <p:txBody>
+          <a:bodyPr wrap="square">
+            <a:spAutoFit/>
+          </a:bodyPr>
+          <a:lstStyle/>
+          <a:p>
+            <a:pPr algn="l"/>
+            <a:r>
+              <a:rPr sz="3200" b="1" i="0">
+                <a:solidFill>
+                  <a:srgbClr val="FFFFFF"/>
+                </a:solidFill>
+              </a:rPr>
+              <a:t>The Problem</a:t>
+            </a:r>
+          </a:p>
+        </p:txBody>
+      </p:sp>
+      <p:sp>
+        <p:nvSpPr>
+          <p:cNvPr id="5" name="TextBox 4"/>
+          <p:cNvSpPr txBox="1"/>
+          <p:nvPr/>
+        </p:nvSpPr>
+        <p:spPr>
+          <a:xfrm>
+            <a:off x="502920" y="804672"/>
+            <a:ext cx="10058400" cy="438912"/>
+          </a:xfrm>
+          <a:prstGeom prst="rect">
+            <a:avLst/>
+          </a:prstGeom>
+          <a:noFill/>
+        </p:spPr>
+        <p:txBody>
+          <a:bodyPr wrap="square">
+            <a:spAutoFit/>
+          </a:bodyPr>
+          <a:lstStyle/>
+          <a:p>
+            <a:pPr algn="l"/>
+            <a:r>
+              <a:rPr sz="1500" b="0" i="0">
+                <a:solidFill>
+                  <a:srgbClr val="B0C8E8"/>
+                </a:solidFill>
+              </a:rPr>
+              <a:t>How quota drug monitoring and antibiotic approval are handled today — and why it's breaking down</a:t>
+            </a:r>
+          </a:p>
+        </p:txBody>
+      </p:sp>
+      <p:sp>
+        <p:nvSpPr>
+          <p:cNvPr id="6" name="Rectangle 5"/>
           <p:cNvSpPr/>
           <p:nvPr/>
         </p:nvSpPr>
@@ -4698,82 +4921,14 @@
       </p:sp>
       <p:sp>
         <p:nvSpPr>
-          <p:cNvPr id="5" name="TextBox 4"/>
-          <p:cNvSpPr txBox="1"/>
-          <p:nvPr/>
-        </p:nvSpPr>
-        <p:spPr>
-          <a:xfrm>
-            <a:off x="502920" y="228600"/>
-            <a:ext cx="9144000" cy="731520"/>
-          </a:xfrm>
-          <a:prstGeom prst="rect">
-            <a:avLst/>
-          </a:prstGeom>
-          <a:noFill/>
-        </p:spPr>
-        <p:txBody>
-          <a:bodyPr wrap="square">
-            <a:spAutoFit/>
-          </a:bodyPr>
-          <a:lstStyle/>
-          <a:p>
-            <a:pPr algn="l"/>
-            <a:r>
-              <a:rPr sz="3200" b="1" i="0">
-                <a:solidFill>
-                  <a:srgbClr val="FFFFFF"/>
-                </a:solidFill>
-              </a:rPr>
-              <a:t>The Problem</a:t>
-            </a:r>
-          </a:p>
-        </p:txBody>
-      </p:sp>
-      <p:sp>
-        <p:nvSpPr>
-          <p:cNvPr id="6" name="TextBox 5"/>
-          <p:cNvSpPr txBox="1"/>
-          <p:nvPr/>
-        </p:nvSpPr>
-        <p:spPr>
-          <a:xfrm>
-            <a:off x="502920" y="777240"/>
-            <a:ext cx="10058400" cy="457200"/>
-          </a:xfrm>
-          <a:prstGeom prst="rect">
-            <a:avLst/>
-          </a:prstGeom>
-          <a:noFill/>
-        </p:spPr>
-        <p:txBody>
-          <a:bodyPr wrap="square">
-            <a:spAutoFit/>
-          </a:bodyPr>
-          <a:lstStyle/>
-          <a:p>
-            <a:pPr algn="l"/>
-            <a:r>
-              <a:rPr sz="1500" b="0" i="0">
-                <a:solidFill>
-                  <a:srgbClr val="B0C8E8"/>
-                </a:solidFill>
-              </a:rPr>
-              <a:t>Malaysian public-clinic pharmacies still run on paper bin cards and spreadsheets</a:t>
-            </a:r>
-          </a:p>
-        </p:txBody>
-      </p:sp>
-      <p:sp>
-        <p:nvSpPr>
           <p:cNvPr id="7" name="Rectangle 6"/>
           <p:cNvSpPr/>
           <p:nvPr/>
         </p:nvSpPr>
         <p:spPr>
           <a:xfrm>
-            <a:off x="457200" y="1463040"/>
-            <a:ext cx="5303520" cy="2103120"/>
+            <a:off x="502920" y="1417320"/>
+            <a:ext cx="5486400" cy="5212080"/>
           </a:xfrm>
           <a:prstGeom prst="rect">
             <a:avLst/>
@@ -4809,88 +4964,20 @@
       </p:sp>
       <p:sp>
         <p:nvSpPr>
-          <p:cNvPr id="8" name="TextBox 7"/>
-          <p:cNvSpPr txBox="1"/>
-          <p:nvPr/>
-        </p:nvSpPr>
-        <p:spPr>
-          <a:xfrm>
-            <a:off x="640080" y="1600200"/>
-            <a:ext cx="4937760" cy="502920"/>
-          </a:xfrm>
-          <a:prstGeom prst="rect">
-            <a:avLst/>
-          </a:prstGeom>
-          <a:noFill/>
-        </p:spPr>
-        <p:txBody>
-          <a:bodyPr wrap="square">
-            <a:spAutoFit/>
-          </a:bodyPr>
-          <a:lstStyle/>
-          <a:p>
-            <a:pPr algn="l"/>
-            <a:r>
-              <a:rPr sz="1600" b="1" i="0">
-                <a:solidFill>
-                  <a:srgbClr val="1A202C"/>
-                </a:solidFill>
-              </a:rPr>
-              <a:t>📋  Manual Bin Cards</a:t>
-            </a:r>
-          </a:p>
-        </p:txBody>
-      </p:sp>
-      <p:sp>
-        <p:nvSpPr>
-          <p:cNvPr id="9" name="TextBox 8"/>
-          <p:cNvSpPr txBox="1"/>
-          <p:nvPr/>
-        </p:nvSpPr>
-        <p:spPr>
-          <a:xfrm>
-            <a:off x="640080" y="2103120"/>
-            <a:ext cx="4937760" cy="1280160"/>
-          </a:xfrm>
-          <a:prstGeom prst="rect">
-            <a:avLst/>
-          </a:prstGeom>
-          <a:noFill/>
-        </p:spPr>
-        <p:txBody>
-          <a:bodyPr wrap="square">
-            <a:spAutoFit/>
-          </a:bodyPr>
-          <a:lstStyle/>
-          <a:p>
-            <a:pPr algn="l"/>
-            <a:r>
-              <a:rPr sz="1300" b="0" i="0">
-                <a:solidFill>
-                  <a:srgbClr val="4A5568"/>
-                </a:solidFill>
-              </a:rPr>
-              <a:t>Paper stock cards go out of sync the moment stock moves. Errors accumulate silently.</a:t>
-            </a:r>
-          </a:p>
-        </p:txBody>
-      </p:sp>
-      <p:sp>
-        <p:nvSpPr>
-          <p:cNvPr id="10" name="Rectangle 9"/>
+          <p:cNvPr id="8" name="Rectangle 7"/>
           <p:cNvSpPr/>
           <p:nvPr/>
         </p:nvSpPr>
         <p:spPr>
           <a:xfrm>
-            <a:off x="6309360" y="1463040"/>
-            <a:ext cx="5303520" cy="2103120"/>
-          </a:xfrm>
-          <a:prstGeom prst="rect">
-            <a:avLst/>
-          </a:prstGeom>
-          <a:solidFill>
-            <a:srgbClr val="FFFFFF"/>
+            <a:off x="502920" y="1417320"/>
+            <a:ext cx="5486400" cy="64008"/>
+          </a:xfrm>
+          <a:prstGeom prst="rect">
+            <a:avLst/>
+          </a:prstGeom>
+          <a:solidFill>
+            <a:srgbClr val="E74C3C"/>
           </a:solidFill>
           <a:ln>
             <a:noFill/>
@@ -4920,14 +5007,14 @@
       </p:sp>
       <p:sp>
         <p:nvSpPr>
-          <p:cNvPr id="11" name="TextBox 10"/>
+          <p:cNvPr id="9" name="TextBox 8"/>
           <p:cNvSpPr txBox="1"/>
           <p:nvPr/>
         </p:nvSpPr>
         <p:spPr>
           <a:xfrm>
-            <a:off x="6492240" y="1600200"/>
-            <a:ext cx="4937760" cy="502920"/>
+            <a:off x="685800" y="1508760"/>
+            <a:ext cx="5212080" cy="548640"/>
           </a:xfrm>
           <a:prstGeom prst="rect">
             <a:avLst/>
@@ -4942,26 +5029,26 @@
           <a:p>
             <a:pPr algn="l"/>
             <a:r>
-              <a:rPr sz="1600" b="1" i="0">
-                <a:solidFill>
-                  <a:srgbClr val="1A202C"/>
-                </a:solidFill>
-              </a:rPr>
-              <a:t>⚠️  No Approval Workflow</a:t>
-            </a:r>
-          </a:p>
-        </p:txBody>
-      </p:sp>
-      <p:sp>
-        <p:nvSpPr>
-          <p:cNvPr id="12" name="TextBox 11"/>
+              <a:rPr sz="1700" b="1" i="0">
+                <a:solidFill>
+                  <a:srgbClr val="E74C3C"/>
+                </a:solidFill>
+              </a:rPr>
+              <a:t>📊  Quota Drug Monitoring</a:t>
+            </a:r>
+          </a:p>
+        </p:txBody>
+      </p:sp>
+      <p:sp>
+        <p:nvSpPr>
+          <p:cNvPr id="10" name="TextBox 9"/>
           <p:cNvSpPr txBox="1"/>
           <p:nvPr/>
         </p:nvSpPr>
         <p:spPr>
           <a:xfrm>
-            <a:off x="6492240" y="2103120"/>
-            <a:ext cx="4937760" cy="1280160"/>
+            <a:off x="685800" y="2103120"/>
+            <a:ext cx="5212080" cy="365760"/>
           </a:xfrm>
           <a:prstGeom prst="rect">
             <a:avLst/>
@@ -4976,26 +5063,139 @@
           <a:p>
             <a:pPr algn="l"/>
             <a:r>
-              <a:rPr sz="1300" b="0" i="0">
+              <a:rPr sz="1300" b="1" i="0">
+                <a:solidFill>
+                  <a:srgbClr val="1A202C"/>
+                </a:solidFill>
+              </a:rPr>
+              <a:t>Currently tracked in Google Sheets</a:t>
+            </a:r>
+          </a:p>
+        </p:txBody>
+      </p:sp>
+      <p:sp>
+        <p:nvSpPr>
+          <p:cNvPr id="11" name="TextBox 10"/>
+          <p:cNvSpPr txBox="1"/>
+          <p:nvPr/>
+        </p:nvSpPr>
+        <p:spPr>
+          <a:xfrm>
+            <a:off x="685800" y="2514600"/>
+            <a:ext cx="5212080" cy="3840480"/>
+          </a:xfrm>
+          <a:prstGeom prst="rect">
+            <a:avLst/>
+          </a:prstGeom>
+          <a:noFill/>
+        </p:spPr>
+        <p:txBody>
+          <a:bodyPr wrap="square">
+            <a:spAutoFit/>
+          </a:bodyPr>
+          <a:lstStyle/>
+          <a:p>
+            <a:pPr algn="l">
+              <a:spcBef>
+                <a:spcPts val="400"/>
+              </a:spcBef>
+            </a:pPr>
+            <a:r>
+              <a:rPr sz="1300">
                 <a:solidFill>
                   <a:srgbClr val="4A5568"/>
                 </a:solidFill>
               </a:rPr>
-              <a:t>Doctor requests, antibiotic Clinical-Pathway approvals and specialist sign-offs travel via WhatsApp or physical forms.</a:t>
-            </a:r>
-          </a:p>
-        </p:txBody>
-      </p:sp>
-      <p:sp>
-        <p:nvSpPr>
-          <p:cNvPr id="13" name="Rectangle 12"/>
+              <a:t>❌  Dozens of tabs — hard to find the right drug at the right time</a:t>
+            </a:r>
+          </a:p>
+          <a:p>
+            <a:pPr algn="l">
+              <a:spcBef>
+                <a:spcPts val="400"/>
+              </a:spcBef>
+            </a:pPr>
+            <a:r>
+              <a:rPr sz="1300">
+                <a:solidFill>
+                  <a:srgbClr val="4A5568"/>
+                </a:solidFill>
+              </a:rPr>
+              <a:t>❌  Staff fill data into the wrong column or wrong tab</a:t>
+            </a:r>
+          </a:p>
+          <a:p>
+            <a:pPr algn="l">
+              <a:spcBef>
+                <a:spcPts val="400"/>
+              </a:spcBef>
+            </a:pPr>
+            <a:r>
+              <a:rPr sz="1300">
+                <a:solidFill>
+                  <a:srgbClr val="4A5568"/>
+                </a:solidFill>
+              </a:rPr>
+              <a:t>❌  No real-time visibility — sheets go stale between updates</a:t>
+            </a:r>
+          </a:p>
+          <a:p>
+            <a:pPr algn="l">
+              <a:spcBef>
+                <a:spcPts val="400"/>
+              </a:spcBef>
+            </a:pPr>
+            <a:r>
+              <a:rPr sz="1300">
+                <a:solidFill>
+                  <a:srgbClr val="4A5568"/>
+                </a:solidFill>
+              </a:rPr>
+              <a:t>❌  No workflow — approvals happen via WhatsApp or verbal</a:t>
+            </a:r>
+          </a:p>
+          <a:p>
+            <a:pPr algn="l">
+              <a:spcBef>
+                <a:spcPts val="400"/>
+              </a:spcBef>
+            </a:pPr>
+            <a:r>
+              <a:rPr sz="1300">
+                <a:solidFill>
+                  <a:srgbClr val="4A5568"/>
+                </a:solidFill>
+              </a:rPr>
+              <a:t>❌  No audit trail — impossible to trace who approved what</a:t>
+            </a:r>
+          </a:p>
+          <a:p>
+            <a:pPr algn="l">
+              <a:spcBef>
+                <a:spcPts val="400"/>
+              </a:spcBef>
+            </a:pPr>
+            <a:r>
+              <a:rPr sz="1300">
+                <a:solidFill>
+                  <a:srgbClr val="4A5568"/>
+                </a:solidFill>
+              </a:rPr>
+              <a:t>❌  MO, FMS, and pharmacist work from different versions</a:t>
+            </a:r>
+          </a:p>
+        </p:txBody>
+      </p:sp>
+      <p:sp>
+        <p:nvSpPr>
+          <p:cNvPr id="12" name="Rectangle 11"/>
           <p:cNvSpPr/>
           <p:nvPr/>
         </p:nvSpPr>
         <p:spPr>
           <a:xfrm>
-            <a:off x="457200" y="3840480"/>
-            <a:ext cx="5303520" cy="2103120"/>
+            <a:off x="6355080" y="1417320"/>
+            <a:ext cx="5486400" cy="5212080"/>
           </a:xfrm>
           <a:prstGeom prst="rect">
             <a:avLst/>
@@ -5031,88 +5231,20 @@
       </p:sp>
       <p:sp>
         <p:nvSpPr>
-          <p:cNvPr id="14" name="TextBox 13"/>
-          <p:cNvSpPr txBox="1"/>
-          <p:nvPr/>
-        </p:nvSpPr>
-        <p:spPr>
-          <a:xfrm>
-            <a:off x="640080" y="3977640"/>
-            <a:ext cx="4937760" cy="502920"/>
-          </a:xfrm>
-          <a:prstGeom prst="rect">
-            <a:avLst/>
-          </a:prstGeom>
-          <a:noFill/>
-        </p:spPr>
-        <p:txBody>
-          <a:bodyPr wrap="square">
-            <a:spAutoFit/>
-          </a:bodyPr>
-          <a:lstStyle/>
-          <a:p>
-            <a:pPr algn="l"/>
-            <a:r>
-              <a:rPr sz="1600" b="1" i="0">
-                <a:solidFill>
-                  <a:srgbClr val="1A202C"/>
-                </a:solidFill>
-              </a:rPr>
-              <a:t>📦  Blind Spots in Controlled Drugs</a:t>
-            </a:r>
-          </a:p>
-        </p:txBody>
-      </p:sp>
-      <p:sp>
-        <p:nvSpPr>
-          <p:cNvPr id="15" name="TextBox 14"/>
-          <p:cNvSpPr txBox="1"/>
-          <p:nvPr/>
-        </p:nvSpPr>
-        <p:spPr>
-          <a:xfrm>
-            <a:off x="640080" y="4480560"/>
-            <a:ext cx="4937760" cy="1280160"/>
-          </a:xfrm>
-          <a:prstGeom prst="rect">
-            <a:avLst/>
-          </a:prstGeom>
-          <a:noFill/>
-        </p:spPr>
-        <p:txBody>
-          <a:bodyPr wrap="square">
-            <a:spAutoFit/>
-          </a:bodyPr>
-          <a:lstStyle/>
-          <a:p>
-            <a:pPr algn="l"/>
-            <a:r>
-              <a:rPr sz="1300" b="0" i="0">
-                <a:solidFill>
-                  <a:srgbClr val="4A5568"/>
-                </a:solidFill>
-              </a:rPr>
-              <a:t>No real-time visibility on controlled-drug quotas, leading to over-dispensing or patient denials.</a:t>
-            </a:r>
-          </a:p>
-        </p:txBody>
-      </p:sp>
-      <p:sp>
-        <p:nvSpPr>
-          <p:cNvPr id="16" name="Rectangle 15"/>
+          <p:cNvPr id="13" name="Rectangle 12"/>
           <p:cNvSpPr/>
           <p:nvPr/>
         </p:nvSpPr>
         <p:spPr>
           <a:xfrm>
-            <a:off x="6309360" y="3840480"/>
-            <a:ext cx="5303520" cy="2103120"/>
-          </a:xfrm>
-          <a:prstGeom prst="rect">
-            <a:avLst/>
-          </a:prstGeom>
-          <a:solidFill>
-            <a:srgbClr val="FFFFFF"/>
+            <a:off x="6355080" y="1417320"/>
+            <a:ext cx="5486400" cy="64008"/>
+          </a:xfrm>
+          <a:prstGeom prst="rect">
+            <a:avLst/>
+          </a:prstGeom>
+          <a:solidFill>
+            <a:srgbClr val="F39C12"/>
           </a:solidFill>
           <a:ln>
             <a:noFill/>
@@ -5142,14 +5274,14 @@
       </p:sp>
       <p:sp>
         <p:nvSpPr>
-          <p:cNvPr id="17" name="TextBox 16"/>
+          <p:cNvPr id="14" name="TextBox 13"/>
           <p:cNvSpPr txBox="1"/>
           <p:nvPr/>
         </p:nvSpPr>
         <p:spPr>
           <a:xfrm>
-            <a:off x="6492240" y="3977640"/>
-            <a:ext cx="4937760" cy="502920"/>
+            <a:off x="6537960" y="1508760"/>
+            <a:ext cx="5212080" cy="548640"/>
           </a:xfrm>
           <a:prstGeom prst="rect">
             <a:avLst/>
@@ -5164,26 +5296,26 @@
           <a:p>
             <a:pPr algn="l"/>
             <a:r>
-              <a:rPr sz="1600" b="1" i="0">
-                <a:solidFill>
-                  <a:srgbClr val="1A202C"/>
-                </a:solidFill>
-              </a:rPr>
-              <a:t>🔁  Disconnected Teams</a:t>
-            </a:r>
-          </a:p>
-        </p:txBody>
-      </p:sp>
-      <p:sp>
-        <p:nvSpPr>
-          <p:cNvPr id="18" name="TextBox 17"/>
+              <a:rPr sz="1700" b="1" i="0">
+                <a:solidFill>
+                  <a:srgbClr val="F39C12"/>
+                </a:solidFill>
+              </a:rPr>
+              <a:t>💉  Antibiotic Approval Forms</a:t>
+            </a:r>
+          </a:p>
+        </p:txBody>
+      </p:sp>
+      <p:sp>
+        <p:nvSpPr>
+          <p:cNvPr id="15" name="TextBox 14"/>
           <p:cNvSpPr txBox="1"/>
           <p:nvPr/>
         </p:nvSpPr>
         <p:spPr>
           <a:xfrm>
-            <a:off x="6492240" y="4480560"/>
-            <a:ext cx="4937760" cy="1280160"/>
+            <a:off x="6537960" y="2103120"/>
+            <a:ext cx="5212080" cy="365760"/>
           </a:xfrm>
           <a:prstGeom prst="rect">
             <a:avLst/>
@@ -5198,12 +5330,125 @@
           <a:p>
             <a:pPr algn="l"/>
             <a:r>
-              <a:rPr sz="1300" b="0" i="0">
+              <a:rPr sz="1300" b="1" i="0">
+                <a:solidFill>
+                  <a:srgbClr val="1A202C"/>
+                </a:solidFill>
+              </a:rPr>
+              <a:t>Currently done on physical A4 photocopied sheets</a:t>
+            </a:r>
+          </a:p>
+        </p:txBody>
+      </p:sp>
+      <p:sp>
+        <p:nvSpPr>
+          <p:cNvPr id="16" name="TextBox 15"/>
+          <p:cNvSpPr txBox="1"/>
+          <p:nvPr/>
+        </p:nvSpPr>
+        <p:spPr>
+          <a:xfrm>
+            <a:off x="6537960" y="2514600"/>
+            <a:ext cx="5212080" cy="3840480"/>
+          </a:xfrm>
+          <a:prstGeom prst="rect">
+            <a:avLst/>
+          </a:prstGeom>
+          <a:noFill/>
+        </p:spPr>
+        <p:txBody>
+          <a:bodyPr wrap="square">
+            <a:spAutoFit/>
+          </a:bodyPr>
+          <a:lstStyle/>
+          <a:p>
+            <a:pPr algn="l">
+              <a:spcBef>
+                <a:spcPts val="400"/>
+              </a:spcBef>
+            </a:pPr>
+            <a:r>
+              <a:rPr sz="1300">
                 <a:solidFill>
                   <a:srgbClr val="4A5568"/>
                 </a:solidFill>
               </a:rPr>
-              <a:t>MOs, FMS specialists, and pharmacists work in silos — no shared state, no audit trail.</a:t>
+              <a:t>❌  Printing and photocopying cost for every form</a:t>
+            </a:r>
+          </a:p>
+          <a:p>
+            <a:pPr algn="l">
+              <a:spcBef>
+                <a:spcPts val="400"/>
+              </a:spcBef>
+            </a:pPr>
+            <a:r>
+              <a:rPr sz="1300">
+                <a:solidFill>
+                  <a:srgbClr val="4A5568"/>
+                </a:solidFill>
+              </a:rPr>
+              <a:t>❌  Paper forms lost, damaged, or illegible</a:t>
+            </a:r>
+          </a:p>
+          <a:p>
+            <a:pPr algn="l">
+              <a:spcBef>
+                <a:spcPts val="400"/>
+              </a:spcBef>
+            </a:pPr>
+            <a:r>
+              <a:rPr sz="1300">
+                <a:solidFill>
+                  <a:srgbClr val="4A5568"/>
+                </a:solidFill>
+              </a:rPr>
+              <a:t>❌  Physical routing between MO → FMS → pharmacy is slow</a:t>
+            </a:r>
+          </a:p>
+          <a:p>
+            <a:pPr algn="l">
+              <a:spcBef>
+                <a:spcPts val="400"/>
+              </a:spcBef>
+            </a:pPr>
+            <a:r>
+              <a:rPr sz="1300">
+                <a:solidFill>
+                  <a:srgbClr val="4A5568"/>
+                </a:solidFill>
+              </a:rPr>
+              <a:t>❌  No status visibility — MO doesn't know if form was approved</a:t>
+            </a:r>
+          </a:p>
+          <a:p>
+            <a:pPr algn="l">
+              <a:spcBef>
+                <a:spcPts val="400"/>
+              </a:spcBef>
+            </a:pPr>
+            <a:r>
+              <a:rPr sz="1300">
+                <a:solidFill>
+                  <a:srgbClr val="4A5568"/>
+                </a:solidFill>
+              </a:rPr>
+              <a:t>❌  Storage &amp; filing burden for compliance records</a:t>
+            </a:r>
+          </a:p>
+          <a:p>
+            <a:pPr algn="l">
+              <a:spcBef>
+                <a:spcPts val="400"/>
+              </a:spcBef>
+            </a:pPr>
+            <a:r>
+              <a:rPr sz="1300">
+                <a:solidFill>
+                  <a:srgbClr val="4A5568"/>
+                </a:solidFill>
+              </a:rPr>
+              <a:t>❌  Cannot search historical forms quickly</a:t>
             </a:r>
           </a:p>
         </p:txBody>
@@ -5314,7 +5559,75 @@
       </p:sp>
       <p:sp>
         <p:nvSpPr>
-          <p:cNvPr id="4" name="Rectangle 3"/>
+          <p:cNvPr id="4" name="TextBox 3"/>
+          <p:cNvSpPr txBox="1"/>
+          <p:nvPr/>
+        </p:nvSpPr>
+        <p:spPr>
+          <a:xfrm>
+            <a:off x="502920" y="201168"/>
+            <a:ext cx="10058400" cy="777240"/>
+          </a:xfrm>
+          <a:prstGeom prst="rect">
+            <a:avLst/>
+          </a:prstGeom>
+          <a:noFill/>
+        </p:spPr>
+        <p:txBody>
+          <a:bodyPr wrap="square">
+            <a:spAutoFit/>
+          </a:bodyPr>
+          <a:lstStyle/>
+          <a:p>
+            <a:pPr algn="l"/>
+            <a:r>
+              <a:rPr sz="3200" b="1" i="0">
+                <a:solidFill>
+                  <a:srgbClr val="FFFFFF"/>
+                </a:solidFill>
+              </a:rPr>
+              <a:t>Our Solution</a:t>
+            </a:r>
+          </a:p>
+        </p:txBody>
+      </p:sp>
+      <p:sp>
+        <p:nvSpPr>
+          <p:cNvPr id="5" name="TextBox 4"/>
+          <p:cNvSpPr txBox="1"/>
+          <p:nvPr/>
+        </p:nvSpPr>
+        <p:spPr>
+          <a:xfrm>
+            <a:off x="502920" y="804672"/>
+            <a:ext cx="10058400" cy="438912"/>
+          </a:xfrm>
+          <a:prstGeom prst="rect">
+            <a:avLst/>
+          </a:prstGeom>
+          <a:noFill/>
+        </p:spPr>
+        <p:txBody>
+          <a:bodyPr wrap="square">
+            <a:spAutoFit/>
+          </a:bodyPr>
+          <a:lstStyle/>
+          <a:p>
+            <a:pPr algn="l"/>
+            <a:r>
+              <a:rPr sz="1500" b="0" i="0">
+                <a:solidFill>
+                  <a:srgbClr val="B0C8E8"/>
+                </a:solidFill>
+              </a:rPr>
+              <a:t>One system to replace Google Sheets and paper forms — with full workflow, visibility, and audit trail</a:t>
+            </a:r>
+          </a:p>
+        </p:txBody>
+      </p:sp>
+      <p:sp>
+        <p:nvSpPr>
+          <p:cNvPr id="6" name="Rectangle 5"/>
           <p:cNvSpPr/>
           <p:nvPr/>
         </p:nvSpPr>
@@ -5357,74 +5670,6 @@
       </p:sp>
       <p:sp>
         <p:nvSpPr>
-          <p:cNvPr id="5" name="TextBox 4"/>
-          <p:cNvSpPr txBox="1"/>
-          <p:nvPr/>
-        </p:nvSpPr>
-        <p:spPr>
-          <a:xfrm>
-            <a:off x="502920" y="228600"/>
-            <a:ext cx="9144000" cy="731520"/>
-          </a:xfrm>
-          <a:prstGeom prst="rect">
-            <a:avLst/>
-          </a:prstGeom>
-          <a:noFill/>
-        </p:spPr>
-        <p:txBody>
-          <a:bodyPr wrap="square">
-            <a:spAutoFit/>
-          </a:bodyPr>
-          <a:lstStyle/>
-          <a:p>
-            <a:pPr algn="l"/>
-            <a:r>
-              <a:rPr sz="3200" b="1" i="0">
-                <a:solidFill>
-                  <a:srgbClr val="FFFFFF"/>
-                </a:solidFill>
-              </a:rPr>
-              <a:t>Our Solution</a:t>
-            </a:r>
-          </a:p>
-        </p:txBody>
-      </p:sp>
-      <p:sp>
-        <p:nvSpPr>
-          <p:cNvPr id="6" name="TextBox 5"/>
-          <p:cNvSpPr txBox="1"/>
-          <p:nvPr/>
-        </p:nvSpPr>
-        <p:spPr>
-          <a:xfrm>
-            <a:off x="502920" y="777240"/>
-            <a:ext cx="10058400" cy="457200"/>
-          </a:xfrm>
-          <a:prstGeom prst="rect">
-            <a:avLst/>
-          </a:prstGeom>
-          <a:noFill/>
-        </p:spPr>
-        <p:txBody>
-          <a:bodyPr wrap="square">
-            <a:spAutoFit/>
-          </a:bodyPr>
-          <a:lstStyle/>
-          <a:p>
-            <a:pPr algn="l"/>
-            <a:r>
-              <a:rPr sz="1500" b="0" i="0">
-                <a:solidFill>
-                  <a:srgbClr val="B0C8E8"/>
-                </a:solidFill>
-              </a:rPr>
-              <a:t>A unified, role-aware web app that digitises every step of clinic pharmacy operations</a:t>
-            </a:r>
-          </a:p>
-        </p:txBody>
-      </p:sp>
-      <p:sp>
-        <p:nvSpPr>
           <p:cNvPr id="7" name="Rectangle 6"/>
           <p:cNvSpPr/>
           <p:nvPr/>
@@ -5432,7 +5677,7 @@
         <p:spPr>
           <a:xfrm>
             <a:off x="365760" y="1508760"/>
-            <a:ext cx="3657600" cy="2103120"/>
+            <a:ext cx="3566160" cy="2103120"/>
           </a:xfrm>
           <a:prstGeom prst="rect">
             <a:avLst/>
@@ -5475,13 +5720,13 @@
         <p:spPr>
           <a:xfrm>
             <a:off x="365760" y="1508760"/>
-            <a:ext cx="3657600" cy="54864"/>
-          </a:xfrm>
-          <a:prstGeom prst="rect">
-            <a:avLst/>
-          </a:prstGeom>
-          <a:solidFill>
-            <a:srgbClr val="27AE60"/>
+            <a:ext cx="3566160" cy="64008"/>
+          </a:xfrm>
+          <a:prstGeom prst="rect">
+            <a:avLst/>
+          </a:prstGeom>
+          <a:solidFill>
+            <a:srgbClr val="1B4F8A"/>
           </a:solidFill>
           <a:ln>
             <a:noFill/>
@@ -5517,7 +5762,7 @@
         </p:nvSpPr>
         <p:spPr>
           <a:xfrm>
-            <a:off x="548640" y="1645920"/>
+            <a:off x="548640" y="1673352"/>
             <a:ext cx="3291840" cy="502920"/>
           </a:xfrm>
           <a:prstGeom prst="rect">
@@ -5533,12 +5778,12 @@
           <a:p>
             <a:pPr algn="l"/>
             <a:r>
-              <a:rPr sz="1500" b="1" i="0">
+              <a:rPr sz="1400" b="1" i="0">
                 <a:solidFill>
                   <a:srgbClr val="1B4F8A"/>
                 </a:solidFill>
               </a:rPr>
-              <a:t>Real-Time Stock Ledger</a:t>
+              <a:t>✅  Replace Google Sheets</a:t>
             </a:r>
           </a:p>
         </p:txBody>
@@ -5551,8 +5796,8 @@
         </p:nvSpPr>
         <p:spPr>
           <a:xfrm>
-            <a:off x="548640" y="2148840"/>
-            <a:ext cx="3291840" cy="1280160"/>
+            <a:off x="548640" y="2194560"/>
+            <a:ext cx="3291840" cy="1234440"/>
           </a:xfrm>
           <a:prstGeom prst="rect">
             <a:avLst/>
@@ -5572,7 +5817,7 @@
                   <a:srgbClr val="4A5568"/>
                 </a:solidFill>
               </a:rPr>
-              <a:t>Live bin-card view computed from a tamper-evident transactions ledger. No sync lag.</a:t>
+              <a:t>A structured digital register for every quota drug — searchable, real-time, and impossible to fill in the wrong place.</a:t>
             </a:r>
           </a:p>
         </p:txBody>
@@ -5585,8 +5830,8 @@
         </p:nvSpPr>
         <p:spPr>
           <a:xfrm>
-            <a:off x="4251960" y="1508760"/>
-            <a:ext cx="3657600" cy="2103120"/>
+            <a:off x="4279392" y="1508760"/>
+            <a:ext cx="3566160" cy="2103120"/>
           </a:xfrm>
           <a:prstGeom prst="rect">
             <a:avLst/>
@@ -5628,8 +5873,8 @@
         </p:nvSpPr>
         <p:spPr>
           <a:xfrm>
-            <a:off x="4251960" y="1508760"/>
-            <a:ext cx="3657600" cy="54864"/>
+            <a:off x="4279392" y="1508760"/>
+            <a:ext cx="3566160" cy="64008"/>
           </a:xfrm>
           <a:prstGeom prst="rect">
             <a:avLst/>
@@ -5671,7 +5916,7 @@
         </p:nvSpPr>
         <p:spPr>
           <a:xfrm>
-            <a:off x="4434840" y="1645920"/>
+            <a:off x="4462272" y="1673352"/>
             <a:ext cx="3291840" cy="502920"/>
           </a:xfrm>
           <a:prstGeom prst="rect">
@@ -5687,12 +5932,12 @@
           <a:p>
             <a:pPr algn="l"/>
             <a:r>
-              <a:rPr sz="1500" b="1" i="0">
-                <a:solidFill>
-                  <a:srgbClr val="1B4F8A"/>
-                </a:solidFill>
-              </a:rPr>
-              <a:t>Multi-Step Approval Flow</a:t>
+              <a:rPr sz="1400" b="1" i="0">
+                <a:solidFill>
+                  <a:srgbClr val="27AE60"/>
+                </a:solidFill>
+              </a:rPr>
+              <a:t>✅  Replace Paper Forms</a:t>
             </a:r>
           </a:p>
         </p:txBody>
@@ -5705,8 +5950,8 @@
         </p:nvSpPr>
         <p:spPr>
           <a:xfrm>
-            <a:off x="4434840" y="2148840"/>
-            <a:ext cx="3291840" cy="1280160"/>
+            <a:off x="4462272" y="2194560"/>
+            <a:ext cx="3291840" cy="1234440"/>
           </a:xfrm>
           <a:prstGeom prst="rect">
             <a:avLst/>
@@ -5726,7 +5971,7 @@
                   <a:srgbClr val="4A5568"/>
                 </a:solidFill>
               </a:rPr>
-              <a:t>MO request → FMS review → Pharmacist fulfilment. Every handoff is timestamped and auditable.</a:t>
+              <a:t>Antibiotic Clinical Pathway forms (NAG 2024) submitted digitally. Zero printing cost, zero lost forms, instant routing.</a:t>
             </a:r>
           </a:p>
         </p:txBody>
@@ -5739,8 +5984,8 @@
         </p:nvSpPr>
         <p:spPr>
           <a:xfrm>
-            <a:off x="8138160" y="1508760"/>
-            <a:ext cx="3657600" cy="2103120"/>
+            <a:off x="8193024" y="1508760"/>
+            <a:ext cx="3566160" cy="2103120"/>
           </a:xfrm>
           <a:prstGeom prst="rect">
             <a:avLst/>
@@ -5782,14 +6027,14 @@
         </p:nvSpPr>
         <p:spPr>
           <a:xfrm>
-            <a:off x="8138160" y="1508760"/>
-            <a:ext cx="3657600" cy="54864"/>
-          </a:xfrm>
-          <a:prstGeom prst="rect">
-            <a:avLst/>
-          </a:prstGeom>
-          <a:solidFill>
-            <a:srgbClr val="27AE60"/>
+            <a:off x="8193024" y="1508760"/>
+            <a:ext cx="3566160" cy="64008"/>
+          </a:xfrm>
+          <a:prstGeom prst="rect">
+            <a:avLst/>
+          </a:prstGeom>
+          <a:solidFill>
+            <a:srgbClr val="2D86C9"/>
           </a:solidFill>
           <a:ln>
             <a:noFill/>
@@ -5825,7 +6070,7 @@
         </p:nvSpPr>
         <p:spPr>
           <a:xfrm>
-            <a:off x="8321040" y="1645920"/>
+            <a:off x="8375904" y="1673352"/>
             <a:ext cx="3291840" cy="502920"/>
           </a:xfrm>
           <a:prstGeom prst="rect">
@@ -5841,12 +6086,12 @@
           <a:p>
             <a:pPr algn="l"/>
             <a:r>
-              <a:rPr sz="1500" b="1" i="0">
-                <a:solidFill>
-                  <a:srgbClr val="1B4F8A"/>
-                </a:solidFill>
-              </a:rPr>
-              <a:t>Antibiotic Stewardship</a:t>
+              <a:rPr sz="1400" b="1" i="0">
+                <a:solidFill>
+                  <a:srgbClr val="2D86C9"/>
+                </a:solidFill>
+              </a:rPr>
+              <a:t>✅  Structured Workflow</a:t>
             </a:r>
           </a:p>
         </p:txBody>
@@ -5859,8 +6104,8 @@
         </p:nvSpPr>
         <p:spPr>
           <a:xfrm>
-            <a:off x="8321040" y="2148840"/>
-            <a:ext cx="3291840" cy="1280160"/>
+            <a:off x="8375904" y="2194560"/>
+            <a:ext cx="3291840" cy="1234440"/>
           </a:xfrm>
           <a:prstGeom prst="rect">
             <a:avLst/>
@@ -5880,7 +6125,7 @@
                   <a:srgbClr val="4A5568"/>
                 </a:solidFill>
               </a:rPr>
-              <a:t>NAG 2024 Clinical Pathway forms built in. FMS approves; pharmacist acknowledges before dispensing.</a:t>
+              <a:t>MO submits → FMS reviews &amp; approves → Pharmacy acknowledges. Every step is tracked with a timestamp and a name.</a:t>
             </a:r>
           </a:p>
         </p:txBody>
@@ -5894,7 +6139,7 @@
         <p:spPr>
           <a:xfrm>
             <a:off x="365760" y="3840480"/>
-            <a:ext cx="3657600" cy="2103120"/>
+            <a:ext cx="3566160" cy="2103120"/>
           </a:xfrm>
           <a:prstGeom prst="rect">
             <a:avLst/>
@@ -5937,13 +6182,13 @@
         <p:spPr>
           <a:xfrm>
             <a:off x="365760" y="3840480"/>
-            <a:ext cx="3657600" cy="54864"/>
-          </a:xfrm>
-          <a:prstGeom prst="rect">
-            <a:avLst/>
-          </a:prstGeom>
-          <a:solidFill>
-            <a:srgbClr val="27AE60"/>
+            <a:ext cx="3566160" cy="64008"/>
+          </a:xfrm>
+          <a:prstGeom prst="rect">
+            <a:avLst/>
+          </a:prstGeom>
+          <a:solidFill>
+            <a:srgbClr val="F39C12"/>
           </a:solidFill>
           <a:ln>
             <a:noFill/>
@@ -5979,7 +6224,7 @@
         </p:nvSpPr>
         <p:spPr>
           <a:xfrm>
-            <a:off x="548640" y="3977640"/>
+            <a:off x="548640" y="4005072"/>
             <a:ext cx="3291840" cy="502920"/>
           </a:xfrm>
           <a:prstGeom prst="rect">
@@ -5995,12 +6240,12 @@
           <a:p>
             <a:pPr algn="l"/>
             <a:r>
-              <a:rPr sz="1500" b="1" i="0">
-                <a:solidFill>
-                  <a:srgbClr val="1B4F8A"/>
-                </a:solidFill>
-              </a:rPr>
-              <a:t>Quota Tracking</a:t>
+              <a:rPr sz="1400" b="1" i="0">
+                <a:solidFill>
+                  <a:srgbClr val="F39C12"/>
+                </a:solidFill>
+              </a:rPr>
+              <a:t>✅  Real-Time Visibility</a:t>
             </a:r>
           </a:p>
         </p:txBody>
@@ -6013,8 +6258,8 @@
         </p:nvSpPr>
         <p:spPr>
           <a:xfrm>
-            <a:off x="548640" y="4480560"/>
-            <a:ext cx="3291840" cy="1280160"/>
+            <a:off x="548640" y="4526280"/>
+            <a:ext cx="3291840" cy="1234440"/>
           </a:xfrm>
           <a:prstGeom prst="rect">
             <a:avLst/>
@@ -6034,7 +6279,7 @@
                   <a:srgbClr val="4A5568"/>
                 </a:solidFill>
               </a:rPr>
-              <a:t>Annual controlled-drug quota per patient visible in real time; pesara (retiree) quota tracked separately.</a:t>
+              <a:t>All parties — MO, FMS, pharmacist — see the live status of every request. No chasing via WhatsApp.</a:t>
             </a:r>
           </a:p>
         </p:txBody>
@@ -6047,8 +6292,8 @@
         </p:nvSpPr>
         <p:spPr>
           <a:xfrm>
-            <a:off x="4251960" y="3840480"/>
-            <a:ext cx="3657600" cy="2103120"/>
+            <a:off x="4279392" y="3840480"/>
+            <a:ext cx="3566160" cy="2103120"/>
           </a:xfrm>
           <a:prstGeom prst="rect">
             <a:avLst/>
@@ -6090,14 +6335,14 @@
         </p:nvSpPr>
         <p:spPr>
           <a:xfrm>
-            <a:off x="4251960" y="3840480"/>
-            <a:ext cx="3657600" cy="54864"/>
-          </a:xfrm>
-          <a:prstGeom prst="rect">
-            <a:avLst/>
-          </a:prstGeom>
-          <a:solidFill>
-            <a:srgbClr val="27AE60"/>
+            <a:off x="4279392" y="3840480"/>
+            <a:ext cx="3566160" cy="64008"/>
+          </a:xfrm>
+          <a:prstGeom prst="rect">
+            <a:avLst/>
+          </a:prstGeom>
+          <a:solidFill>
+            <a:srgbClr val="8E44AD"/>
           </a:solidFill>
           <a:ln>
             <a:noFill/>
@@ -6133,7 +6378,7 @@
         </p:nvSpPr>
         <p:spPr>
           <a:xfrm>
-            <a:off x="4434840" y="3977640"/>
+            <a:off x="4462272" y="4005072"/>
             <a:ext cx="3291840" cy="502920"/>
           </a:xfrm>
           <a:prstGeom prst="rect">
@@ -6149,12 +6394,12 @@
           <a:p>
             <a:pPr algn="l"/>
             <a:r>
-              <a:rPr sz="1500" b="1" i="0">
-                <a:solidFill>
-                  <a:srgbClr val="1B4F8A"/>
-                </a:solidFill>
-              </a:rPr>
-              <a:t>Role-Based Dashboards</a:t>
+              <a:rPr sz="1400" b="1" i="0">
+                <a:solidFill>
+                  <a:srgbClr val="8E44AD"/>
+                </a:solidFill>
+              </a:rPr>
+              <a:t>✅  Full Audit Trail</a:t>
             </a:r>
           </a:p>
         </p:txBody>
@@ -6167,8 +6412,8 @@
         </p:nvSpPr>
         <p:spPr>
           <a:xfrm>
-            <a:off x="4434840" y="4480560"/>
-            <a:ext cx="3291840" cy="1280160"/>
+            <a:off x="4462272" y="4526280"/>
+            <a:ext cx="3291840" cy="1234440"/>
           </a:xfrm>
           <a:prstGeom prst="rect">
             <a:avLst/>
@@ -6188,7 +6433,7 @@
                   <a:srgbClr val="4A5568"/>
                 </a:solidFill>
               </a:rPr>
-              <a:t>Each role (admin, pharmacist, MO, FMS) sees only what they need — pending counts, stock alerts, approval queues.</a:t>
+              <a:t>Every approval, rejection, and acknowledgement is logged with the user's name, role, and timestamp. Compliance-ready.</a:t>
             </a:r>
           </a:p>
         </p:txBody>
@@ -6201,8 +6446,8 @@
         </p:nvSpPr>
         <p:spPr>
           <a:xfrm>
-            <a:off x="8138160" y="3840480"/>
-            <a:ext cx="3657600" cy="2103120"/>
+            <a:off x="8193024" y="3840480"/>
+            <a:ext cx="3566160" cy="2103120"/>
           </a:xfrm>
           <a:prstGeom prst="rect">
             <a:avLst/>
@@ -6244,14 +6489,14 @@
         </p:nvSpPr>
         <p:spPr>
           <a:xfrm>
-            <a:off x="8138160" y="3840480"/>
-            <a:ext cx="3657600" cy="54864"/>
-          </a:xfrm>
-          <a:prstGeom prst="rect">
-            <a:avLst/>
-          </a:prstGeom>
-          <a:solidFill>
-            <a:srgbClr val="27AE60"/>
+            <a:off x="8193024" y="3840480"/>
+            <a:ext cx="3566160" cy="64008"/>
+          </a:xfrm>
+          <a:prstGeom prst="rect">
+            <a:avLst/>
+          </a:prstGeom>
+          <a:solidFill>
+            <a:srgbClr val="167A6A"/>
           </a:solidFill>
           <a:ln>
             <a:noFill/>
@@ -6287,7 +6532,7 @@
         </p:nvSpPr>
         <p:spPr>
           <a:xfrm>
-            <a:off x="8321040" y="3977640"/>
+            <a:off x="8375904" y="4005072"/>
             <a:ext cx="3291840" cy="502920"/>
           </a:xfrm>
           <a:prstGeom prst="rect">
@@ -6303,12 +6548,12 @@
           <a:p>
             <a:pPr algn="l"/>
             <a:r>
-              <a:rPr sz="1500" b="1" i="0">
-                <a:solidFill>
-                  <a:srgbClr val="1B4F8A"/>
-                </a:solidFill>
-              </a:rPr>
-              <a:t>Audit &amp; Reports</a:t>
+              <a:rPr sz="1400" b="1" i="0">
+                <a:solidFill>
+                  <a:srgbClr val="167A6A"/>
+                </a:solidFill>
+              </a:rPr>
+              <a:t>✅  Lean &amp; Paperless</a:t>
             </a:r>
           </a:p>
         </p:txBody>
@@ -6321,8 +6566,8 @@
         </p:nvSpPr>
         <p:spPr>
           <a:xfrm>
-            <a:off x="8321040" y="4480560"/>
-            <a:ext cx="3291840" cy="1280160"/>
+            <a:off x="8375904" y="4526280"/>
+            <a:ext cx="3291840" cy="1234440"/>
           </a:xfrm>
           <a:prstGeom prst="rect">
             <a:avLst/>
@@ -6342,7 +6587,7 @@
                   <a:srgbClr val="4A5568"/>
                 </a:solidFill>
               </a:rPr>
-              <a:t>Full ledger history, patient drug records, and exportable laporan. AI audit log for every AI-assisted action.</a:t>
+              <a:t>Eliminate photocopy costs, A4 waste, filing cabinets, and manual data entry errors. A truly lean clinic operation.</a:t>
             </a:r>
           </a:p>
         </p:txBody>
@@ -6380,7 +6625,7 @@
             <a:avLst/>
           </a:prstGeom>
           <a:solidFill>
-            <a:srgbClr val="FFFFFF"/>
+            <a:srgbClr val="F0F4F8"/>
           </a:solidFill>
           <a:ln>
             <a:noFill/>
@@ -6453,7 +6698,75 @@
       </p:sp>
       <p:sp>
         <p:nvSpPr>
-          <p:cNvPr id="4" name="Rectangle 3"/>
+          <p:cNvPr id="4" name="TextBox 3"/>
+          <p:cNvSpPr txBox="1"/>
+          <p:nvPr/>
+        </p:nvSpPr>
+        <p:spPr>
+          <a:xfrm>
+            <a:off x="502920" y="201168"/>
+            <a:ext cx="10058400" cy="777240"/>
+          </a:xfrm>
+          <a:prstGeom prst="rect">
+            <a:avLst/>
+          </a:prstGeom>
+          <a:noFill/>
+        </p:spPr>
+        <p:txBody>
+          <a:bodyPr wrap="square">
+            <a:spAutoFit/>
+          </a:bodyPr>
+          <a:lstStyle/>
+          <a:p>
+            <a:pPr algn="l"/>
+            <a:r>
+              <a:rPr sz="3200" b="1" i="0">
+                <a:solidFill>
+                  <a:srgbClr val="FFFFFF"/>
+                </a:solidFill>
+              </a:rPr>
+              <a:t>Workflow 1 — Quota Drug Request</a:t>
+            </a:r>
+          </a:p>
+        </p:txBody>
+      </p:sp>
+      <p:sp>
+        <p:nvSpPr>
+          <p:cNvPr id="5" name="TextBox 4"/>
+          <p:cNvSpPr txBox="1"/>
+          <p:nvPr/>
+        </p:nvSpPr>
+        <p:spPr>
+          <a:xfrm>
+            <a:off x="502920" y="804672"/>
+            <a:ext cx="10058400" cy="438912"/>
+          </a:xfrm>
+          <a:prstGeom prst="rect">
+            <a:avLst/>
+          </a:prstGeom>
+          <a:noFill/>
+        </p:spPr>
+        <p:txBody>
+          <a:bodyPr wrap="square">
+            <a:spAutoFit/>
+          </a:bodyPr>
+          <a:lstStyle/>
+          <a:p>
+            <a:pPr algn="l"/>
+            <a:r>
+              <a:rPr sz="1500" b="0" i="0">
+                <a:solidFill>
+                  <a:srgbClr val="B0C8E8"/>
+                </a:solidFill>
+              </a:rPr>
+              <a:t>MO issues a new quota drug to a patient: end-to-end digital, fully tracked</a:t>
+            </a:r>
+          </a:p>
+        </p:txBody>
+      </p:sp>
+      <p:sp>
+        <p:nvSpPr>
+          <p:cNvPr id="6" name="Rectangle 5"/>
           <p:cNvSpPr/>
           <p:nvPr/>
         </p:nvSpPr>
@@ -6466,7 +6779,7 @@
             <a:avLst/>
           </a:prstGeom>
           <a:solidFill>
-            <a:srgbClr val="F39C12"/>
+            <a:srgbClr val="1B4F8A"/>
           </a:solidFill>
           <a:ln>
             <a:noFill/>
@@ -6496,88 +6809,20 @@
       </p:sp>
       <p:sp>
         <p:nvSpPr>
-          <p:cNvPr id="5" name="TextBox 4"/>
-          <p:cNvSpPr txBox="1"/>
-          <p:nvPr/>
-        </p:nvSpPr>
-        <p:spPr>
-          <a:xfrm>
-            <a:off x="502920" y="228600"/>
-            <a:ext cx="9144000" cy="731520"/>
-          </a:xfrm>
-          <a:prstGeom prst="rect">
-            <a:avLst/>
-          </a:prstGeom>
-          <a:noFill/>
-        </p:spPr>
-        <p:txBody>
-          <a:bodyPr wrap="square">
-            <a:spAutoFit/>
-          </a:bodyPr>
-          <a:lstStyle/>
-          <a:p>
-            <a:pPr algn="l"/>
-            <a:r>
-              <a:rPr sz="3200" b="1" i="0">
-                <a:solidFill>
-                  <a:srgbClr val="FFFFFF"/>
-                </a:solidFill>
-              </a:rPr>
-              <a:t>How It Works</a:t>
-            </a:r>
-          </a:p>
-        </p:txBody>
-      </p:sp>
-      <p:sp>
-        <p:nvSpPr>
-          <p:cNvPr id="6" name="TextBox 5"/>
-          <p:cNvSpPr txBox="1"/>
-          <p:nvPr/>
-        </p:nvSpPr>
-        <p:spPr>
-          <a:xfrm>
-            <a:off x="502920" y="777240"/>
-            <a:ext cx="10058400" cy="457200"/>
-          </a:xfrm>
-          <a:prstGeom prst="rect">
-            <a:avLst/>
-          </a:prstGeom>
-          <a:noFill/>
-        </p:spPr>
-        <p:txBody>
-          <a:bodyPr wrap="square">
-            <a:spAutoFit/>
-          </a:bodyPr>
-          <a:lstStyle/>
-          <a:p>
-            <a:pPr algn="l"/>
-            <a:r>
-              <a:rPr sz="1500" b="0" i="0">
-                <a:solidFill>
-                  <a:srgbClr val="B0C8E8"/>
-                </a:solidFill>
-              </a:rPr>
-              <a:t>End-to-end digital workflow from request to dispensing</a:t>
-            </a:r>
-          </a:p>
-        </p:txBody>
-      </p:sp>
-      <p:sp>
-        <p:nvSpPr>
           <p:cNvPr id="7" name="Rectangle 6"/>
           <p:cNvSpPr/>
           <p:nvPr/>
         </p:nvSpPr>
         <p:spPr>
           <a:xfrm>
-            <a:off x="457200" y="1554480"/>
-            <a:ext cx="2377440" cy="3474720"/>
-          </a:xfrm>
-          <a:prstGeom prst="rect">
-            <a:avLst/>
-          </a:prstGeom>
-          <a:solidFill>
-            <a:srgbClr val="F0F4F8"/>
+            <a:off x="0" y="0"/>
+            <a:ext cx="12188952" cy="6858000"/>
+          </a:xfrm>
+          <a:prstGeom prst="rect">
+            <a:avLst/>
+          </a:prstGeom>
+          <a:solidFill>
+            <a:srgbClr val="FFFFFF"/>
           </a:solidFill>
           <a:ln>
             <a:noFill/>
@@ -6613,8 +6858,8 @@
         </p:nvSpPr>
         <p:spPr>
           <a:xfrm>
-            <a:off x="457200" y="1554480"/>
-            <a:ext cx="2377440" cy="54864"/>
+            <a:off x="0" y="0"/>
+            <a:ext cx="12188952" cy="1280160"/>
           </a:xfrm>
           <a:prstGeom prst="rect">
             <a:avLst/>
@@ -6650,20 +6895,20 @@
       </p:sp>
       <p:sp>
         <p:nvSpPr>
-          <p:cNvPr id="9" name="Oval 8"/>
+          <p:cNvPr id="9" name="Rectangle 8"/>
           <p:cNvSpPr/>
           <p:nvPr/>
         </p:nvSpPr>
         <p:spPr>
           <a:xfrm>
-            <a:off x="1280160" y="1691640"/>
-            <a:ext cx="731520" cy="731520"/>
-          </a:xfrm>
-          <a:prstGeom prst="ellipse">
-            <a:avLst/>
-          </a:prstGeom>
-          <a:solidFill>
-            <a:srgbClr val="1B4F8A"/>
+            <a:off x="0" y="0"/>
+            <a:ext cx="228600" cy="6858000"/>
+          </a:xfrm>
+          <a:prstGeom prst="rect">
+            <a:avLst/>
+          </a:prstGeom>
+          <a:solidFill>
+            <a:srgbClr val="F39C12"/>
           </a:solidFill>
           <a:ln>
             <a:noFill/>
@@ -6684,18 +6929,10 @@
           </a:fontRef>
         </p:style>
         <p:txBody>
-          <a:bodyPr rtlCol="0" anchor="ctr" wrap="none"/>
-          <a:lstStyle/>
-          <a:p>
-            <a:pPr algn="ctr"/>
-            <a:r>
-              <a:rPr sz="1800" b="1">
-                <a:solidFill>
-                  <a:srgbClr val="FFFFFF"/>
-                </a:solidFill>
-              </a:rPr>
-              <a:t>1</a:t>
-            </a:r>
+          <a:bodyPr rtlCol="0" anchor="ctr"/>
+          <a:lstStyle/>
+          <a:p>
+            <a:pPr algn="ctr"/>
           </a:p>
         </p:txBody>
       </p:sp>
@@ -6707,8 +6944,8 @@
         </p:nvSpPr>
         <p:spPr>
           <a:xfrm>
-            <a:off x="594360" y="2560320"/>
-            <a:ext cx="2103120" cy="731520"/>
+            <a:off x="502920" y="201168"/>
+            <a:ext cx="10058400" cy="777240"/>
           </a:xfrm>
           <a:prstGeom prst="rect">
             <a:avLst/>
@@ -6721,15 +6958,14 @@
           </a:bodyPr>
           <a:lstStyle/>
           <a:p>
-            <a:pPr algn="ctr"/>
-            <a:r>
-              <a:rPr sz="1500" b="1" i="0">
-                <a:solidFill>
-                  <a:srgbClr val="1A202C"/>
-                </a:solidFill>
-              </a:rPr>
-              <a:t>MO Submits
-Request</a:t>
+            <a:pPr algn="l"/>
+            <a:r>
+              <a:rPr sz="3200" b="1" i="0">
+                <a:solidFill>
+                  <a:srgbClr val="FFFFFF"/>
+                </a:solidFill>
+              </a:rPr>
+              <a:t>Workflow 1 — Quota Drug Request</a:t>
             </a:r>
           </a:p>
         </p:txBody>
@@ -6742,8 +6978,8 @@
         </p:nvSpPr>
         <p:spPr>
           <a:xfrm>
-            <a:off x="594360" y="3337560"/>
-            <a:ext cx="2103120" cy="1463040"/>
+            <a:off x="502920" y="804672"/>
+            <a:ext cx="10058400" cy="438912"/>
           </a:xfrm>
           <a:prstGeom prst="rect">
             <a:avLst/>
@@ -6756,64 +6992,28 @@
           </a:bodyPr>
           <a:lstStyle/>
           <a:p>
-            <a:pPr algn="ctr"/>
-            <a:r>
-              <a:rPr sz="1200" b="0" i="0">
-                <a:solidFill>
-                  <a:srgbClr val="4A5568"/>
-                </a:solidFill>
-              </a:rPr>
-              <a:t>Doctor selects drug,
-patient IC &amp; quantity
-(Ubat or Antibiotik form)</a:t>
-            </a:r>
-          </a:p>
-        </p:txBody>
-      </p:sp>
-      <p:sp>
-        <p:nvSpPr>
-          <p:cNvPr id="12" name="TextBox 11"/>
-          <p:cNvSpPr txBox="1"/>
-          <p:nvPr/>
-        </p:nvSpPr>
-        <p:spPr>
-          <a:xfrm>
-            <a:off x="2880360" y="3291840"/>
-            <a:ext cx="548640" cy="457200"/>
-          </a:xfrm>
-          <a:prstGeom prst="rect">
-            <a:avLst/>
-          </a:prstGeom>
-          <a:noFill/>
-        </p:spPr>
-        <p:txBody>
-          <a:bodyPr wrap="square">
-            <a:spAutoFit/>
-          </a:bodyPr>
-          <a:lstStyle/>
-          <a:p>
-            <a:pPr algn="ctr"/>
-            <a:r>
-              <a:rPr sz="2800" b="1" i="0">
-                <a:solidFill>
-                  <a:srgbClr val="4A5568"/>
-                </a:solidFill>
-              </a:rPr>
-              <a:t>→</a:t>
-            </a:r>
-          </a:p>
-        </p:txBody>
-      </p:sp>
-      <p:sp>
-        <p:nvSpPr>
-          <p:cNvPr id="13" name="Rectangle 12"/>
+            <a:pPr algn="l"/>
+            <a:r>
+              <a:rPr sz="1500" b="0" i="0">
+                <a:solidFill>
+                  <a:srgbClr val="B0C8E8"/>
+                </a:solidFill>
+              </a:rPr>
+              <a:t>MO issues a new quota drug to a patient: end-to-end digital, fully tracked</a:t>
+            </a:r>
+          </a:p>
+        </p:txBody>
+      </p:sp>
+      <p:sp>
+        <p:nvSpPr>
+          <p:cNvPr id="12" name="Rectangle 11"/>
           <p:cNvSpPr/>
           <p:nvPr/>
         </p:nvSpPr>
         <p:spPr>
           <a:xfrm>
-            <a:off x="3383280" y="1554480"/>
-            <a:ext cx="2377440" cy="3474720"/>
+            <a:off x="365760" y="1463040"/>
+            <a:ext cx="1920240" cy="3840480"/>
           </a:xfrm>
           <a:prstGeom prst="rect">
             <a:avLst/>
@@ -6849,20 +7049,20 @@
       </p:sp>
       <p:sp>
         <p:nvSpPr>
-          <p:cNvPr id="14" name="Rectangle 13"/>
+          <p:cNvPr id="13" name="Rectangle 12"/>
           <p:cNvSpPr/>
           <p:nvPr/>
         </p:nvSpPr>
         <p:spPr>
           <a:xfrm>
-            <a:off x="3383280" y="1554480"/>
-            <a:ext cx="2377440" cy="54864"/>
-          </a:xfrm>
-          <a:prstGeom prst="rect">
-            <a:avLst/>
-          </a:prstGeom>
-          <a:solidFill>
-            <a:srgbClr val="F39C12"/>
+            <a:off x="365760" y="1463040"/>
+            <a:ext cx="1920240" cy="64008"/>
+          </a:xfrm>
+          <a:prstGeom prst="rect">
+            <a:avLst/>
+          </a:prstGeom>
+          <a:solidFill>
+            <a:srgbClr val="1B4F8A"/>
           </a:solidFill>
           <a:ln>
             <a:noFill/>
@@ -6892,20 +7092,20 @@
       </p:sp>
       <p:sp>
         <p:nvSpPr>
-          <p:cNvPr id="15" name="Oval 14"/>
+          <p:cNvPr id="14" name="Oval 13"/>
           <p:cNvSpPr/>
           <p:nvPr/>
         </p:nvSpPr>
         <p:spPr>
           <a:xfrm>
-            <a:off x="4206240" y="1691640"/>
+            <a:off x="960120" y="1600200"/>
             <a:ext cx="731520" cy="731520"/>
           </a:xfrm>
           <a:prstGeom prst="ellipse">
             <a:avLst/>
           </a:prstGeom>
           <a:solidFill>
-            <a:srgbClr val="F39C12"/>
+            <a:srgbClr val="1B4F8A"/>
           </a:solidFill>
           <a:ln>
             <a:noFill/>
@@ -6936,21 +7136,21 @@
                   <a:srgbClr val="FFFFFF"/>
                 </a:solidFill>
               </a:rPr>
-              <a:t>2</a:t>
-            </a:r>
-          </a:p>
-        </p:txBody>
-      </p:sp>
-      <p:sp>
-        <p:nvSpPr>
-          <p:cNvPr id="16" name="TextBox 15"/>
+              <a:t>1</a:t>
+            </a:r>
+          </a:p>
+        </p:txBody>
+      </p:sp>
+      <p:sp>
+        <p:nvSpPr>
+          <p:cNvPr id="15" name="TextBox 14"/>
           <p:cNvSpPr txBox="1"/>
           <p:nvPr/>
         </p:nvSpPr>
         <p:spPr>
           <a:xfrm>
-            <a:off x="3520440" y="2560320"/>
-            <a:ext cx="2103120" cy="731520"/>
+            <a:off x="457200" y="2423160"/>
+            <a:ext cx="1783080" cy="731520"/>
           </a:xfrm>
           <a:prstGeom prst="rect">
             <a:avLst/>
@@ -6965,26 +7165,27 @@
           <a:p>
             <a:pPr algn="ctr"/>
             <a:r>
-              <a:rPr sz="1500" b="1" i="0">
+              <a:rPr sz="1400" b="1" i="0">
                 <a:solidFill>
                   <a:srgbClr val="1A202C"/>
                 </a:solidFill>
               </a:rPr>
-              <a:t>FMS Reviews</a:t>
-            </a:r>
-          </a:p>
-        </p:txBody>
-      </p:sp>
-      <p:sp>
-        <p:nvSpPr>
-          <p:cNvPr id="17" name="TextBox 16"/>
+              <a:t>MO Submits
+Request</a:t>
+            </a:r>
+          </a:p>
+        </p:txBody>
+      </p:sp>
+      <p:sp>
+        <p:nvSpPr>
+          <p:cNvPr id="16" name="TextBox 15"/>
           <p:cNvSpPr txBox="1"/>
           <p:nvPr/>
         </p:nvSpPr>
         <p:spPr>
           <a:xfrm>
-            <a:off x="3520440" y="3337560"/>
-            <a:ext cx="2103120" cy="1463040"/>
+            <a:off x="457200" y="3246120"/>
+            <a:ext cx="1783080" cy="1828800"/>
           </a:xfrm>
           <a:prstGeom prst="rect">
             <a:avLst/>
@@ -7004,23 +7205,23 @@
                   <a:srgbClr val="4A5568"/>
                 </a:solidFill>
               </a:rPr>
-              <a:t>Family Medicine
-Specialist approves or
-rejects with notes</a:t>
-            </a:r>
-          </a:p>
-        </p:txBody>
-      </p:sp>
-      <p:sp>
-        <p:nvSpPr>
-          <p:cNvPr id="18" name="TextBox 17"/>
+              <a:t>Selects drug, enters
+patient IC &amp; quantity.
+Submits digitally.</a:t>
+            </a:r>
+          </a:p>
+        </p:txBody>
+      </p:sp>
+      <p:sp>
+        <p:nvSpPr>
+          <p:cNvPr id="17" name="TextBox 16"/>
           <p:cNvSpPr txBox="1"/>
           <p:nvPr/>
         </p:nvSpPr>
         <p:spPr>
           <a:xfrm>
-            <a:off x="5806440" y="3291840"/>
-            <a:ext cx="548640" cy="457200"/>
+            <a:off x="2286000" y="3017520"/>
+            <a:ext cx="347472" cy="457200"/>
           </a:xfrm>
           <a:prstGeom prst="rect">
             <a:avLst/>
@@ -7035,7 +7236,7 @@
           <a:p>
             <a:pPr algn="ctr"/>
             <a:r>
-              <a:rPr sz="2800" b="1" i="0">
+              <a:rPr sz="2200" b="1" i="0">
                 <a:solidFill>
                   <a:srgbClr val="4A5568"/>
                 </a:solidFill>
@@ -7047,14 +7248,14 @@
       </p:sp>
       <p:sp>
         <p:nvSpPr>
-          <p:cNvPr id="19" name="Rectangle 18"/>
+          <p:cNvPr id="18" name="Rectangle 17"/>
           <p:cNvSpPr/>
           <p:nvPr/>
         </p:nvSpPr>
         <p:spPr>
           <a:xfrm>
-            <a:off x="6309360" y="1554480"/>
-            <a:ext cx="2377440" cy="3474720"/>
+            <a:off x="2633472" y="1463040"/>
+            <a:ext cx="1920240" cy="3840480"/>
           </a:xfrm>
           <a:prstGeom prst="rect">
             <a:avLst/>
@@ -7090,20 +7291,20 @@
       </p:sp>
       <p:sp>
         <p:nvSpPr>
-          <p:cNvPr id="20" name="Rectangle 19"/>
+          <p:cNvPr id="19" name="Rectangle 18"/>
           <p:cNvSpPr/>
           <p:nvPr/>
         </p:nvSpPr>
         <p:spPr>
           <a:xfrm>
-            <a:off x="6309360" y="1554480"/>
-            <a:ext cx="2377440" cy="54864"/>
-          </a:xfrm>
-          <a:prstGeom prst="rect">
-            <a:avLst/>
-          </a:prstGeom>
-          <a:solidFill>
-            <a:srgbClr val="27AE60"/>
+            <a:off x="2633472" y="1463040"/>
+            <a:ext cx="1920240" cy="64008"/>
+          </a:xfrm>
+          <a:prstGeom prst="rect">
+            <a:avLst/>
+          </a:prstGeom>
+          <a:solidFill>
+            <a:srgbClr val="F39C12"/>
           </a:solidFill>
           <a:ln>
             <a:noFill/>
@@ -7133,20 +7334,20 @@
       </p:sp>
       <p:sp>
         <p:nvSpPr>
-          <p:cNvPr id="21" name="Oval 20"/>
+          <p:cNvPr id="20" name="Oval 19"/>
           <p:cNvSpPr/>
           <p:nvPr/>
         </p:nvSpPr>
         <p:spPr>
           <a:xfrm>
-            <a:off x="7132320" y="1691640"/>
+            <a:off x="3227832" y="1600200"/>
             <a:ext cx="731520" cy="731520"/>
           </a:xfrm>
           <a:prstGeom prst="ellipse">
             <a:avLst/>
           </a:prstGeom>
           <a:solidFill>
-            <a:srgbClr val="27AE60"/>
+            <a:srgbClr val="F39C12"/>
           </a:solidFill>
           <a:ln>
             <a:noFill/>
@@ -7177,21 +7378,21 @@
                   <a:srgbClr val="FFFFFF"/>
                 </a:solidFill>
               </a:rPr>
-              <a:t>3</a:t>
-            </a:r>
-          </a:p>
-        </p:txBody>
-      </p:sp>
-      <p:sp>
-        <p:nvSpPr>
-          <p:cNvPr id="22" name="TextBox 21"/>
+              <a:t>2</a:t>
+            </a:r>
+          </a:p>
+        </p:txBody>
+      </p:sp>
+      <p:sp>
+        <p:nvSpPr>
+          <p:cNvPr id="21" name="TextBox 20"/>
           <p:cNvSpPr txBox="1"/>
           <p:nvPr/>
         </p:nvSpPr>
         <p:spPr>
           <a:xfrm>
-            <a:off x="6446520" y="2560320"/>
-            <a:ext cx="2103120" cy="731520"/>
+            <a:off x="2724912" y="2423160"/>
+            <a:ext cx="1783080" cy="731520"/>
           </a:xfrm>
           <a:prstGeom prst="rect">
             <a:avLst/>
@@ -7206,27 +7407,27 @@
           <a:p>
             <a:pPr algn="ctr"/>
             <a:r>
-              <a:rPr sz="1500" b="1" i="0">
+              <a:rPr sz="1400" b="1" i="0">
                 <a:solidFill>
                   <a:srgbClr val="1A202C"/>
                 </a:solidFill>
               </a:rPr>
-              <a:t>Pharmacist
-Fulfils</a:t>
-            </a:r>
-          </a:p>
-        </p:txBody>
-      </p:sp>
-      <p:sp>
-        <p:nvSpPr>
-          <p:cNvPr id="23" name="TextBox 22"/>
+              <a:t>FMS Receives
+&amp; Reviews</a:t>
+            </a:r>
+          </a:p>
+        </p:txBody>
+      </p:sp>
+      <p:sp>
+        <p:nvSpPr>
+          <p:cNvPr id="22" name="TextBox 21"/>
           <p:cNvSpPr txBox="1"/>
           <p:nvPr/>
         </p:nvSpPr>
         <p:spPr>
           <a:xfrm>
-            <a:off x="6446520" y="3337560"/>
-            <a:ext cx="2103120" cy="1463040"/>
+            <a:off x="2724912" y="3246120"/>
+            <a:ext cx="1783080" cy="1828800"/>
           </a:xfrm>
           <a:prstGeom prst="rect">
             <a:avLst/>
@@ -7246,23 +7447,23 @@
                   <a:srgbClr val="4A5568"/>
                 </a:solidFill>
               </a:rPr>
-              <a:t>Pharmacy queues up
-approved requests
-and dispenses</a:t>
-            </a:r>
-          </a:p>
-        </p:txBody>
-      </p:sp>
-      <p:sp>
-        <p:nvSpPr>
-          <p:cNvPr id="24" name="TextBox 23"/>
+              <a:t>Sees request on FMS
+dashboard. Reviews
+patient &amp; drug details.</a:t>
+            </a:r>
+          </a:p>
+        </p:txBody>
+      </p:sp>
+      <p:sp>
+        <p:nvSpPr>
+          <p:cNvPr id="23" name="TextBox 22"/>
           <p:cNvSpPr txBox="1"/>
           <p:nvPr/>
         </p:nvSpPr>
         <p:spPr>
           <a:xfrm>
-            <a:off x="8732520" y="3291840"/>
-            <a:ext cx="548640" cy="457200"/>
+            <a:off x="4553712" y="3017520"/>
+            <a:ext cx="347472" cy="457200"/>
           </a:xfrm>
           <a:prstGeom prst="rect">
             <a:avLst/>
@@ -7277,7 +7478,7 @@
           <a:p>
             <a:pPr algn="ctr"/>
             <a:r>
-              <a:rPr sz="2800" b="1" i="0">
+              <a:rPr sz="2200" b="1" i="0">
                 <a:solidFill>
                   <a:srgbClr val="4A5568"/>
                 </a:solidFill>
@@ -7289,14 +7490,14 @@
       </p:sp>
       <p:sp>
         <p:nvSpPr>
-          <p:cNvPr id="25" name="Rectangle 24"/>
+          <p:cNvPr id="24" name="Rectangle 23"/>
           <p:cNvSpPr/>
           <p:nvPr/>
         </p:nvSpPr>
         <p:spPr>
           <a:xfrm>
-            <a:off x="9235440" y="1554480"/>
-            <a:ext cx="2377440" cy="3474720"/>
+            <a:off x="4901184" y="1463040"/>
+            <a:ext cx="1920240" cy="3840480"/>
           </a:xfrm>
           <a:prstGeom prst="rect">
             <a:avLst/>
@@ -7332,20 +7533,20 @@
       </p:sp>
       <p:sp>
         <p:nvSpPr>
-          <p:cNvPr id="26" name="Rectangle 25"/>
+          <p:cNvPr id="25" name="Rectangle 24"/>
           <p:cNvSpPr/>
           <p:nvPr/>
         </p:nvSpPr>
         <p:spPr>
           <a:xfrm>
-            <a:off x="9235440" y="1554480"/>
-            <a:ext cx="2377440" cy="54864"/>
-          </a:xfrm>
-          <a:prstGeom prst="rect">
-            <a:avLst/>
-          </a:prstGeom>
-          <a:solidFill>
-            <a:srgbClr val="2D86C9"/>
+            <a:off x="4901184" y="1463040"/>
+            <a:ext cx="1920240" cy="64008"/>
+          </a:xfrm>
+          <a:prstGeom prst="rect">
+            <a:avLst/>
+          </a:prstGeom>
+          <a:solidFill>
+            <a:srgbClr val="E74C3C"/>
           </a:solidFill>
           <a:ln>
             <a:noFill/>
@@ -7375,20 +7576,20 @@
       </p:sp>
       <p:sp>
         <p:nvSpPr>
-          <p:cNvPr id="27" name="Oval 26"/>
+          <p:cNvPr id="26" name="Oval 25"/>
           <p:cNvSpPr/>
           <p:nvPr/>
         </p:nvSpPr>
         <p:spPr>
           <a:xfrm>
-            <a:off x="10058400" y="1691640"/>
+            <a:off x="5495544" y="1600200"/>
             <a:ext cx="731520" cy="731520"/>
           </a:xfrm>
           <a:prstGeom prst="ellipse">
             <a:avLst/>
           </a:prstGeom>
           <a:solidFill>
-            <a:srgbClr val="2D86C9"/>
+            <a:srgbClr val="E74C3C"/>
           </a:solidFill>
           <a:ln>
             <a:noFill/>
@@ -7419,21 +7620,21 @@
                   <a:srgbClr val="FFFFFF"/>
                 </a:solidFill>
               </a:rPr>
-              <a:t>4</a:t>
-            </a:r>
-          </a:p>
-        </p:txBody>
-      </p:sp>
-      <p:sp>
-        <p:nvSpPr>
-          <p:cNvPr id="28" name="TextBox 27"/>
+              <a:t>3</a:t>
+            </a:r>
+          </a:p>
+        </p:txBody>
+      </p:sp>
+      <p:sp>
+        <p:nvSpPr>
+          <p:cNvPr id="27" name="TextBox 26"/>
           <p:cNvSpPr txBox="1"/>
           <p:nvPr/>
         </p:nvSpPr>
         <p:spPr>
           <a:xfrm>
-            <a:off x="9372600" y="2560320"/>
-            <a:ext cx="2103120" cy="731520"/>
+            <a:off x="4992624" y="2423160"/>
+            <a:ext cx="1783080" cy="731520"/>
           </a:xfrm>
           <a:prstGeom prst="rect">
             <a:avLst/>
@@ -7448,27 +7649,27 @@
           <a:p>
             <a:pPr algn="ctr"/>
             <a:r>
-              <a:rPr sz="1500" b="1" i="0">
+              <a:rPr sz="1400" b="1" i="0">
                 <a:solidFill>
                   <a:srgbClr val="1A202C"/>
                 </a:solidFill>
               </a:rPr>
-              <a:t>Ledger &amp;
-Records</a:t>
-            </a:r>
-          </a:p>
-        </p:txBody>
-      </p:sp>
-      <p:sp>
-        <p:nvSpPr>
-          <p:cNvPr id="29" name="TextBox 28"/>
+              <a:t>FMS Approves
+or Rejects</a:t>
+            </a:r>
+          </a:p>
+        </p:txBody>
+      </p:sp>
+      <p:sp>
+        <p:nvSpPr>
+          <p:cNvPr id="28" name="TextBox 27"/>
           <p:cNvSpPr txBox="1"/>
           <p:nvPr/>
         </p:nvSpPr>
         <p:spPr>
           <a:xfrm>
-            <a:off x="9372600" y="3337560"/>
-            <a:ext cx="2103120" cy="1463040"/>
+            <a:off x="4992624" y="3246120"/>
+            <a:ext cx="1783080" cy="1828800"/>
           </a:xfrm>
           <a:prstGeom prst="rect">
             <a:avLst/>
@@ -7488,9 +7689,527 @@
                   <a:srgbClr val="4A5568"/>
                 </a:solidFill>
               </a:rPr>
-              <a:t>Stock ledger updated;
-patient registry &amp;
-drug history saved</a:t>
+              <a:t>Approves with notes
+or rejects with reason.
+MO notified instantly.</a:t>
+            </a:r>
+          </a:p>
+        </p:txBody>
+      </p:sp>
+      <p:sp>
+        <p:nvSpPr>
+          <p:cNvPr id="29" name="TextBox 28"/>
+          <p:cNvSpPr txBox="1"/>
+          <p:nvPr/>
+        </p:nvSpPr>
+        <p:spPr>
+          <a:xfrm>
+            <a:off x="6821424" y="3017520"/>
+            <a:ext cx="347472" cy="457200"/>
+          </a:xfrm>
+          <a:prstGeom prst="rect">
+            <a:avLst/>
+          </a:prstGeom>
+          <a:noFill/>
+        </p:spPr>
+        <p:txBody>
+          <a:bodyPr wrap="square">
+            <a:spAutoFit/>
+          </a:bodyPr>
+          <a:lstStyle/>
+          <a:p>
+            <a:pPr algn="ctr"/>
+            <a:r>
+              <a:rPr sz="2200" b="1" i="0">
+                <a:solidFill>
+                  <a:srgbClr val="4A5568"/>
+                </a:solidFill>
+              </a:rPr>
+              <a:t>→</a:t>
+            </a:r>
+          </a:p>
+        </p:txBody>
+      </p:sp>
+      <p:sp>
+        <p:nvSpPr>
+          <p:cNvPr id="30" name="Rectangle 29"/>
+          <p:cNvSpPr/>
+          <p:nvPr/>
+        </p:nvSpPr>
+        <p:spPr>
+          <a:xfrm>
+            <a:off x="7168896" y="1463040"/>
+            <a:ext cx="1920240" cy="3840480"/>
+          </a:xfrm>
+          <a:prstGeom prst="rect">
+            <a:avLst/>
+          </a:prstGeom>
+          <a:solidFill>
+            <a:srgbClr val="F0F4F8"/>
+          </a:solidFill>
+          <a:ln>
+            <a:noFill/>
+          </a:ln>
+        </p:spPr>
+        <p:style>
+          <a:lnRef idx="1">
+            <a:schemeClr val="accent1"/>
+          </a:lnRef>
+          <a:fillRef idx="3">
+            <a:schemeClr val="accent1"/>
+          </a:fillRef>
+          <a:effectRef idx="2">
+            <a:schemeClr val="accent1"/>
+          </a:effectRef>
+          <a:fontRef idx="minor">
+            <a:schemeClr val="lt1"/>
+          </a:fontRef>
+        </p:style>
+        <p:txBody>
+          <a:bodyPr rtlCol="0" anchor="ctr"/>
+          <a:lstStyle/>
+          <a:p>
+            <a:pPr algn="ctr"/>
+          </a:p>
+        </p:txBody>
+      </p:sp>
+      <p:sp>
+        <p:nvSpPr>
+          <p:cNvPr id="31" name="Rectangle 30"/>
+          <p:cNvSpPr/>
+          <p:nvPr/>
+        </p:nvSpPr>
+        <p:spPr>
+          <a:xfrm>
+            <a:off x="7168896" y="1463040"/>
+            <a:ext cx="1920240" cy="64008"/>
+          </a:xfrm>
+          <a:prstGeom prst="rect">
+            <a:avLst/>
+          </a:prstGeom>
+          <a:solidFill>
+            <a:srgbClr val="27AE60"/>
+          </a:solidFill>
+          <a:ln>
+            <a:noFill/>
+          </a:ln>
+        </p:spPr>
+        <p:style>
+          <a:lnRef idx="1">
+            <a:schemeClr val="accent1"/>
+          </a:lnRef>
+          <a:fillRef idx="3">
+            <a:schemeClr val="accent1"/>
+          </a:fillRef>
+          <a:effectRef idx="2">
+            <a:schemeClr val="accent1"/>
+          </a:effectRef>
+          <a:fontRef idx="minor">
+            <a:schemeClr val="lt1"/>
+          </a:fontRef>
+        </p:style>
+        <p:txBody>
+          <a:bodyPr rtlCol="0" anchor="ctr"/>
+          <a:lstStyle/>
+          <a:p>
+            <a:pPr algn="ctr"/>
+          </a:p>
+        </p:txBody>
+      </p:sp>
+      <p:sp>
+        <p:nvSpPr>
+          <p:cNvPr id="32" name="Oval 31"/>
+          <p:cNvSpPr/>
+          <p:nvPr/>
+        </p:nvSpPr>
+        <p:spPr>
+          <a:xfrm>
+            <a:off x="7763256" y="1600200"/>
+            <a:ext cx="731520" cy="731520"/>
+          </a:xfrm>
+          <a:prstGeom prst="ellipse">
+            <a:avLst/>
+          </a:prstGeom>
+          <a:solidFill>
+            <a:srgbClr val="27AE60"/>
+          </a:solidFill>
+          <a:ln>
+            <a:noFill/>
+          </a:ln>
+        </p:spPr>
+        <p:style>
+          <a:lnRef idx="1">
+            <a:schemeClr val="accent1"/>
+          </a:lnRef>
+          <a:fillRef idx="3">
+            <a:schemeClr val="accent1"/>
+          </a:fillRef>
+          <a:effectRef idx="2">
+            <a:schemeClr val="accent1"/>
+          </a:effectRef>
+          <a:fontRef idx="minor">
+            <a:schemeClr val="lt1"/>
+          </a:fontRef>
+        </p:style>
+        <p:txBody>
+          <a:bodyPr rtlCol="0" anchor="ctr" wrap="none"/>
+          <a:lstStyle/>
+          <a:p>
+            <a:pPr algn="ctr"/>
+            <a:r>
+              <a:rPr sz="1800" b="1">
+                <a:solidFill>
+                  <a:srgbClr val="FFFFFF"/>
+                </a:solidFill>
+              </a:rPr>
+              <a:t>4</a:t>
+            </a:r>
+          </a:p>
+        </p:txBody>
+      </p:sp>
+      <p:sp>
+        <p:nvSpPr>
+          <p:cNvPr id="33" name="TextBox 32"/>
+          <p:cNvSpPr txBox="1"/>
+          <p:nvPr/>
+        </p:nvSpPr>
+        <p:spPr>
+          <a:xfrm>
+            <a:off x="7260336" y="2423160"/>
+            <a:ext cx="1783080" cy="731520"/>
+          </a:xfrm>
+          <a:prstGeom prst="rect">
+            <a:avLst/>
+          </a:prstGeom>
+          <a:noFill/>
+        </p:spPr>
+        <p:txBody>
+          <a:bodyPr wrap="square">
+            <a:spAutoFit/>
+          </a:bodyPr>
+          <a:lstStyle/>
+          <a:p>
+            <a:pPr algn="ctr"/>
+            <a:r>
+              <a:rPr sz="1400" b="1" i="0">
+                <a:solidFill>
+                  <a:srgbClr val="1A202C"/>
+                </a:solidFill>
+              </a:rPr>
+              <a:t>Pharmacy
+Acknowledges</a:t>
+            </a:r>
+          </a:p>
+        </p:txBody>
+      </p:sp>
+      <p:sp>
+        <p:nvSpPr>
+          <p:cNvPr id="34" name="TextBox 33"/>
+          <p:cNvSpPr txBox="1"/>
+          <p:nvPr/>
+        </p:nvSpPr>
+        <p:spPr>
+          <a:xfrm>
+            <a:off x="7260336" y="3246120"/>
+            <a:ext cx="1783080" cy="1828800"/>
+          </a:xfrm>
+          <a:prstGeom prst="rect">
+            <a:avLst/>
+          </a:prstGeom>
+          <a:noFill/>
+        </p:spPr>
+        <p:txBody>
+          <a:bodyPr wrap="square">
+            <a:spAutoFit/>
+          </a:bodyPr>
+          <a:lstStyle/>
+          <a:p>
+            <a:pPr algn="ctr"/>
+            <a:r>
+              <a:rPr sz="1200" b="0" i="0">
+                <a:solidFill>
+                  <a:srgbClr val="4A5568"/>
+                </a:solidFill>
+              </a:rPr>
+              <a:t>Pharmacist sees approved
+request. Acknowledges
+dispensing to patient.</a:t>
+            </a:r>
+          </a:p>
+        </p:txBody>
+      </p:sp>
+      <p:sp>
+        <p:nvSpPr>
+          <p:cNvPr id="35" name="TextBox 34"/>
+          <p:cNvSpPr txBox="1"/>
+          <p:nvPr/>
+        </p:nvSpPr>
+        <p:spPr>
+          <a:xfrm>
+            <a:off x="9089136" y="3017520"/>
+            <a:ext cx="347472" cy="457200"/>
+          </a:xfrm>
+          <a:prstGeom prst="rect">
+            <a:avLst/>
+          </a:prstGeom>
+          <a:noFill/>
+        </p:spPr>
+        <p:txBody>
+          <a:bodyPr wrap="square">
+            <a:spAutoFit/>
+          </a:bodyPr>
+          <a:lstStyle/>
+          <a:p>
+            <a:pPr algn="ctr"/>
+            <a:r>
+              <a:rPr sz="2200" b="1" i="0">
+                <a:solidFill>
+                  <a:srgbClr val="4A5568"/>
+                </a:solidFill>
+              </a:rPr>
+              <a:t>→</a:t>
+            </a:r>
+          </a:p>
+        </p:txBody>
+      </p:sp>
+      <p:sp>
+        <p:nvSpPr>
+          <p:cNvPr id="36" name="Rectangle 35"/>
+          <p:cNvSpPr/>
+          <p:nvPr/>
+        </p:nvSpPr>
+        <p:spPr>
+          <a:xfrm>
+            <a:off x="9436608" y="1463040"/>
+            <a:ext cx="1920240" cy="3840480"/>
+          </a:xfrm>
+          <a:prstGeom prst="rect">
+            <a:avLst/>
+          </a:prstGeom>
+          <a:solidFill>
+            <a:srgbClr val="F0F4F8"/>
+          </a:solidFill>
+          <a:ln>
+            <a:noFill/>
+          </a:ln>
+        </p:spPr>
+        <p:style>
+          <a:lnRef idx="1">
+            <a:schemeClr val="accent1"/>
+          </a:lnRef>
+          <a:fillRef idx="3">
+            <a:schemeClr val="accent1"/>
+          </a:fillRef>
+          <a:effectRef idx="2">
+            <a:schemeClr val="accent1"/>
+          </a:effectRef>
+          <a:fontRef idx="minor">
+            <a:schemeClr val="lt1"/>
+          </a:fontRef>
+        </p:style>
+        <p:txBody>
+          <a:bodyPr rtlCol="0" anchor="ctr"/>
+          <a:lstStyle/>
+          <a:p>
+            <a:pPr algn="ctr"/>
+          </a:p>
+        </p:txBody>
+      </p:sp>
+      <p:sp>
+        <p:nvSpPr>
+          <p:cNvPr id="37" name="Rectangle 36"/>
+          <p:cNvSpPr/>
+          <p:nvPr/>
+        </p:nvSpPr>
+        <p:spPr>
+          <a:xfrm>
+            <a:off x="9436608" y="1463040"/>
+            <a:ext cx="1920240" cy="64008"/>
+          </a:xfrm>
+          <a:prstGeom prst="rect">
+            <a:avLst/>
+          </a:prstGeom>
+          <a:solidFill>
+            <a:srgbClr val="2D86C9"/>
+          </a:solidFill>
+          <a:ln>
+            <a:noFill/>
+          </a:ln>
+        </p:spPr>
+        <p:style>
+          <a:lnRef idx="1">
+            <a:schemeClr val="accent1"/>
+          </a:lnRef>
+          <a:fillRef idx="3">
+            <a:schemeClr val="accent1"/>
+          </a:fillRef>
+          <a:effectRef idx="2">
+            <a:schemeClr val="accent1"/>
+          </a:effectRef>
+          <a:fontRef idx="minor">
+            <a:schemeClr val="lt1"/>
+          </a:fontRef>
+        </p:style>
+        <p:txBody>
+          <a:bodyPr rtlCol="0" anchor="ctr"/>
+          <a:lstStyle/>
+          <a:p>
+            <a:pPr algn="ctr"/>
+          </a:p>
+        </p:txBody>
+      </p:sp>
+      <p:sp>
+        <p:nvSpPr>
+          <p:cNvPr id="38" name="Oval 37"/>
+          <p:cNvSpPr/>
+          <p:nvPr/>
+        </p:nvSpPr>
+        <p:spPr>
+          <a:xfrm>
+            <a:off x="10030968" y="1600200"/>
+            <a:ext cx="731520" cy="731520"/>
+          </a:xfrm>
+          <a:prstGeom prst="ellipse">
+            <a:avLst/>
+          </a:prstGeom>
+          <a:solidFill>
+            <a:srgbClr val="2D86C9"/>
+          </a:solidFill>
+          <a:ln>
+            <a:noFill/>
+          </a:ln>
+        </p:spPr>
+        <p:style>
+          <a:lnRef idx="1">
+            <a:schemeClr val="accent1"/>
+          </a:lnRef>
+          <a:fillRef idx="3">
+            <a:schemeClr val="accent1"/>
+          </a:fillRef>
+          <a:effectRef idx="2">
+            <a:schemeClr val="accent1"/>
+          </a:effectRef>
+          <a:fontRef idx="minor">
+            <a:schemeClr val="lt1"/>
+          </a:fontRef>
+        </p:style>
+        <p:txBody>
+          <a:bodyPr rtlCol="0" anchor="ctr" wrap="none"/>
+          <a:lstStyle/>
+          <a:p>
+            <a:pPr algn="ctr"/>
+            <a:r>
+              <a:rPr sz="1800" b="1">
+                <a:solidFill>
+                  <a:srgbClr val="FFFFFF"/>
+                </a:solidFill>
+              </a:rPr>
+              <a:t>5</a:t>
+            </a:r>
+          </a:p>
+        </p:txBody>
+      </p:sp>
+      <p:sp>
+        <p:nvSpPr>
+          <p:cNvPr id="39" name="TextBox 38"/>
+          <p:cNvSpPr txBox="1"/>
+          <p:nvPr/>
+        </p:nvSpPr>
+        <p:spPr>
+          <a:xfrm>
+            <a:off x="9528048" y="2423160"/>
+            <a:ext cx="1783080" cy="731520"/>
+          </a:xfrm>
+          <a:prstGeom prst="rect">
+            <a:avLst/>
+          </a:prstGeom>
+          <a:noFill/>
+        </p:spPr>
+        <p:txBody>
+          <a:bodyPr wrap="square">
+            <a:spAutoFit/>
+          </a:bodyPr>
+          <a:lstStyle/>
+          <a:p>
+            <a:pPr algn="ctr"/>
+            <a:r>
+              <a:rPr sz="1400" b="1" i="0">
+                <a:solidFill>
+                  <a:srgbClr val="1A202C"/>
+                </a:solidFill>
+              </a:rPr>
+              <a:t>Record
+Saved</a:t>
+            </a:r>
+          </a:p>
+        </p:txBody>
+      </p:sp>
+      <p:sp>
+        <p:nvSpPr>
+          <p:cNvPr id="40" name="TextBox 39"/>
+          <p:cNvSpPr txBox="1"/>
+          <p:nvPr/>
+        </p:nvSpPr>
+        <p:spPr>
+          <a:xfrm>
+            <a:off x="9528048" y="3246120"/>
+            <a:ext cx="1783080" cy="1828800"/>
+          </a:xfrm>
+          <a:prstGeom prst="rect">
+            <a:avLst/>
+          </a:prstGeom>
+          <a:noFill/>
+        </p:spPr>
+        <p:txBody>
+          <a:bodyPr wrap="square">
+            <a:spAutoFit/>
+          </a:bodyPr>
+          <a:lstStyle/>
+          <a:p>
+            <a:pPr algn="ctr"/>
+            <a:r>
+              <a:rPr sz="1200" b="0" i="0">
+                <a:solidFill>
+                  <a:srgbClr val="4A5568"/>
+                </a:solidFill>
+              </a:rPr>
+              <a:t>Patient registry updated.
+Full audit log.
+Quota counter decrements.</a:t>
+            </a:r>
+          </a:p>
+        </p:txBody>
+      </p:sp>
+      <p:sp>
+        <p:nvSpPr>
+          <p:cNvPr id="41" name="TextBox 40"/>
+          <p:cNvSpPr txBox="1"/>
+          <p:nvPr/>
+        </p:nvSpPr>
+        <p:spPr>
+          <a:xfrm>
+            <a:off x="457200" y="6217920"/>
+            <a:ext cx="10972800" cy="411480"/>
+          </a:xfrm>
+          <a:prstGeom prst="rect">
+            <a:avLst/>
+          </a:prstGeom>
+          <a:noFill/>
+        </p:spPr>
+        <p:txBody>
+          <a:bodyPr wrap="square">
+            <a:spAutoFit/>
+          </a:bodyPr>
+          <a:lstStyle/>
+          <a:p>
+            <a:pPr algn="l"/>
+            <a:r>
+              <a:rPr sz="1300" b="1" i="0">
+                <a:solidFill>
+                  <a:srgbClr val="27AE60"/>
+                </a:solidFill>
+              </a:rPr>
+              <a:t>✓  Replaces: Google Sheets quota tracking with many tabs</a:t>
             </a:r>
           </a:p>
         </p:txBody>
@@ -7528,7 +8247,7 @@
             <a:avLst/>
           </a:prstGeom>
           <a:solidFill>
-            <a:srgbClr val="F0F4F8"/>
+            <a:srgbClr val="FFFFFF"/>
           </a:solidFill>
           <a:ln>
             <a:noFill/>
@@ -7614,7 +8333,7 @@
             <a:avLst/>
           </a:prstGeom>
           <a:solidFill>
-            <a:srgbClr val="2D86C9"/>
+            <a:srgbClr val="27AE60"/>
           </a:solidFill>
           <a:ln>
             <a:noFill/>
@@ -7650,8 +8369,8 @@
         </p:nvSpPr>
         <p:spPr>
           <a:xfrm>
-            <a:off x="502920" y="228600"/>
-            <a:ext cx="9144000" cy="731520"/>
+            <a:off x="502920" y="201168"/>
+            <a:ext cx="10058400" cy="777240"/>
           </a:xfrm>
           <a:prstGeom prst="rect">
             <a:avLst/>
@@ -7671,7 +8390,7 @@
                   <a:srgbClr val="FFFFFF"/>
                 </a:solidFill>
               </a:rPr>
-              <a:t>Role-Based Dashboards</a:t>
+              <a:t>Workflow 2 — Antibiotic Approval Form</a:t>
             </a:r>
           </a:p>
         </p:txBody>
@@ -7684,8 +8403,8 @@
         </p:nvSpPr>
         <p:spPr>
           <a:xfrm>
-            <a:off x="502920" y="777240"/>
-            <a:ext cx="10058400" cy="457200"/>
+            <a:off x="502920" y="804672"/>
+            <a:ext cx="10058400" cy="438912"/>
           </a:xfrm>
           <a:prstGeom prst="rect">
             <a:avLst/>
@@ -7705,7 +8424,7 @@
                   <a:srgbClr val="B0C8E8"/>
                 </a:solidFill>
               </a:rPr>
-              <a:t>Every user sees exactly what they need — no information overload</a:t>
+              <a:t>NAG 2024 Clinical Pathway form — digitised from A4 paper to the system</a:t>
             </a:r>
           </a:p>
         </p:txBody>
@@ -7718,14 +8437,14 @@
         </p:nvSpPr>
         <p:spPr>
           <a:xfrm>
-            <a:off x="411480" y="1463040"/>
-            <a:ext cx="3566160" cy="5029200"/>
-          </a:xfrm>
-          <a:prstGeom prst="rect">
-            <a:avLst/>
-          </a:prstGeom>
-          <a:solidFill>
-            <a:srgbClr val="FFFFFF"/>
+            <a:off x="365760" y="1463040"/>
+            <a:ext cx="1920240" cy="3840480"/>
+          </a:xfrm>
+          <a:prstGeom prst="rect">
+            <a:avLst/>
+          </a:prstGeom>
+          <a:solidFill>
+            <a:srgbClr val="F0F4F8"/>
           </a:solidFill>
           <a:ln>
             <a:noFill/>
@@ -7761,8 +8480,8 @@
         </p:nvSpPr>
         <p:spPr>
           <a:xfrm>
-            <a:off x="411480" y="1463040"/>
-            <a:ext cx="3566160" cy="73152"/>
+            <a:off x="365760" y="1463040"/>
+            <a:ext cx="1920240" cy="64008"/>
           </a:xfrm>
           <a:prstGeom prst="rect">
             <a:avLst/>
@@ -7798,137 +8517,20 @@
       </p:sp>
       <p:sp>
         <p:nvSpPr>
-          <p:cNvPr id="9" name="TextBox 8"/>
-          <p:cNvSpPr txBox="1"/>
-          <p:nvPr/>
-        </p:nvSpPr>
-        <p:spPr>
-          <a:xfrm>
-            <a:off x="594360" y="1645920"/>
-            <a:ext cx="3291840" cy="548640"/>
-          </a:xfrm>
-          <a:prstGeom prst="rect">
-            <a:avLst/>
-          </a:prstGeom>
-          <a:noFill/>
-        </p:spPr>
-        <p:txBody>
-          <a:bodyPr wrap="square">
-            <a:spAutoFit/>
-          </a:bodyPr>
-          <a:lstStyle/>
-          <a:p>
-            <a:pPr algn="l"/>
-            <a:r>
-              <a:rPr sz="1500" b="1" i="0">
-                <a:solidFill>
-                  <a:srgbClr val="1B4F8A"/>
-                </a:solidFill>
-              </a:rPr>
-              <a:t>👨‍⚕️  Medical Officer (MO)</a:t>
-            </a:r>
-          </a:p>
-        </p:txBody>
-      </p:sp>
-      <p:sp>
-        <p:nvSpPr>
-          <p:cNvPr id="10" name="TextBox 9"/>
-          <p:cNvSpPr txBox="1"/>
-          <p:nvPr/>
-        </p:nvSpPr>
-        <p:spPr>
-          <a:xfrm>
-            <a:off x="594360" y="2286000"/>
-            <a:ext cx="3291840" cy="4023360"/>
-          </a:xfrm>
-          <a:prstGeom prst="rect">
-            <a:avLst/>
-          </a:prstGeom>
-          <a:noFill/>
-        </p:spPr>
-        <p:txBody>
-          <a:bodyPr wrap="square">
-            <a:spAutoFit/>
-          </a:bodyPr>
-          <a:lstStyle/>
-          <a:p>
-            <a:pPr algn="l">
-              <a:spcBef>
-                <a:spcPts val="400"/>
-              </a:spcBef>
-            </a:pPr>
-            <a:r>
-              <a:rPr sz="1200">
-                <a:solidFill>
-                  <a:srgbClr val="4A5568"/>
-                </a:solidFill>
-              </a:rPr>
-              <a:t>• Submit drug dispensing requests</a:t>
-            </a:r>
-          </a:p>
-          <a:p>
-            <a:pPr algn="l">
-              <a:spcBef>
-                <a:spcPts val="400"/>
-              </a:spcBef>
-            </a:pPr>
-            <a:r>
-              <a:rPr sz="1200">
-                <a:solidFill>
-                  <a:srgbClr val="4A5568"/>
-                </a:solidFill>
-              </a:rPr>
-              <a:t>• Submit antibiotic Clinical Pathway forms (NAG 2024)</a:t>
-            </a:r>
-          </a:p>
-          <a:p>
-            <a:pPr algn="l">
-              <a:spcBef>
-                <a:spcPts val="400"/>
-              </a:spcBef>
-            </a:pPr>
-            <a:r>
-              <a:rPr sz="1200">
-                <a:solidFill>
-                  <a:srgbClr val="4A5568"/>
-                </a:solidFill>
-              </a:rPr>
-              <a:t>• Track request status in real time</a:t>
-            </a:r>
-          </a:p>
-          <a:p>
-            <a:pPr algn="l">
-              <a:spcBef>
-                <a:spcPts val="400"/>
-              </a:spcBef>
-            </a:pPr>
-            <a:r>
-              <a:rPr sz="1200">
-                <a:solidFill>
-                  <a:srgbClr val="4A5568"/>
-                </a:solidFill>
-              </a:rPr>
-              <a:t>• Access MO dashboard &amp; pending counts</a:t>
-            </a:r>
-          </a:p>
-        </p:txBody>
-      </p:sp>
-      <p:sp>
-        <p:nvSpPr>
-          <p:cNvPr id="11" name="Rectangle 10"/>
+          <p:cNvPr id="9" name="Oval 8"/>
           <p:cNvSpPr/>
           <p:nvPr/>
         </p:nvSpPr>
         <p:spPr>
           <a:xfrm>
-            <a:off x="4297680" y="1463040"/>
-            <a:ext cx="3566160" cy="5029200"/>
-          </a:xfrm>
-          <a:prstGeom prst="rect">
-            <a:avLst/>
-          </a:prstGeom>
-          <a:solidFill>
-            <a:srgbClr val="FFFFFF"/>
+            <a:off x="960120" y="1600200"/>
+            <a:ext cx="731520" cy="731520"/>
+          </a:xfrm>
+          <a:prstGeom prst="ellipse">
+            <a:avLst/>
+          </a:prstGeom>
+          <a:solidFill>
+            <a:srgbClr val="1B4F8A"/>
           </a:solidFill>
           <a:ln>
             <a:noFill/>
@@ -7949,29 +8551,142 @@
           </a:fontRef>
         </p:style>
         <p:txBody>
-          <a:bodyPr rtlCol="0" anchor="ctr"/>
-          <a:lstStyle/>
-          <a:p>
-            <a:pPr algn="ctr"/>
-          </a:p>
-        </p:txBody>
-      </p:sp>
-      <p:sp>
-        <p:nvSpPr>
-          <p:cNvPr id="12" name="Rectangle 11"/>
+          <a:bodyPr rtlCol="0" anchor="ctr" wrap="none"/>
+          <a:lstStyle/>
+          <a:p>
+            <a:pPr algn="ctr"/>
+            <a:r>
+              <a:rPr sz="1800" b="1">
+                <a:solidFill>
+                  <a:srgbClr val="FFFFFF"/>
+                </a:solidFill>
+              </a:rPr>
+              <a:t>1</a:t>
+            </a:r>
+          </a:p>
+        </p:txBody>
+      </p:sp>
+      <p:sp>
+        <p:nvSpPr>
+          <p:cNvPr id="10" name="TextBox 9"/>
+          <p:cNvSpPr txBox="1"/>
+          <p:nvPr/>
+        </p:nvSpPr>
+        <p:spPr>
+          <a:xfrm>
+            <a:off x="457200" y="2423160"/>
+            <a:ext cx="1783080" cy="731520"/>
+          </a:xfrm>
+          <a:prstGeom prst="rect">
+            <a:avLst/>
+          </a:prstGeom>
+          <a:noFill/>
+        </p:spPr>
+        <p:txBody>
+          <a:bodyPr wrap="square">
+            <a:spAutoFit/>
+          </a:bodyPr>
+          <a:lstStyle/>
+          <a:p>
+            <a:pPr algn="ctr"/>
+            <a:r>
+              <a:rPr sz="1400" b="1" i="0">
+                <a:solidFill>
+                  <a:srgbClr val="1A202C"/>
+                </a:solidFill>
+              </a:rPr>
+              <a:t>MO Fills
+Form</a:t>
+            </a:r>
+          </a:p>
+        </p:txBody>
+      </p:sp>
+      <p:sp>
+        <p:nvSpPr>
+          <p:cNvPr id="11" name="TextBox 10"/>
+          <p:cNvSpPr txBox="1"/>
+          <p:nvPr/>
+        </p:nvSpPr>
+        <p:spPr>
+          <a:xfrm>
+            <a:off x="457200" y="3246120"/>
+            <a:ext cx="1783080" cy="1828800"/>
+          </a:xfrm>
+          <a:prstGeom prst="rect">
+            <a:avLst/>
+          </a:prstGeom>
+          <a:noFill/>
+        </p:spPr>
+        <p:txBody>
+          <a:bodyPr wrap="square">
+            <a:spAutoFit/>
+          </a:bodyPr>
+          <a:lstStyle/>
+          <a:p>
+            <a:pPr algn="ctr"/>
+            <a:r>
+              <a:rPr sz="1200" b="0" i="0">
+                <a:solidFill>
+                  <a:srgbClr val="4A5568"/>
+                </a:solidFill>
+              </a:rPr>
+              <a:t>Enters patient, diagnosis,
+regimen &amp; NAG 2024
+checklist digitally.</a:t>
+            </a:r>
+          </a:p>
+        </p:txBody>
+      </p:sp>
+      <p:sp>
+        <p:nvSpPr>
+          <p:cNvPr id="12" name="TextBox 11"/>
+          <p:cNvSpPr txBox="1"/>
+          <p:nvPr/>
+        </p:nvSpPr>
+        <p:spPr>
+          <a:xfrm>
+            <a:off x="2286000" y="3017520"/>
+            <a:ext cx="347472" cy="457200"/>
+          </a:xfrm>
+          <a:prstGeom prst="rect">
+            <a:avLst/>
+          </a:prstGeom>
+          <a:noFill/>
+        </p:spPr>
+        <p:txBody>
+          <a:bodyPr wrap="square">
+            <a:spAutoFit/>
+          </a:bodyPr>
+          <a:lstStyle/>
+          <a:p>
+            <a:pPr algn="ctr"/>
+            <a:r>
+              <a:rPr sz="2200" b="1" i="0">
+                <a:solidFill>
+                  <a:srgbClr val="4A5568"/>
+                </a:solidFill>
+              </a:rPr>
+              <a:t>→</a:t>
+            </a:r>
+          </a:p>
+        </p:txBody>
+      </p:sp>
+      <p:sp>
+        <p:nvSpPr>
+          <p:cNvPr id="13" name="Rectangle 12"/>
           <p:cNvSpPr/>
           <p:nvPr/>
         </p:nvSpPr>
         <p:spPr>
           <a:xfrm>
-            <a:off x="4297680" y="1463040"/>
-            <a:ext cx="3566160" cy="73152"/>
-          </a:xfrm>
-          <a:prstGeom prst="rect">
-            <a:avLst/>
-          </a:prstGeom>
-          <a:solidFill>
-            <a:srgbClr val="F39C12"/>
+            <a:off x="2633472" y="1463040"/>
+            <a:ext cx="1920240" cy="3840480"/>
+          </a:xfrm>
+          <a:prstGeom prst="rect">
+            <a:avLst/>
+          </a:prstGeom>
+          <a:solidFill>
+            <a:srgbClr val="F0F4F8"/>
           </a:solidFill>
           <a:ln>
             <a:noFill/>
@@ -8001,137 +8716,20 @@
       </p:sp>
       <p:sp>
         <p:nvSpPr>
-          <p:cNvPr id="13" name="TextBox 12"/>
-          <p:cNvSpPr txBox="1"/>
-          <p:nvPr/>
-        </p:nvSpPr>
-        <p:spPr>
-          <a:xfrm>
-            <a:off x="4480560" y="1645920"/>
-            <a:ext cx="3291840" cy="548640"/>
-          </a:xfrm>
-          <a:prstGeom prst="rect">
-            <a:avLst/>
-          </a:prstGeom>
-          <a:noFill/>
-        </p:spPr>
-        <p:txBody>
-          <a:bodyPr wrap="square">
-            <a:spAutoFit/>
-          </a:bodyPr>
-          <a:lstStyle/>
-          <a:p>
-            <a:pPr algn="l"/>
-            <a:r>
-              <a:rPr sz="1500" b="1" i="0">
-                <a:solidFill>
-                  <a:srgbClr val="F39C12"/>
-                </a:solidFill>
-              </a:rPr>
-              <a:t>🩺  FMS Specialist</a:t>
-            </a:r>
-          </a:p>
-        </p:txBody>
-      </p:sp>
-      <p:sp>
-        <p:nvSpPr>
-          <p:cNvPr id="14" name="TextBox 13"/>
-          <p:cNvSpPr txBox="1"/>
-          <p:nvPr/>
-        </p:nvSpPr>
-        <p:spPr>
-          <a:xfrm>
-            <a:off x="4480560" y="2286000"/>
-            <a:ext cx="3291840" cy="4023360"/>
-          </a:xfrm>
-          <a:prstGeom prst="rect">
-            <a:avLst/>
-          </a:prstGeom>
-          <a:noFill/>
-        </p:spPr>
-        <p:txBody>
-          <a:bodyPr wrap="square">
-            <a:spAutoFit/>
-          </a:bodyPr>
-          <a:lstStyle/>
-          <a:p>
-            <a:pPr algn="l">
-              <a:spcBef>
-                <a:spcPts val="400"/>
-              </a:spcBef>
-            </a:pPr>
-            <a:r>
-              <a:rPr sz="1200">
-                <a:solidFill>
-                  <a:srgbClr val="4A5568"/>
-                </a:solidFill>
-              </a:rPr>
-              <a:t>• Review &amp; approve / reject all MO requests</a:t>
-            </a:r>
-          </a:p>
-          <a:p>
-            <a:pPr algn="l">
-              <a:spcBef>
-                <a:spcPts val="400"/>
-              </a:spcBef>
-            </a:pPr>
-            <a:r>
-              <a:rPr sz="1200">
-                <a:solidFill>
-                  <a:srgbClr val="4A5568"/>
-                </a:solidFill>
-              </a:rPr>
-              <a:t>• Approve antibiotic forms with specialist notes</a:t>
-            </a:r>
-          </a:p>
-          <a:p>
-            <a:pPr algn="l">
-              <a:spcBef>
-                <a:spcPts val="400"/>
-              </a:spcBef>
-            </a:pPr>
-            <a:r>
-              <a:rPr sz="1200">
-                <a:solidFill>
-                  <a:srgbClr val="4A5568"/>
-                </a:solidFill>
-              </a:rPr>
-              <a:t>• Monitor controlled-drug annual quotas</a:t>
-            </a:r>
-          </a:p>
-          <a:p>
-            <a:pPr algn="l">
-              <a:spcBef>
-                <a:spcPts val="400"/>
-              </a:spcBef>
-            </a:pPr>
-            <a:r>
-              <a:rPr sz="1200">
-                <a:solidFill>
-                  <a:srgbClr val="4A5568"/>
-                </a:solidFill>
-              </a:rPr>
-              <a:t>• View drug usage trends &amp; forecasts</a:t>
-            </a:r>
-          </a:p>
-        </p:txBody>
-      </p:sp>
-      <p:sp>
-        <p:nvSpPr>
-          <p:cNvPr id="15" name="Rectangle 14"/>
+          <p:cNvPr id="14" name="Rectangle 13"/>
           <p:cNvSpPr/>
           <p:nvPr/>
         </p:nvSpPr>
         <p:spPr>
           <a:xfrm>
-            <a:off x="8183880" y="1463040"/>
-            <a:ext cx="3566160" cy="5029200"/>
-          </a:xfrm>
-          <a:prstGeom prst="rect">
-            <a:avLst/>
-          </a:prstGeom>
-          <a:solidFill>
-            <a:srgbClr val="FFFFFF"/>
+            <a:off x="2633472" y="1463040"/>
+            <a:ext cx="1920240" cy="64008"/>
+          </a:xfrm>
+          <a:prstGeom prst="rect">
+            <a:avLst/>
+          </a:prstGeom>
+          <a:solidFill>
+            <a:srgbClr val="F39C12"/>
           </a:solidFill>
           <a:ln>
             <a:noFill/>
@@ -8161,20 +8759,20 @@
       </p:sp>
       <p:sp>
         <p:nvSpPr>
-          <p:cNvPr id="16" name="Rectangle 15"/>
+          <p:cNvPr id="15" name="Oval 14"/>
           <p:cNvSpPr/>
           <p:nvPr/>
         </p:nvSpPr>
         <p:spPr>
           <a:xfrm>
-            <a:off x="8183880" y="1463040"/>
-            <a:ext cx="3566160" cy="73152"/>
-          </a:xfrm>
-          <a:prstGeom prst="rect">
-            <a:avLst/>
-          </a:prstGeom>
-          <a:solidFill>
-            <a:srgbClr val="27AE60"/>
+            <a:off x="3227832" y="1600200"/>
+            <a:ext cx="731520" cy="731520"/>
+          </a:xfrm>
+          <a:prstGeom prst="ellipse">
+            <a:avLst/>
+          </a:prstGeom>
+          <a:solidFill>
+            <a:srgbClr val="F39C12"/>
           </a:solidFill>
           <a:ln>
             <a:noFill/>
@@ -8195,23 +8793,31 @@
           </a:fontRef>
         </p:style>
         <p:txBody>
-          <a:bodyPr rtlCol="0" anchor="ctr"/>
-          <a:lstStyle/>
-          <a:p>
-            <a:pPr algn="ctr"/>
-          </a:p>
-        </p:txBody>
-      </p:sp>
-      <p:sp>
-        <p:nvSpPr>
-          <p:cNvPr id="17" name="TextBox 16"/>
+          <a:bodyPr rtlCol="0" anchor="ctr" wrap="none"/>
+          <a:lstStyle/>
+          <a:p>
+            <a:pPr algn="ctr"/>
+            <a:r>
+              <a:rPr sz="1800" b="1">
+                <a:solidFill>
+                  <a:srgbClr val="FFFFFF"/>
+                </a:solidFill>
+              </a:rPr>
+              <a:t>2</a:t>
+            </a:r>
+          </a:p>
+        </p:txBody>
+      </p:sp>
+      <p:sp>
+        <p:nvSpPr>
+          <p:cNvPr id="16" name="TextBox 15"/>
           <p:cNvSpPr txBox="1"/>
           <p:nvPr/>
         </p:nvSpPr>
         <p:spPr>
           <a:xfrm>
-            <a:off x="8366760" y="1645920"/>
-            <a:ext cx="3291840" cy="548640"/>
+            <a:off x="2724912" y="2423160"/>
+            <a:ext cx="1783080" cy="731520"/>
           </a:xfrm>
           <a:prstGeom prst="rect">
             <a:avLst/>
@@ -8224,28 +8830,29 @@
           </a:bodyPr>
           <a:lstStyle/>
           <a:p>
-            <a:pPr algn="l"/>
-            <a:r>
-              <a:rPr sz="1500" b="1" i="0">
-                <a:solidFill>
-                  <a:srgbClr val="27AE60"/>
-                </a:solidFill>
-              </a:rPr>
-              <a:t>💊  Pharmacist / Admin</a:t>
-            </a:r>
-          </a:p>
-        </p:txBody>
-      </p:sp>
-      <p:sp>
-        <p:nvSpPr>
-          <p:cNvPr id="18" name="TextBox 17"/>
+            <a:pPr algn="ctr"/>
+            <a:r>
+              <a:rPr sz="1400" b="1" i="0">
+                <a:solidFill>
+                  <a:srgbClr val="1A202C"/>
+                </a:solidFill>
+              </a:rPr>
+              <a:t>FMS Receives
+&amp; Reviews</a:t>
+            </a:r>
+          </a:p>
+        </p:txBody>
+      </p:sp>
+      <p:sp>
+        <p:nvSpPr>
+          <p:cNvPr id="17" name="TextBox 16"/>
           <p:cNvSpPr txBox="1"/>
           <p:nvPr/>
         </p:nvSpPr>
         <p:spPr>
           <a:xfrm>
-            <a:off x="8366760" y="2286000"/>
-            <a:ext cx="3291840" cy="4023360"/>
+            <a:off x="2724912" y="3246120"/>
+            <a:ext cx="1783080" cy="1828800"/>
           </a:xfrm>
           <a:prstGeom prst="rect">
             <a:avLst/>
@@ -8258,63 +8865,776 @@
           </a:bodyPr>
           <a:lstStyle/>
           <a:p>
-            <a:pPr algn="l">
-              <a:spcBef>
-                <a:spcPts val="400"/>
-              </a:spcBef>
-            </a:pPr>
-            <a:r>
-              <a:rPr sz="1200">
+            <a:pPr algn="ctr"/>
+            <a:r>
+              <a:rPr sz="1200" b="0" i="0">
                 <a:solidFill>
                   <a:srgbClr val="4A5568"/>
                 </a:solidFill>
               </a:rPr>
-              <a:t>• Fulfil approved dispensing requests</a:t>
-            </a:r>
-          </a:p>
-          <a:p>
-            <a:pPr algn="l">
-              <a:spcBef>
-                <a:spcPts val="400"/>
-              </a:spcBef>
-            </a:pPr>
-            <a:r>
-              <a:rPr sz="1200">
+              <a:t>Form appears on FMS
+dashboard. Reviews
+clinical details.</a:t>
+            </a:r>
+          </a:p>
+        </p:txBody>
+      </p:sp>
+      <p:sp>
+        <p:nvSpPr>
+          <p:cNvPr id="18" name="TextBox 17"/>
+          <p:cNvSpPr txBox="1"/>
+          <p:nvPr/>
+        </p:nvSpPr>
+        <p:spPr>
+          <a:xfrm>
+            <a:off x="4553712" y="3017520"/>
+            <a:ext cx="347472" cy="457200"/>
+          </a:xfrm>
+          <a:prstGeom prst="rect">
+            <a:avLst/>
+          </a:prstGeom>
+          <a:noFill/>
+        </p:spPr>
+        <p:txBody>
+          <a:bodyPr wrap="square">
+            <a:spAutoFit/>
+          </a:bodyPr>
+          <a:lstStyle/>
+          <a:p>
+            <a:pPr algn="ctr"/>
+            <a:r>
+              <a:rPr sz="2200" b="1" i="0">
                 <a:solidFill>
                   <a:srgbClr val="4A5568"/>
                 </a:solidFill>
               </a:rPr>
-              <a:t>• Acknowledge antibiotic forms post-approval</a:t>
-            </a:r>
-          </a:p>
-          <a:p>
-            <a:pPr algn="l">
-              <a:spcBef>
-                <a:spcPts val="400"/>
-              </a:spcBef>
-            </a:pPr>
-            <a:r>
-              <a:rPr sz="1200">
+              <a:t>→</a:t>
+            </a:r>
+          </a:p>
+        </p:txBody>
+      </p:sp>
+      <p:sp>
+        <p:nvSpPr>
+          <p:cNvPr id="19" name="Rectangle 18"/>
+          <p:cNvSpPr/>
+          <p:nvPr/>
+        </p:nvSpPr>
+        <p:spPr>
+          <a:xfrm>
+            <a:off x="4901184" y="1463040"/>
+            <a:ext cx="1920240" cy="3840480"/>
+          </a:xfrm>
+          <a:prstGeom prst="rect">
+            <a:avLst/>
+          </a:prstGeom>
+          <a:solidFill>
+            <a:srgbClr val="F0F4F8"/>
+          </a:solidFill>
+          <a:ln>
+            <a:noFill/>
+          </a:ln>
+        </p:spPr>
+        <p:style>
+          <a:lnRef idx="1">
+            <a:schemeClr val="accent1"/>
+          </a:lnRef>
+          <a:fillRef idx="3">
+            <a:schemeClr val="accent1"/>
+          </a:fillRef>
+          <a:effectRef idx="2">
+            <a:schemeClr val="accent1"/>
+          </a:effectRef>
+          <a:fontRef idx="minor">
+            <a:schemeClr val="lt1"/>
+          </a:fontRef>
+        </p:style>
+        <p:txBody>
+          <a:bodyPr rtlCol="0" anchor="ctr"/>
+          <a:lstStyle/>
+          <a:p>
+            <a:pPr algn="ctr"/>
+          </a:p>
+        </p:txBody>
+      </p:sp>
+      <p:sp>
+        <p:nvSpPr>
+          <p:cNvPr id="20" name="Rectangle 19"/>
+          <p:cNvSpPr/>
+          <p:nvPr/>
+        </p:nvSpPr>
+        <p:spPr>
+          <a:xfrm>
+            <a:off x="4901184" y="1463040"/>
+            <a:ext cx="1920240" cy="64008"/>
+          </a:xfrm>
+          <a:prstGeom prst="rect">
+            <a:avLst/>
+          </a:prstGeom>
+          <a:solidFill>
+            <a:srgbClr val="E74C3C"/>
+          </a:solidFill>
+          <a:ln>
+            <a:noFill/>
+          </a:ln>
+        </p:spPr>
+        <p:style>
+          <a:lnRef idx="1">
+            <a:schemeClr val="accent1"/>
+          </a:lnRef>
+          <a:fillRef idx="3">
+            <a:schemeClr val="accent1"/>
+          </a:fillRef>
+          <a:effectRef idx="2">
+            <a:schemeClr val="accent1"/>
+          </a:effectRef>
+          <a:fontRef idx="minor">
+            <a:schemeClr val="lt1"/>
+          </a:fontRef>
+        </p:style>
+        <p:txBody>
+          <a:bodyPr rtlCol="0" anchor="ctr"/>
+          <a:lstStyle/>
+          <a:p>
+            <a:pPr algn="ctr"/>
+          </a:p>
+        </p:txBody>
+      </p:sp>
+      <p:sp>
+        <p:nvSpPr>
+          <p:cNvPr id="21" name="Oval 20"/>
+          <p:cNvSpPr/>
+          <p:nvPr/>
+        </p:nvSpPr>
+        <p:spPr>
+          <a:xfrm>
+            <a:off x="5495544" y="1600200"/>
+            <a:ext cx="731520" cy="731520"/>
+          </a:xfrm>
+          <a:prstGeom prst="ellipse">
+            <a:avLst/>
+          </a:prstGeom>
+          <a:solidFill>
+            <a:srgbClr val="E74C3C"/>
+          </a:solidFill>
+          <a:ln>
+            <a:noFill/>
+          </a:ln>
+        </p:spPr>
+        <p:style>
+          <a:lnRef idx="1">
+            <a:schemeClr val="accent1"/>
+          </a:lnRef>
+          <a:fillRef idx="3">
+            <a:schemeClr val="accent1"/>
+          </a:fillRef>
+          <a:effectRef idx="2">
+            <a:schemeClr val="accent1"/>
+          </a:effectRef>
+          <a:fontRef idx="minor">
+            <a:schemeClr val="lt1"/>
+          </a:fontRef>
+        </p:style>
+        <p:txBody>
+          <a:bodyPr rtlCol="0" anchor="ctr" wrap="none"/>
+          <a:lstStyle/>
+          <a:p>
+            <a:pPr algn="ctr"/>
+            <a:r>
+              <a:rPr sz="1800" b="1">
+                <a:solidFill>
+                  <a:srgbClr val="FFFFFF"/>
+                </a:solidFill>
+              </a:rPr>
+              <a:t>3</a:t>
+            </a:r>
+          </a:p>
+        </p:txBody>
+      </p:sp>
+      <p:sp>
+        <p:nvSpPr>
+          <p:cNvPr id="22" name="TextBox 21"/>
+          <p:cNvSpPr txBox="1"/>
+          <p:nvPr/>
+        </p:nvSpPr>
+        <p:spPr>
+          <a:xfrm>
+            <a:off x="4992624" y="2423160"/>
+            <a:ext cx="1783080" cy="731520"/>
+          </a:xfrm>
+          <a:prstGeom prst="rect">
+            <a:avLst/>
+          </a:prstGeom>
+          <a:noFill/>
+        </p:spPr>
+        <p:txBody>
+          <a:bodyPr wrap="square">
+            <a:spAutoFit/>
+          </a:bodyPr>
+          <a:lstStyle/>
+          <a:p>
+            <a:pPr algn="ctr"/>
+            <a:r>
+              <a:rPr sz="1400" b="1" i="0">
+                <a:solidFill>
+                  <a:srgbClr val="1A202C"/>
+                </a:solidFill>
+              </a:rPr>
+              <a:t>FMS Approves
+or Rejects</a:t>
+            </a:r>
+          </a:p>
+        </p:txBody>
+      </p:sp>
+      <p:sp>
+        <p:nvSpPr>
+          <p:cNvPr id="23" name="TextBox 22"/>
+          <p:cNvSpPr txBox="1"/>
+          <p:nvPr/>
+        </p:nvSpPr>
+        <p:spPr>
+          <a:xfrm>
+            <a:off x="4992624" y="3246120"/>
+            <a:ext cx="1783080" cy="1828800"/>
+          </a:xfrm>
+          <a:prstGeom prst="rect">
+            <a:avLst/>
+          </a:prstGeom>
+          <a:noFill/>
+        </p:spPr>
+        <p:txBody>
+          <a:bodyPr wrap="square">
+            <a:spAutoFit/>
+          </a:bodyPr>
+          <a:lstStyle/>
+          <a:p>
+            <a:pPr algn="ctr"/>
+            <a:r>
+              <a:rPr sz="1200" b="0" i="0">
                 <a:solidFill>
                   <a:srgbClr val="4A5568"/>
                 </a:solidFill>
               </a:rPr>
-              <a:t>• Manage drug master, stock receipts (Terimaan)</a:t>
-            </a:r>
-          </a:p>
-          <a:p>
-            <a:pPr algn="l">
-              <a:spcBef>
-                <a:spcPts val="400"/>
-              </a:spcBef>
-            </a:pPr>
-            <a:r>
-              <a:rPr sz="1200">
+              <a:t>Approves or rejects
+with specialist notes.
+Decision logged.</a:t>
+            </a:r>
+          </a:p>
+        </p:txBody>
+      </p:sp>
+      <p:sp>
+        <p:nvSpPr>
+          <p:cNvPr id="24" name="TextBox 23"/>
+          <p:cNvSpPr txBox="1"/>
+          <p:nvPr/>
+        </p:nvSpPr>
+        <p:spPr>
+          <a:xfrm>
+            <a:off x="6821424" y="3017520"/>
+            <a:ext cx="347472" cy="457200"/>
+          </a:xfrm>
+          <a:prstGeom prst="rect">
+            <a:avLst/>
+          </a:prstGeom>
+          <a:noFill/>
+        </p:spPr>
+        <p:txBody>
+          <a:bodyPr wrap="square">
+            <a:spAutoFit/>
+          </a:bodyPr>
+          <a:lstStyle/>
+          <a:p>
+            <a:pPr algn="ctr"/>
+            <a:r>
+              <a:rPr sz="2200" b="1" i="0">
                 <a:solidFill>
                   <a:srgbClr val="4A5568"/>
                 </a:solidFill>
               </a:rPr>
-              <a:t>• View bin card, ledger, patient registry &amp; reports</a:t>
+              <a:t>→</a:t>
+            </a:r>
+          </a:p>
+        </p:txBody>
+      </p:sp>
+      <p:sp>
+        <p:nvSpPr>
+          <p:cNvPr id="25" name="Rectangle 24"/>
+          <p:cNvSpPr/>
+          <p:nvPr/>
+        </p:nvSpPr>
+        <p:spPr>
+          <a:xfrm>
+            <a:off x="7168896" y="1463040"/>
+            <a:ext cx="1920240" cy="3840480"/>
+          </a:xfrm>
+          <a:prstGeom prst="rect">
+            <a:avLst/>
+          </a:prstGeom>
+          <a:solidFill>
+            <a:srgbClr val="F0F4F8"/>
+          </a:solidFill>
+          <a:ln>
+            <a:noFill/>
+          </a:ln>
+        </p:spPr>
+        <p:style>
+          <a:lnRef idx="1">
+            <a:schemeClr val="accent1"/>
+          </a:lnRef>
+          <a:fillRef idx="3">
+            <a:schemeClr val="accent1"/>
+          </a:fillRef>
+          <a:effectRef idx="2">
+            <a:schemeClr val="accent1"/>
+          </a:effectRef>
+          <a:fontRef idx="minor">
+            <a:schemeClr val="lt1"/>
+          </a:fontRef>
+        </p:style>
+        <p:txBody>
+          <a:bodyPr rtlCol="0" anchor="ctr"/>
+          <a:lstStyle/>
+          <a:p>
+            <a:pPr algn="ctr"/>
+          </a:p>
+        </p:txBody>
+      </p:sp>
+      <p:sp>
+        <p:nvSpPr>
+          <p:cNvPr id="26" name="Rectangle 25"/>
+          <p:cNvSpPr/>
+          <p:nvPr/>
+        </p:nvSpPr>
+        <p:spPr>
+          <a:xfrm>
+            <a:off x="7168896" y="1463040"/>
+            <a:ext cx="1920240" cy="64008"/>
+          </a:xfrm>
+          <a:prstGeom prst="rect">
+            <a:avLst/>
+          </a:prstGeom>
+          <a:solidFill>
+            <a:srgbClr val="27AE60"/>
+          </a:solidFill>
+          <a:ln>
+            <a:noFill/>
+          </a:ln>
+        </p:spPr>
+        <p:style>
+          <a:lnRef idx="1">
+            <a:schemeClr val="accent1"/>
+          </a:lnRef>
+          <a:fillRef idx="3">
+            <a:schemeClr val="accent1"/>
+          </a:fillRef>
+          <a:effectRef idx="2">
+            <a:schemeClr val="accent1"/>
+          </a:effectRef>
+          <a:fontRef idx="minor">
+            <a:schemeClr val="lt1"/>
+          </a:fontRef>
+        </p:style>
+        <p:txBody>
+          <a:bodyPr rtlCol="0" anchor="ctr"/>
+          <a:lstStyle/>
+          <a:p>
+            <a:pPr algn="ctr"/>
+          </a:p>
+        </p:txBody>
+      </p:sp>
+      <p:sp>
+        <p:nvSpPr>
+          <p:cNvPr id="27" name="Oval 26"/>
+          <p:cNvSpPr/>
+          <p:nvPr/>
+        </p:nvSpPr>
+        <p:spPr>
+          <a:xfrm>
+            <a:off x="7763256" y="1600200"/>
+            <a:ext cx="731520" cy="731520"/>
+          </a:xfrm>
+          <a:prstGeom prst="ellipse">
+            <a:avLst/>
+          </a:prstGeom>
+          <a:solidFill>
+            <a:srgbClr val="27AE60"/>
+          </a:solidFill>
+          <a:ln>
+            <a:noFill/>
+          </a:ln>
+        </p:spPr>
+        <p:style>
+          <a:lnRef idx="1">
+            <a:schemeClr val="accent1"/>
+          </a:lnRef>
+          <a:fillRef idx="3">
+            <a:schemeClr val="accent1"/>
+          </a:fillRef>
+          <a:effectRef idx="2">
+            <a:schemeClr val="accent1"/>
+          </a:effectRef>
+          <a:fontRef idx="minor">
+            <a:schemeClr val="lt1"/>
+          </a:fontRef>
+        </p:style>
+        <p:txBody>
+          <a:bodyPr rtlCol="0" anchor="ctr" wrap="none"/>
+          <a:lstStyle/>
+          <a:p>
+            <a:pPr algn="ctr"/>
+            <a:r>
+              <a:rPr sz="1800" b="1">
+                <a:solidFill>
+                  <a:srgbClr val="FFFFFF"/>
+                </a:solidFill>
+              </a:rPr>
+              <a:t>4</a:t>
+            </a:r>
+          </a:p>
+        </p:txBody>
+      </p:sp>
+      <p:sp>
+        <p:nvSpPr>
+          <p:cNvPr id="28" name="TextBox 27"/>
+          <p:cNvSpPr txBox="1"/>
+          <p:nvPr/>
+        </p:nvSpPr>
+        <p:spPr>
+          <a:xfrm>
+            <a:off x="7260336" y="2423160"/>
+            <a:ext cx="1783080" cy="731520"/>
+          </a:xfrm>
+          <a:prstGeom prst="rect">
+            <a:avLst/>
+          </a:prstGeom>
+          <a:noFill/>
+        </p:spPr>
+        <p:txBody>
+          <a:bodyPr wrap="square">
+            <a:spAutoFit/>
+          </a:bodyPr>
+          <a:lstStyle/>
+          <a:p>
+            <a:pPr algn="ctr"/>
+            <a:r>
+              <a:rPr sz="1400" b="1" i="0">
+                <a:solidFill>
+                  <a:srgbClr val="1A202C"/>
+                </a:solidFill>
+              </a:rPr>
+              <a:t>Pharmacy
+Acknowledges</a:t>
+            </a:r>
+          </a:p>
+        </p:txBody>
+      </p:sp>
+      <p:sp>
+        <p:nvSpPr>
+          <p:cNvPr id="29" name="TextBox 28"/>
+          <p:cNvSpPr txBox="1"/>
+          <p:nvPr/>
+        </p:nvSpPr>
+        <p:spPr>
+          <a:xfrm>
+            <a:off x="7260336" y="3246120"/>
+            <a:ext cx="1783080" cy="1828800"/>
+          </a:xfrm>
+          <a:prstGeom prst="rect">
+            <a:avLst/>
+          </a:prstGeom>
+          <a:noFill/>
+        </p:spPr>
+        <p:txBody>
+          <a:bodyPr wrap="square">
+            <a:spAutoFit/>
+          </a:bodyPr>
+          <a:lstStyle/>
+          <a:p>
+            <a:pPr algn="ctr"/>
+            <a:r>
+              <a:rPr sz="1200" b="0" i="0">
+                <a:solidFill>
+                  <a:srgbClr val="4A5568"/>
+                </a:solidFill>
+              </a:rPr>
+              <a:t>Pharmacist sees
+approved form and
+acknowledges dispensing.</a:t>
+            </a:r>
+          </a:p>
+        </p:txBody>
+      </p:sp>
+      <p:sp>
+        <p:nvSpPr>
+          <p:cNvPr id="30" name="TextBox 29"/>
+          <p:cNvSpPr txBox="1"/>
+          <p:nvPr/>
+        </p:nvSpPr>
+        <p:spPr>
+          <a:xfrm>
+            <a:off x="9089136" y="3017520"/>
+            <a:ext cx="347472" cy="457200"/>
+          </a:xfrm>
+          <a:prstGeom prst="rect">
+            <a:avLst/>
+          </a:prstGeom>
+          <a:noFill/>
+        </p:spPr>
+        <p:txBody>
+          <a:bodyPr wrap="square">
+            <a:spAutoFit/>
+          </a:bodyPr>
+          <a:lstStyle/>
+          <a:p>
+            <a:pPr algn="ctr"/>
+            <a:r>
+              <a:rPr sz="2200" b="1" i="0">
+                <a:solidFill>
+                  <a:srgbClr val="4A5568"/>
+                </a:solidFill>
+              </a:rPr>
+              <a:t>→</a:t>
+            </a:r>
+          </a:p>
+        </p:txBody>
+      </p:sp>
+      <p:sp>
+        <p:nvSpPr>
+          <p:cNvPr id="31" name="Rectangle 30"/>
+          <p:cNvSpPr/>
+          <p:nvPr/>
+        </p:nvSpPr>
+        <p:spPr>
+          <a:xfrm>
+            <a:off x="9436608" y="1463040"/>
+            <a:ext cx="1920240" cy="3840480"/>
+          </a:xfrm>
+          <a:prstGeom prst="rect">
+            <a:avLst/>
+          </a:prstGeom>
+          <a:solidFill>
+            <a:srgbClr val="F0F4F8"/>
+          </a:solidFill>
+          <a:ln>
+            <a:noFill/>
+          </a:ln>
+        </p:spPr>
+        <p:style>
+          <a:lnRef idx="1">
+            <a:schemeClr val="accent1"/>
+          </a:lnRef>
+          <a:fillRef idx="3">
+            <a:schemeClr val="accent1"/>
+          </a:fillRef>
+          <a:effectRef idx="2">
+            <a:schemeClr val="accent1"/>
+          </a:effectRef>
+          <a:fontRef idx="minor">
+            <a:schemeClr val="lt1"/>
+          </a:fontRef>
+        </p:style>
+        <p:txBody>
+          <a:bodyPr rtlCol="0" anchor="ctr"/>
+          <a:lstStyle/>
+          <a:p>
+            <a:pPr algn="ctr"/>
+          </a:p>
+        </p:txBody>
+      </p:sp>
+      <p:sp>
+        <p:nvSpPr>
+          <p:cNvPr id="32" name="Rectangle 31"/>
+          <p:cNvSpPr/>
+          <p:nvPr/>
+        </p:nvSpPr>
+        <p:spPr>
+          <a:xfrm>
+            <a:off x="9436608" y="1463040"/>
+            <a:ext cx="1920240" cy="64008"/>
+          </a:xfrm>
+          <a:prstGeom prst="rect">
+            <a:avLst/>
+          </a:prstGeom>
+          <a:solidFill>
+            <a:srgbClr val="2D86C9"/>
+          </a:solidFill>
+          <a:ln>
+            <a:noFill/>
+          </a:ln>
+        </p:spPr>
+        <p:style>
+          <a:lnRef idx="1">
+            <a:schemeClr val="accent1"/>
+          </a:lnRef>
+          <a:fillRef idx="3">
+            <a:schemeClr val="accent1"/>
+          </a:fillRef>
+          <a:effectRef idx="2">
+            <a:schemeClr val="accent1"/>
+          </a:effectRef>
+          <a:fontRef idx="minor">
+            <a:schemeClr val="lt1"/>
+          </a:fontRef>
+        </p:style>
+        <p:txBody>
+          <a:bodyPr rtlCol="0" anchor="ctr"/>
+          <a:lstStyle/>
+          <a:p>
+            <a:pPr algn="ctr"/>
+          </a:p>
+        </p:txBody>
+      </p:sp>
+      <p:sp>
+        <p:nvSpPr>
+          <p:cNvPr id="33" name="Oval 32"/>
+          <p:cNvSpPr/>
+          <p:nvPr/>
+        </p:nvSpPr>
+        <p:spPr>
+          <a:xfrm>
+            <a:off x="10030968" y="1600200"/>
+            <a:ext cx="731520" cy="731520"/>
+          </a:xfrm>
+          <a:prstGeom prst="ellipse">
+            <a:avLst/>
+          </a:prstGeom>
+          <a:solidFill>
+            <a:srgbClr val="2D86C9"/>
+          </a:solidFill>
+          <a:ln>
+            <a:noFill/>
+          </a:ln>
+        </p:spPr>
+        <p:style>
+          <a:lnRef idx="1">
+            <a:schemeClr val="accent1"/>
+          </a:lnRef>
+          <a:fillRef idx="3">
+            <a:schemeClr val="accent1"/>
+          </a:fillRef>
+          <a:effectRef idx="2">
+            <a:schemeClr val="accent1"/>
+          </a:effectRef>
+          <a:fontRef idx="minor">
+            <a:schemeClr val="lt1"/>
+          </a:fontRef>
+        </p:style>
+        <p:txBody>
+          <a:bodyPr rtlCol="0" anchor="ctr" wrap="none"/>
+          <a:lstStyle/>
+          <a:p>
+            <a:pPr algn="ctr"/>
+            <a:r>
+              <a:rPr sz="1800" b="1">
+                <a:solidFill>
+                  <a:srgbClr val="FFFFFF"/>
+                </a:solidFill>
+              </a:rPr>
+              <a:t>5</a:t>
+            </a:r>
+          </a:p>
+        </p:txBody>
+      </p:sp>
+      <p:sp>
+        <p:nvSpPr>
+          <p:cNvPr id="34" name="TextBox 33"/>
+          <p:cNvSpPr txBox="1"/>
+          <p:nvPr/>
+        </p:nvSpPr>
+        <p:spPr>
+          <a:xfrm>
+            <a:off x="9528048" y="2423160"/>
+            <a:ext cx="1783080" cy="731520"/>
+          </a:xfrm>
+          <a:prstGeom prst="rect">
+            <a:avLst/>
+          </a:prstGeom>
+          <a:noFill/>
+        </p:spPr>
+        <p:txBody>
+          <a:bodyPr wrap="square">
+            <a:spAutoFit/>
+          </a:bodyPr>
+          <a:lstStyle/>
+          <a:p>
+            <a:pPr algn="ctr"/>
+            <a:r>
+              <a:rPr sz="1400" b="1" i="0">
+                <a:solidFill>
+                  <a:srgbClr val="1A202C"/>
+                </a:solidFill>
+              </a:rPr>
+              <a:t>Record
+Archived</a:t>
+            </a:r>
+          </a:p>
+        </p:txBody>
+      </p:sp>
+      <p:sp>
+        <p:nvSpPr>
+          <p:cNvPr id="35" name="TextBox 34"/>
+          <p:cNvSpPr txBox="1"/>
+          <p:nvPr/>
+        </p:nvSpPr>
+        <p:spPr>
+          <a:xfrm>
+            <a:off x="9528048" y="3246120"/>
+            <a:ext cx="1783080" cy="1828800"/>
+          </a:xfrm>
+          <a:prstGeom prst="rect">
+            <a:avLst/>
+          </a:prstGeom>
+          <a:noFill/>
+        </p:spPr>
+        <p:txBody>
+          <a:bodyPr wrap="square">
+            <a:spAutoFit/>
+          </a:bodyPr>
+          <a:lstStyle/>
+          <a:p>
+            <a:pPr algn="ctr"/>
+            <a:r>
+              <a:rPr sz="1200" b="0" i="0">
+                <a:solidFill>
+                  <a:srgbClr val="4A5568"/>
+                </a:solidFill>
+              </a:rPr>
+              <a:t>Digital record stored
+forever — searchable,
+no filing cabinets.</a:t>
+            </a:r>
+          </a:p>
+        </p:txBody>
+      </p:sp>
+      <p:sp>
+        <p:nvSpPr>
+          <p:cNvPr id="36" name="TextBox 35"/>
+          <p:cNvSpPr txBox="1"/>
+          <p:nvPr/>
+        </p:nvSpPr>
+        <p:spPr>
+          <a:xfrm>
+            <a:off x="457200" y="6217920"/>
+            <a:ext cx="10972800" cy="411480"/>
+          </a:xfrm>
+          <a:prstGeom prst="rect">
+            <a:avLst/>
+          </a:prstGeom>
+          <a:noFill/>
+        </p:spPr>
+        <p:txBody>
+          <a:bodyPr wrap="square">
+            <a:spAutoFit/>
+          </a:bodyPr>
+          <a:lstStyle/>
+          <a:p>
+            <a:pPr algn="l"/>
+            <a:r>
+              <a:rPr sz="1300" b="1" i="0">
+                <a:solidFill>
+                  <a:srgbClr val="27AE60"/>
+                </a:solidFill>
+              </a:rPr>
+              <a:t>✓  Replaces: Physical A4 photocopy sheets — zero printing cost, zero lost forms</a:t>
             </a:r>
           </a:p>
         </p:txBody>
@@ -8352,7 +9672,7 @@
             <a:avLst/>
           </a:prstGeom>
           <a:solidFill>
-            <a:srgbClr val="FFFFFF"/>
+            <a:srgbClr val="F0F4F8"/>
           </a:solidFill>
           <a:ln>
             <a:noFill/>
@@ -8438,7 +9758,7 @@
             <a:avLst/>
           </a:prstGeom>
           <a:solidFill>
-            <a:srgbClr val="27AE60"/>
+            <a:srgbClr val="2D86C9"/>
           </a:solidFill>
           <a:ln>
             <a:noFill/>
@@ -8474,8 +9794,8 @@
         </p:nvSpPr>
         <p:spPr>
           <a:xfrm>
-            <a:off x="502920" y="228600"/>
-            <a:ext cx="9144000" cy="731520"/>
+            <a:off x="502920" y="201168"/>
+            <a:ext cx="10058400" cy="777240"/>
           </a:xfrm>
           <a:prstGeom prst="rect">
             <a:avLst/>
@@ -8495,7 +9815,7 @@
                   <a:srgbClr val="FFFFFF"/>
                 </a:solidFill>
               </a:rPr>
-              <a:t>Key Features</a:t>
+              <a:t>Before vs. After</a:t>
             </a:r>
           </a:p>
         </p:txBody>
@@ -8508,8 +9828,8 @@
         </p:nvSpPr>
         <p:spPr>
           <a:xfrm>
-            <a:off x="502920" y="777240"/>
-            <a:ext cx="10058400" cy="457200"/>
+            <a:off x="502920" y="804672"/>
+            <a:ext cx="10058400" cy="438912"/>
           </a:xfrm>
           <a:prstGeom prst="rect">
             <a:avLst/>
@@ -8529,7 +9849,7 @@
                   <a:srgbClr val="B0C8E8"/>
                 </a:solidFill>
               </a:rPr>
-              <a:t>Purpose-built for Malaysian Klinik Kesihatan operations</a:t>
+              <a:t>What changes for each team when they move to the system</a:t>
             </a:r>
           </a:p>
         </p:txBody>
@@ -8542,14 +9862,14 @@
         </p:nvSpPr>
         <p:spPr>
           <a:xfrm>
-            <a:off x="320040" y="1508760"/>
-            <a:ext cx="2743200" cy="2194560"/>
-          </a:xfrm>
-          <a:prstGeom prst="rect">
-            <a:avLst/>
-          </a:prstGeom>
-          <a:solidFill>
-            <a:srgbClr val="F0F4F8"/>
+            <a:off x="457200" y="1371600"/>
+            <a:ext cx="5303520" cy="411480"/>
+          </a:xfrm>
+          <a:prstGeom prst="rect">
+            <a:avLst/>
+          </a:prstGeom>
+          <a:solidFill>
+            <a:srgbClr val="E74C3C"/>
           </a:solidFill>
           <a:ln>
             <a:noFill/>
@@ -8585,8 +9905,8 @@
         </p:nvSpPr>
         <p:spPr>
           <a:xfrm>
-            <a:off x="457200" y="1645920"/>
-            <a:ext cx="548640" cy="457200"/>
+            <a:off x="548640" y="1371600"/>
+            <a:ext cx="5120640" cy="411480"/>
           </a:xfrm>
           <a:prstGeom prst="rect">
             <a:avLst/>
@@ -8601,100 +9921,32 @@
           <a:p>
             <a:pPr algn="l"/>
             <a:r>
-              <a:rPr sz="2200" b="0" i="0">
-                <a:solidFill>
-                  <a:srgbClr val="1A202C"/>
-                </a:solidFill>
-              </a:rPr>
-              <a:t>📊</a:t>
-            </a:r>
-          </a:p>
-        </p:txBody>
-      </p:sp>
-      <p:sp>
-        <p:nvSpPr>
-          <p:cNvPr id="9" name="TextBox 8"/>
-          <p:cNvSpPr txBox="1"/>
-          <p:nvPr/>
-        </p:nvSpPr>
-        <p:spPr>
-          <a:xfrm>
-            <a:off x="457200" y="2103120"/>
-            <a:ext cx="2468880" cy="457200"/>
-          </a:xfrm>
-          <a:prstGeom prst="rect">
-            <a:avLst/>
-          </a:prstGeom>
-          <a:noFill/>
-        </p:spPr>
-        <p:txBody>
-          <a:bodyPr wrap="square">
-            <a:spAutoFit/>
-          </a:bodyPr>
-          <a:lstStyle/>
-          <a:p>
-            <a:pPr algn="l"/>
-            <a:r>
-              <a:rPr sz="1300" b="1" i="0">
-                <a:solidFill>
-                  <a:srgbClr val="1B4F8A"/>
-                </a:solidFill>
-              </a:rPr>
-              <a:t>Live Stock Dashboard</a:t>
-            </a:r>
-          </a:p>
-        </p:txBody>
-      </p:sp>
-      <p:sp>
-        <p:nvSpPr>
-          <p:cNvPr id="10" name="TextBox 9"/>
-          <p:cNvSpPr txBox="1"/>
-          <p:nvPr/>
-        </p:nvSpPr>
-        <p:spPr>
-          <a:xfrm>
-            <a:off x="457200" y="2560320"/>
-            <a:ext cx="2468880" cy="1005840"/>
-          </a:xfrm>
-          <a:prstGeom prst="rect">
-            <a:avLst/>
-          </a:prstGeom>
-          <a:noFill/>
-        </p:spPr>
-        <p:txBody>
-          <a:bodyPr wrap="square">
-            <a:spAutoFit/>
-          </a:bodyPr>
-          <a:lstStyle/>
-          <a:p>
-            <a:pPr algn="l"/>
-            <a:r>
-              <a:rPr sz="1100" b="0" i="0">
-                <a:solidFill>
-                  <a:srgbClr val="4A5568"/>
-                </a:solidFill>
-              </a:rPr>
-              <a:t>KRITIKAL / RENDAH / NORMAL / LEBIHAN status badges. Auto-refresh every 15–30 seconds.</a:t>
-            </a:r>
-          </a:p>
-        </p:txBody>
-      </p:sp>
-      <p:sp>
-        <p:nvSpPr>
-          <p:cNvPr id="11" name="Rectangle 10"/>
+              <a:rPr sz="1400" b="1" i="0">
+                <a:solidFill>
+                  <a:srgbClr val="FFFFFF"/>
+                </a:solidFill>
+              </a:rPr>
+              <a:t>BEFORE  (Google Sheets + Paper)</a:t>
+            </a:r>
+          </a:p>
+        </p:txBody>
+      </p:sp>
+      <p:sp>
+        <p:nvSpPr>
+          <p:cNvPr id="9" name="Rectangle 8"/>
           <p:cNvSpPr/>
           <p:nvPr/>
         </p:nvSpPr>
         <p:spPr>
           <a:xfrm>
-            <a:off x="3246120" y="1508760"/>
-            <a:ext cx="2743200" cy="2194560"/>
-          </a:xfrm>
-          <a:prstGeom prst="rect">
-            <a:avLst/>
-          </a:prstGeom>
-          <a:solidFill>
-            <a:srgbClr val="F0F4F8"/>
+            <a:off x="6309360" y="1371600"/>
+            <a:ext cx="5486400" cy="411480"/>
+          </a:xfrm>
+          <a:prstGeom prst="rect">
+            <a:avLst/>
+          </a:prstGeom>
+          <a:solidFill>
+            <a:srgbClr val="27AE60"/>
           </a:solidFill>
           <a:ln>
             <a:noFill/>
@@ -8724,14 +9976,14 @@
       </p:sp>
       <p:sp>
         <p:nvSpPr>
-          <p:cNvPr id="12" name="TextBox 11"/>
+          <p:cNvPr id="10" name="TextBox 9"/>
           <p:cNvSpPr txBox="1"/>
           <p:nvPr/>
         </p:nvSpPr>
         <p:spPr>
           <a:xfrm>
-            <a:off x="3383280" y="1645920"/>
-            <a:ext cx="548640" cy="457200"/>
+            <a:off x="6400800" y="1371600"/>
+            <a:ext cx="5303520" cy="411480"/>
           </a:xfrm>
           <a:prstGeom prst="rect">
             <a:avLst/>
@@ -8746,100 +9998,32 @@
           <a:p>
             <a:pPr algn="l"/>
             <a:r>
-              <a:rPr sz="2200" b="0" i="0">
-                <a:solidFill>
-                  <a:srgbClr val="1A202C"/>
-                </a:solidFill>
-              </a:rPr>
-              <a:t>📋</a:t>
-            </a:r>
-          </a:p>
-        </p:txBody>
-      </p:sp>
-      <p:sp>
-        <p:nvSpPr>
-          <p:cNvPr id="13" name="TextBox 12"/>
-          <p:cNvSpPr txBox="1"/>
-          <p:nvPr/>
-        </p:nvSpPr>
-        <p:spPr>
-          <a:xfrm>
-            <a:off x="3383280" y="2103120"/>
-            <a:ext cx="2468880" cy="457200"/>
-          </a:xfrm>
-          <a:prstGeom prst="rect">
-            <a:avLst/>
-          </a:prstGeom>
-          <a:noFill/>
-        </p:spPr>
-        <p:txBody>
-          <a:bodyPr wrap="square">
-            <a:spAutoFit/>
-          </a:bodyPr>
-          <a:lstStyle/>
-          <a:p>
-            <a:pPr algn="l"/>
-            <a:r>
-              <a:rPr sz="1300" b="1" i="0">
-                <a:solidFill>
-                  <a:srgbClr val="1B4F8A"/>
-                </a:solidFill>
-              </a:rPr>
-              <a:t>Digital Bin Card &amp; Ledger</a:t>
-            </a:r>
-          </a:p>
-        </p:txBody>
-      </p:sp>
-      <p:sp>
-        <p:nvSpPr>
-          <p:cNvPr id="14" name="TextBox 13"/>
-          <p:cNvSpPr txBox="1"/>
-          <p:nvPr/>
-        </p:nvSpPr>
-        <p:spPr>
-          <a:xfrm>
-            <a:off x="3383280" y="2560320"/>
-            <a:ext cx="2468880" cy="1005840"/>
-          </a:xfrm>
-          <a:prstGeom prst="rect">
-            <a:avLst/>
-          </a:prstGeom>
-          <a:noFill/>
-        </p:spPr>
-        <p:txBody>
-          <a:bodyPr wrap="square">
-            <a:spAutoFit/>
-          </a:bodyPr>
-          <a:lstStyle/>
-          <a:p>
-            <a:pPr algn="l"/>
-            <a:r>
-              <a:rPr sz="1100" b="0" i="0">
-                <a:solidFill>
-                  <a:srgbClr val="4A5568"/>
-                </a:solidFill>
-              </a:rPr>
-              <a:t>Per-drug ledger with full terimaan/keluaran history. Printable bin-card view.</a:t>
-            </a:r>
-          </a:p>
-        </p:txBody>
-      </p:sp>
-      <p:sp>
-        <p:nvSpPr>
-          <p:cNvPr id="15" name="Rectangle 14"/>
+              <a:rPr sz="1400" b="1" i="0">
+                <a:solidFill>
+                  <a:srgbClr val="FFFFFF"/>
+                </a:solidFill>
+              </a:rPr>
+              <a:t>AFTER  (This System)</a:t>
+            </a:r>
+          </a:p>
+        </p:txBody>
+      </p:sp>
+      <p:sp>
+        <p:nvSpPr>
+          <p:cNvPr id="11" name="Rectangle 10"/>
           <p:cNvSpPr/>
           <p:nvPr/>
         </p:nvSpPr>
         <p:spPr>
           <a:xfrm>
-            <a:off x="6172200" y="1508760"/>
-            <a:ext cx="2743200" cy="2194560"/>
-          </a:xfrm>
-          <a:prstGeom prst="rect">
-            <a:avLst/>
-          </a:prstGeom>
-          <a:solidFill>
-            <a:srgbClr val="F0F4F8"/>
+            <a:off x="457200" y="1874519"/>
+            <a:ext cx="11338560" cy="713232"/>
+          </a:xfrm>
+          <a:prstGeom prst="rect">
+            <a:avLst/>
+          </a:prstGeom>
+          <a:solidFill>
+            <a:srgbClr val="FFFFFF"/>
           </a:solidFill>
           <a:ln>
             <a:noFill/>
@@ -8869,14 +10053,14 @@
       </p:sp>
       <p:sp>
         <p:nvSpPr>
-          <p:cNvPr id="16" name="TextBox 15"/>
+          <p:cNvPr id="12" name="TextBox 11"/>
           <p:cNvSpPr txBox="1"/>
           <p:nvPr/>
         </p:nvSpPr>
         <p:spPr>
           <a:xfrm>
-            <a:off x="6309360" y="1645920"/>
-            <a:ext cx="548640" cy="457200"/>
+            <a:off x="548640" y="1984247"/>
+            <a:ext cx="1463040" cy="502920"/>
           </a:xfrm>
           <a:prstGeom prst="rect">
             <a:avLst/>
@@ -8891,26 +10075,26 @@
           <a:p>
             <a:pPr algn="l"/>
             <a:r>
-              <a:rPr sz="2200" b="0" i="0">
-                <a:solidFill>
-                  <a:srgbClr val="1A202C"/>
-                </a:solidFill>
-              </a:rPr>
-              <a:t>💉</a:t>
-            </a:r>
-          </a:p>
-        </p:txBody>
-      </p:sp>
-      <p:sp>
-        <p:nvSpPr>
-          <p:cNvPr id="17" name="TextBox 16"/>
+              <a:rPr sz="1200" b="1" i="0">
+                <a:solidFill>
+                  <a:srgbClr val="1B4F8A"/>
+                </a:solidFill>
+              </a:rPr>
+              <a:t>Quota drug tracking</a:t>
+            </a:r>
+          </a:p>
+        </p:txBody>
+      </p:sp>
+      <p:sp>
+        <p:nvSpPr>
+          <p:cNvPr id="13" name="TextBox 12"/>
           <p:cNvSpPr txBox="1"/>
           <p:nvPr/>
         </p:nvSpPr>
         <p:spPr>
           <a:xfrm>
-            <a:off x="6309360" y="2103120"/>
-            <a:ext cx="2468880" cy="457200"/>
+            <a:off x="2103120" y="1984247"/>
+            <a:ext cx="3749039" cy="502920"/>
           </a:xfrm>
           <a:prstGeom prst="rect">
             <a:avLst/>
@@ -8925,26 +10109,26 @@
           <a:p>
             <a:pPr algn="l"/>
             <a:r>
-              <a:rPr sz="1300" b="1" i="0">
-                <a:solidFill>
-                  <a:srgbClr val="1B4F8A"/>
-                </a:solidFill>
-              </a:rPr>
-              <a:t>Antibiotic Stewardship</a:t>
-            </a:r>
-          </a:p>
-        </p:txBody>
-      </p:sp>
-      <p:sp>
-        <p:nvSpPr>
-          <p:cNvPr id="18" name="TextBox 17"/>
+              <a:rPr sz="1200" b="0" i="0">
+                <a:solidFill>
+                  <a:srgbClr val="E74C3C"/>
+                </a:solidFill>
+              </a:rPr>
+              <a:t>✗  Multiple Google Sheet tabs — easy to miss or enter in wrong tab</a:t>
+            </a:r>
+          </a:p>
+        </p:txBody>
+      </p:sp>
+      <p:sp>
+        <p:nvSpPr>
+          <p:cNvPr id="14" name="TextBox 13"/>
           <p:cNvSpPr txBox="1"/>
           <p:nvPr/>
         </p:nvSpPr>
         <p:spPr>
           <a:xfrm>
-            <a:off x="6309360" y="2560320"/>
-            <a:ext cx="2468880" cy="1005840"/>
+            <a:off x="6035040" y="1984247"/>
+            <a:ext cx="5577840" cy="502920"/>
           </a:xfrm>
           <a:prstGeom prst="rect">
             <a:avLst/>
@@ -8959,32 +10143,32 @@
           <a:p>
             <a:pPr algn="l"/>
             <a:r>
-              <a:rPr sz="1100" b="0" i="0">
-                <a:solidFill>
-                  <a:srgbClr val="4A5568"/>
-                </a:solidFill>
-              </a:rPr>
-              <a:t>Built-in NAG 2024 Clinical Pathway checklist. FMS approval gate before dispensing.</a:t>
-            </a:r>
-          </a:p>
-        </p:txBody>
-      </p:sp>
-      <p:sp>
-        <p:nvSpPr>
-          <p:cNvPr id="19" name="Rectangle 18"/>
+              <a:rPr sz="1200" b="0" i="0">
+                <a:solidFill>
+                  <a:srgbClr val="1A7A40"/>
+                </a:solidFill>
+              </a:rPr>
+              <a:t>✓  Structured form per request — one place, always right</a:t>
+            </a:r>
+          </a:p>
+        </p:txBody>
+      </p:sp>
+      <p:sp>
+        <p:nvSpPr>
+          <p:cNvPr id="15" name="Rectangle 14"/>
           <p:cNvSpPr/>
           <p:nvPr/>
         </p:nvSpPr>
         <p:spPr>
           <a:xfrm>
-            <a:off x="9098280" y="1508760"/>
-            <a:ext cx="2743200" cy="2194560"/>
-          </a:xfrm>
-          <a:prstGeom prst="rect">
-            <a:avLst/>
-          </a:prstGeom>
-          <a:solidFill>
-            <a:srgbClr val="F0F4F8"/>
+            <a:off x="457200" y="2624327"/>
+            <a:ext cx="11338560" cy="713232"/>
+          </a:xfrm>
+          <a:prstGeom prst="rect">
+            <a:avLst/>
+          </a:prstGeom>
+          <a:solidFill>
+            <a:srgbClr val="F7F9FC"/>
           </a:solidFill>
           <a:ln>
             <a:noFill/>
@@ -9014,14 +10198,14 @@
       </p:sp>
       <p:sp>
         <p:nvSpPr>
-          <p:cNvPr id="20" name="TextBox 19"/>
+          <p:cNvPr id="16" name="TextBox 15"/>
           <p:cNvSpPr txBox="1"/>
           <p:nvPr/>
         </p:nvSpPr>
         <p:spPr>
           <a:xfrm>
-            <a:off x="9235440" y="1645920"/>
-            <a:ext cx="548640" cy="457200"/>
+            <a:off x="548640" y="2734055"/>
+            <a:ext cx="1463040" cy="502920"/>
           </a:xfrm>
           <a:prstGeom prst="rect">
             <a:avLst/>
@@ -9036,26 +10220,26 @@
           <a:p>
             <a:pPr algn="l"/>
             <a:r>
-              <a:rPr sz="2200" b="0" i="0">
-                <a:solidFill>
-                  <a:srgbClr val="1A202C"/>
-                </a:solidFill>
-              </a:rPr>
-              <a:t>🔐</a:t>
-            </a:r>
-          </a:p>
-        </p:txBody>
-      </p:sp>
-      <p:sp>
-        <p:nvSpPr>
-          <p:cNvPr id="21" name="TextBox 20"/>
+              <a:rPr sz="1200" b="1" i="0">
+                <a:solidFill>
+                  <a:srgbClr val="1B4F8A"/>
+                </a:solidFill>
+              </a:rPr>
+              <a:t>Antibiotic approval</a:t>
+            </a:r>
+          </a:p>
+        </p:txBody>
+      </p:sp>
+      <p:sp>
+        <p:nvSpPr>
+          <p:cNvPr id="17" name="TextBox 16"/>
           <p:cNvSpPr txBox="1"/>
           <p:nvPr/>
         </p:nvSpPr>
         <p:spPr>
           <a:xfrm>
-            <a:off x="9235440" y="2103120"/>
-            <a:ext cx="2468880" cy="457200"/>
+            <a:off x="2103120" y="2734055"/>
+            <a:ext cx="3749039" cy="502920"/>
           </a:xfrm>
           <a:prstGeom prst="rect">
             <a:avLst/>
@@ -9070,26 +10254,26 @@
           <a:p>
             <a:pPr algn="l"/>
             <a:r>
-              <a:rPr sz="1300" b="1" i="0">
-                <a:solidFill>
-                  <a:srgbClr val="1B4F8A"/>
-                </a:solidFill>
-              </a:rPr>
-              <a:t>Controlled Drug Quotas</a:t>
-            </a:r>
-          </a:p>
-        </p:txBody>
-      </p:sp>
-      <p:sp>
-        <p:nvSpPr>
-          <p:cNvPr id="22" name="TextBox 21"/>
+              <a:rPr sz="1200" b="0" i="0">
+                <a:solidFill>
+                  <a:srgbClr val="E74C3C"/>
+                </a:solidFill>
+              </a:rPr>
+              <a:t>✗  Physical A4 photocopy form passed hand-to-hand</a:t>
+            </a:r>
+          </a:p>
+        </p:txBody>
+      </p:sp>
+      <p:sp>
+        <p:nvSpPr>
+          <p:cNvPr id="18" name="TextBox 17"/>
           <p:cNvSpPr txBox="1"/>
           <p:nvPr/>
         </p:nvSpPr>
         <p:spPr>
           <a:xfrm>
-            <a:off x="9235440" y="2560320"/>
-            <a:ext cx="2468880" cy="1005840"/>
+            <a:off x="6035040" y="2734055"/>
+            <a:ext cx="5577840" cy="502920"/>
           </a:xfrm>
           <a:prstGeom prst="rect">
             <a:avLst/>
@@ -9104,32 +10288,32 @@
           <a:p>
             <a:pPr algn="l"/>
             <a:r>
-              <a:rPr sz="1100" b="0" i="0">
-                <a:solidFill>
-                  <a:srgbClr val="4A5568"/>
-                </a:solidFill>
-              </a:rPr>
-              <a:t>Annual patient quota per controlled drug. Pesara (retiree) tracked separately.</a:t>
-            </a:r>
-          </a:p>
-        </p:txBody>
-      </p:sp>
-      <p:sp>
-        <p:nvSpPr>
-          <p:cNvPr id="23" name="Rectangle 22"/>
+              <a:rPr sz="1200" b="0" i="0">
+                <a:solidFill>
+                  <a:srgbClr val="1A7A40"/>
+                </a:solidFill>
+              </a:rPr>
+              <a:t>✓  Digital form submitted instantly, routed automatically</a:t>
+            </a:r>
+          </a:p>
+        </p:txBody>
+      </p:sp>
+      <p:sp>
+        <p:nvSpPr>
+          <p:cNvPr id="19" name="Rectangle 18"/>
           <p:cNvSpPr/>
           <p:nvPr/>
         </p:nvSpPr>
         <p:spPr>
           <a:xfrm>
-            <a:off x="320040" y="3886200"/>
-            <a:ext cx="2743200" cy="2194560"/>
-          </a:xfrm>
-          <a:prstGeom prst="rect">
-            <a:avLst/>
-          </a:prstGeom>
-          <a:solidFill>
-            <a:srgbClr val="F0F4F8"/>
+            <a:off x="457200" y="3374135"/>
+            <a:ext cx="11338560" cy="713232"/>
+          </a:xfrm>
+          <a:prstGeom prst="rect">
+            <a:avLst/>
+          </a:prstGeom>
+          <a:solidFill>
+            <a:srgbClr val="FFFFFF"/>
           </a:solidFill>
           <a:ln>
             <a:noFill/>
@@ -9159,14 +10343,14 @@
       </p:sp>
       <p:sp>
         <p:nvSpPr>
-          <p:cNvPr id="24" name="TextBox 23"/>
+          <p:cNvPr id="20" name="TextBox 19"/>
           <p:cNvSpPr txBox="1"/>
           <p:nvPr/>
         </p:nvSpPr>
         <p:spPr>
           <a:xfrm>
-            <a:off x="457200" y="4023360"/>
-            <a:ext cx="548640" cy="457200"/>
+            <a:off x="548640" y="3483863"/>
+            <a:ext cx="1463040" cy="502920"/>
           </a:xfrm>
           <a:prstGeom prst="rect">
             <a:avLst/>
@@ -9181,26 +10365,26 @@
           <a:p>
             <a:pPr algn="l"/>
             <a:r>
-              <a:rPr sz="2200" b="0" i="0">
-                <a:solidFill>
-                  <a:srgbClr val="1A202C"/>
-                </a:solidFill>
-              </a:rPr>
-              <a:t>🗂️</a:t>
-            </a:r>
-          </a:p>
-        </p:txBody>
-      </p:sp>
-      <p:sp>
-        <p:nvSpPr>
-          <p:cNvPr id="25" name="TextBox 24"/>
+              <a:rPr sz="1200" b="1" i="0">
+                <a:solidFill>
+                  <a:srgbClr val="1B4F8A"/>
+                </a:solidFill>
+              </a:rPr>
+              <a:t>FMS review</a:t>
+            </a:r>
+          </a:p>
+        </p:txBody>
+      </p:sp>
+      <p:sp>
+        <p:nvSpPr>
+          <p:cNvPr id="21" name="TextBox 20"/>
           <p:cNvSpPr txBox="1"/>
           <p:nvPr/>
         </p:nvSpPr>
         <p:spPr>
           <a:xfrm>
-            <a:off x="457200" y="4480560"/>
-            <a:ext cx="2468880" cy="457200"/>
+            <a:off x="2103120" y="3483863"/>
+            <a:ext cx="3749039" cy="502920"/>
           </a:xfrm>
           <a:prstGeom prst="rect">
             <a:avLst/>
@@ -9215,26 +10399,26 @@
           <a:p>
             <a:pPr algn="l"/>
             <a:r>
-              <a:rPr sz="1300" b="1" i="0">
-                <a:solidFill>
-                  <a:srgbClr val="1B4F8A"/>
-                </a:solidFill>
-              </a:rPr>
-              <a:t>Patient Registry</a:t>
-            </a:r>
-          </a:p>
-        </p:txBody>
-      </p:sp>
-      <p:sp>
-        <p:nvSpPr>
-          <p:cNvPr id="26" name="TextBox 25"/>
+              <a:rPr sz="1200" b="0" i="0">
+                <a:solidFill>
+                  <a:srgbClr val="E74C3C"/>
+                </a:solidFill>
+              </a:rPr>
+              <a:t>✗  Receive forms physically or via WhatsApp photo</a:t>
+            </a:r>
+          </a:p>
+        </p:txBody>
+      </p:sp>
+      <p:sp>
+        <p:nvSpPr>
+          <p:cNvPr id="22" name="TextBox 21"/>
           <p:cNvSpPr txBox="1"/>
           <p:nvPr/>
         </p:nvSpPr>
         <p:spPr>
           <a:xfrm>
-            <a:off x="457200" y="4937760"/>
-            <a:ext cx="2468880" cy="1005840"/>
+            <a:off x="6035040" y="3483863"/>
+            <a:ext cx="5577840" cy="502920"/>
           </a:xfrm>
           <a:prstGeom prst="rect">
             <a:avLst/>
@@ -9249,32 +10433,32 @@
           <a:p>
             <a:pPr algn="l"/>
             <a:r>
-              <a:rPr sz="1100" b="0" i="0">
-                <a:solidFill>
-                  <a:srgbClr val="4A5568"/>
-                </a:solidFill>
-              </a:rPr>
-              <a:t>Auto-created on first dispensing. Full drug history per patient IC.</a:t>
-            </a:r>
-          </a:p>
-        </p:txBody>
-      </p:sp>
-      <p:sp>
-        <p:nvSpPr>
-          <p:cNvPr id="27" name="Rectangle 26"/>
+              <a:rPr sz="1200" b="0" i="0">
+                <a:solidFill>
+                  <a:srgbClr val="1A7A40"/>
+                </a:solidFill>
+              </a:rPr>
+              <a:t>✓  Dedicated FMS dashboard — all pending items in one view</a:t>
+            </a:r>
+          </a:p>
+        </p:txBody>
+      </p:sp>
+      <p:sp>
+        <p:nvSpPr>
+          <p:cNvPr id="23" name="Rectangle 22"/>
           <p:cNvSpPr/>
           <p:nvPr/>
         </p:nvSpPr>
         <p:spPr>
           <a:xfrm>
-            <a:off x="3246120" y="3886200"/>
-            <a:ext cx="2743200" cy="2194560"/>
-          </a:xfrm>
-          <a:prstGeom prst="rect">
-            <a:avLst/>
-          </a:prstGeom>
-          <a:solidFill>
-            <a:srgbClr val="F0F4F8"/>
+            <a:off x="457200" y="4123943"/>
+            <a:ext cx="11338560" cy="713232"/>
+          </a:xfrm>
+          <a:prstGeom prst="rect">
+            <a:avLst/>
+          </a:prstGeom>
+          <a:solidFill>
+            <a:srgbClr val="F7F9FC"/>
           </a:solidFill>
           <a:ln>
             <a:noFill/>
@@ -9304,14 +10488,14 @@
       </p:sp>
       <p:sp>
         <p:nvSpPr>
-          <p:cNvPr id="28" name="TextBox 27"/>
+          <p:cNvPr id="24" name="TextBox 23"/>
           <p:cNvSpPr txBox="1"/>
           <p:nvPr/>
         </p:nvSpPr>
         <p:spPr>
           <a:xfrm>
-            <a:off x="3383280" y="4023360"/>
-            <a:ext cx="548640" cy="457200"/>
+            <a:off x="548640" y="4233671"/>
+            <a:ext cx="1463040" cy="502920"/>
           </a:xfrm>
           <a:prstGeom prst="rect">
             <a:avLst/>
@@ -9326,26 +10510,26 @@
           <a:p>
             <a:pPr algn="l"/>
             <a:r>
-              <a:rPr sz="2200" b="0" i="0">
-                <a:solidFill>
-                  <a:srgbClr val="1A202C"/>
-                </a:solidFill>
-              </a:rPr>
-              <a:t>📈</a:t>
-            </a:r>
-          </a:p>
-        </p:txBody>
-      </p:sp>
-      <p:sp>
-        <p:nvSpPr>
-          <p:cNvPr id="29" name="TextBox 28"/>
+              <a:rPr sz="1200" b="1" i="0">
+                <a:solidFill>
+                  <a:srgbClr val="1B4F8A"/>
+                </a:solidFill>
+              </a:rPr>
+              <a:t>Pharmacy step</a:t>
+            </a:r>
+          </a:p>
+        </p:txBody>
+      </p:sp>
+      <p:sp>
+        <p:nvSpPr>
+          <p:cNvPr id="25" name="TextBox 24"/>
           <p:cNvSpPr txBox="1"/>
           <p:nvPr/>
         </p:nvSpPr>
         <p:spPr>
           <a:xfrm>
-            <a:off x="3383280" y="4480560"/>
-            <a:ext cx="2468880" cy="457200"/>
+            <a:off x="2103120" y="4233671"/>
+            <a:ext cx="3749039" cy="502920"/>
           </a:xfrm>
           <a:prstGeom prst="rect">
             <a:avLst/>
@@ -9360,26 +10544,26 @@
           <a:p>
             <a:pPr algn="l"/>
             <a:r>
-              <a:rPr sz="1300" b="1" i="0">
-                <a:solidFill>
-                  <a:srgbClr val="1B4F8A"/>
-                </a:solidFill>
-              </a:rPr>
-              <a:t>Usage Forecasting</a:t>
-            </a:r>
-          </a:p>
-        </p:txBody>
-      </p:sp>
-      <p:sp>
-        <p:nvSpPr>
-          <p:cNvPr id="30" name="TextBox 29"/>
+              <a:rPr sz="1200" b="0" i="0">
+                <a:solidFill>
+                  <a:srgbClr val="E74C3C"/>
+                </a:solidFill>
+              </a:rPr>
+              <a:t>✗  Informed verbally or by paper after FMS approves</a:t>
+            </a:r>
+          </a:p>
+        </p:txBody>
+      </p:sp>
+      <p:sp>
+        <p:nvSpPr>
+          <p:cNvPr id="26" name="TextBox 25"/>
           <p:cNvSpPr txBox="1"/>
           <p:nvPr/>
         </p:nvSpPr>
         <p:spPr>
           <a:xfrm>
-            <a:off x="3383280" y="4937760"/>
-            <a:ext cx="2468880" cy="1005840"/>
+            <a:off x="6035040" y="4233671"/>
+            <a:ext cx="5577840" cy="502920"/>
           </a:xfrm>
           <a:prstGeom prst="rect">
             <a:avLst/>
@@ -9394,32 +10578,32 @@
           <a:p>
             <a:pPr algn="l"/>
             <a:r>
-              <a:rPr sz="1100" b="0" i="0">
-                <a:solidFill>
-                  <a:srgbClr val="4A5568"/>
-                </a:solidFill>
-              </a:rPr>
-              <a:t>30-day rolling average + projected stock exhaustion date per drug.</a:t>
-            </a:r>
-          </a:p>
-        </p:txBody>
-      </p:sp>
-      <p:sp>
-        <p:nvSpPr>
-          <p:cNvPr id="31" name="Rectangle 30"/>
+              <a:rPr sz="1200" b="0" i="0">
+                <a:solidFill>
+                  <a:srgbClr val="1A7A40"/>
+                </a:solidFill>
+              </a:rPr>
+              <a:t>✓  Auto-notified with approved queue — one-click acknowledge</a:t>
+            </a:r>
+          </a:p>
+        </p:txBody>
+      </p:sp>
+      <p:sp>
+        <p:nvSpPr>
+          <p:cNvPr id="27" name="Rectangle 26"/>
           <p:cNvSpPr/>
           <p:nvPr/>
         </p:nvSpPr>
         <p:spPr>
           <a:xfrm>
-            <a:off x="6172200" y="3886200"/>
-            <a:ext cx="2743200" cy="2194560"/>
-          </a:xfrm>
-          <a:prstGeom prst="rect">
-            <a:avLst/>
-          </a:prstGeom>
-          <a:solidFill>
-            <a:srgbClr val="F0F4F8"/>
+            <a:off x="457200" y="4873751"/>
+            <a:ext cx="11338560" cy="713232"/>
+          </a:xfrm>
+          <a:prstGeom prst="rect">
+            <a:avLst/>
+          </a:prstGeom>
+          <a:solidFill>
+            <a:srgbClr val="FFFFFF"/>
           </a:solidFill>
           <a:ln>
             <a:noFill/>
@@ -9449,14 +10633,14 @@
       </p:sp>
       <p:sp>
         <p:nvSpPr>
-          <p:cNvPr id="32" name="TextBox 31"/>
+          <p:cNvPr id="28" name="TextBox 27"/>
           <p:cNvSpPr txBox="1"/>
           <p:nvPr/>
         </p:nvSpPr>
         <p:spPr>
           <a:xfrm>
-            <a:off x="6309360" y="4023360"/>
-            <a:ext cx="548640" cy="457200"/>
+            <a:off x="548640" y="4983479"/>
+            <a:ext cx="1463040" cy="502920"/>
           </a:xfrm>
           <a:prstGeom prst="rect">
             <a:avLst/>
@@ -9471,26 +10655,26 @@
           <a:p>
             <a:pPr algn="l"/>
             <a:r>
-              <a:rPr sz="2200" b="0" i="0">
-                <a:solidFill>
-                  <a:srgbClr val="1A202C"/>
-                </a:solidFill>
-              </a:rPr>
-              <a:t>🛡️</a:t>
-            </a:r>
-          </a:p>
-        </p:txBody>
-      </p:sp>
-      <p:sp>
-        <p:nvSpPr>
-          <p:cNvPr id="33" name="TextBox 32"/>
+              <a:rPr sz="1200" b="1" i="0">
+                <a:solidFill>
+                  <a:srgbClr val="1B4F8A"/>
+                </a:solidFill>
+              </a:rPr>
+              <a:t>Record keeping</a:t>
+            </a:r>
+          </a:p>
+        </p:txBody>
+      </p:sp>
+      <p:sp>
+        <p:nvSpPr>
+          <p:cNvPr id="29" name="TextBox 28"/>
           <p:cNvSpPr txBox="1"/>
           <p:nvPr/>
         </p:nvSpPr>
         <p:spPr>
           <a:xfrm>
-            <a:off x="6309360" y="4480560"/>
-            <a:ext cx="2468880" cy="457200"/>
+            <a:off x="2103120" y="4983479"/>
+            <a:ext cx="3749039" cy="502920"/>
           </a:xfrm>
           <a:prstGeom prst="rect">
             <a:avLst/>
@@ -9505,26 +10689,26 @@
           <a:p>
             <a:pPr algn="l"/>
             <a:r>
-              <a:rPr sz="1300" b="1" i="0">
-                <a:solidFill>
-                  <a:srgbClr val="1B4F8A"/>
-                </a:solidFill>
-              </a:rPr>
-              <a:t>Role-Based Access Control</a:t>
-            </a:r>
-          </a:p>
-        </p:txBody>
-      </p:sp>
-      <p:sp>
-        <p:nvSpPr>
-          <p:cNvPr id="34" name="TextBox 33"/>
+              <a:rPr sz="1200" b="0" i="0">
+                <a:solidFill>
+                  <a:srgbClr val="E74C3C"/>
+                </a:solidFill>
+              </a:rPr>
+              <a:t>✗  Files in folders; impossible to search quickly</a:t>
+            </a:r>
+          </a:p>
+        </p:txBody>
+      </p:sp>
+      <p:sp>
+        <p:nvSpPr>
+          <p:cNvPr id="30" name="TextBox 29"/>
           <p:cNvSpPr txBox="1"/>
           <p:nvPr/>
         </p:nvSpPr>
         <p:spPr>
           <a:xfrm>
-            <a:off x="6309360" y="4937760"/>
-            <a:ext cx="2468880" cy="1005840"/>
+            <a:off x="6035040" y="4983479"/>
+            <a:ext cx="5577840" cy="502920"/>
           </a:xfrm>
           <a:prstGeom prst="rect">
             <a:avLst/>
@@ -9539,32 +10723,32 @@
           <a:p>
             <a:pPr algn="l"/>
             <a:r>
-              <a:rPr sz="1100" b="0" i="0">
-                <a:solidFill>
-                  <a:srgbClr val="4A5568"/>
-                </a:solidFill>
-              </a:rPr>
-              <a:t>4 roles, granular route protection. No cross-role data leakage.</a:t>
-            </a:r>
-          </a:p>
-        </p:txBody>
-      </p:sp>
-      <p:sp>
-        <p:nvSpPr>
-          <p:cNvPr id="35" name="Rectangle 34"/>
+              <a:rPr sz="1200" b="0" i="0">
+                <a:solidFill>
+                  <a:srgbClr val="1A7A40"/>
+                </a:solidFill>
+              </a:rPr>
+              <a:t>✓  Searchable digital log — find any record in seconds</a:t>
+            </a:r>
+          </a:p>
+        </p:txBody>
+      </p:sp>
+      <p:sp>
+        <p:nvSpPr>
+          <p:cNvPr id="31" name="Rectangle 30"/>
           <p:cNvSpPr/>
           <p:nvPr/>
         </p:nvSpPr>
         <p:spPr>
           <a:xfrm>
-            <a:off x="9098280" y="3886200"/>
-            <a:ext cx="2743200" cy="2194560"/>
-          </a:xfrm>
-          <a:prstGeom prst="rect">
-            <a:avLst/>
-          </a:prstGeom>
-          <a:solidFill>
-            <a:srgbClr val="F0F4F8"/>
+            <a:off x="457200" y="5623559"/>
+            <a:ext cx="11338560" cy="713232"/>
+          </a:xfrm>
+          <a:prstGeom prst="rect">
+            <a:avLst/>
+          </a:prstGeom>
+          <a:solidFill>
+            <a:srgbClr val="F7F9FC"/>
           </a:solidFill>
           <a:ln>
             <a:noFill/>
@@ -9594,14 +10778,14 @@
       </p:sp>
       <p:sp>
         <p:nvSpPr>
-          <p:cNvPr id="36" name="TextBox 35"/>
+          <p:cNvPr id="32" name="TextBox 31"/>
           <p:cNvSpPr txBox="1"/>
           <p:nvPr/>
         </p:nvSpPr>
         <p:spPr>
           <a:xfrm>
-            <a:off x="9235440" y="4023360"/>
-            <a:ext cx="548640" cy="457200"/>
+            <a:off x="548640" y="5733287"/>
+            <a:ext cx="1463040" cy="502920"/>
           </a:xfrm>
           <a:prstGeom prst="rect">
             <a:avLst/>
@@ -9616,26 +10800,26 @@
           <a:p>
             <a:pPr algn="l"/>
             <a:r>
-              <a:rPr sz="2200" b="0" i="0">
-                <a:solidFill>
-                  <a:srgbClr val="1A202C"/>
-                </a:solidFill>
-              </a:rPr>
-              <a:t>📝</a:t>
-            </a:r>
-          </a:p>
-        </p:txBody>
-      </p:sp>
-      <p:sp>
-        <p:nvSpPr>
-          <p:cNvPr id="37" name="TextBox 36"/>
+              <a:rPr sz="1200" b="1" i="0">
+                <a:solidFill>
+                  <a:srgbClr val="1B4F8A"/>
+                </a:solidFill>
+              </a:rPr>
+              <a:t>Cost</a:t>
+            </a:r>
+          </a:p>
+        </p:txBody>
+      </p:sp>
+      <p:sp>
+        <p:nvSpPr>
+          <p:cNvPr id="33" name="TextBox 32"/>
           <p:cNvSpPr txBox="1"/>
           <p:nvPr/>
         </p:nvSpPr>
         <p:spPr>
           <a:xfrm>
-            <a:off x="9235440" y="4480560"/>
-            <a:ext cx="2468880" cy="457200"/>
+            <a:off x="2103120" y="5733287"/>
+            <a:ext cx="3749039" cy="502920"/>
           </a:xfrm>
           <a:prstGeom prst="rect">
             <a:avLst/>
@@ -9650,26 +10834,26 @@
           <a:p>
             <a:pPr algn="l"/>
             <a:r>
-              <a:rPr sz="1300" b="1" i="0">
-                <a:solidFill>
-                  <a:srgbClr val="1B4F8A"/>
-                </a:solidFill>
-              </a:rPr>
-              <a:t>Full Audit Trail</a:t>
-            </a:r>
-          </a:p>
-        </p:txBody>
-      </p:sp>
-      <p:sp>
-        <p:nvSpPr>
-          <p:cNvPr id="38" name="TextBox 37"/>
+              <a:rPr sz="1200" b="0" i="0">
+                <a:solidFill>
+                  <a:srgbClr val="E74C3C"/>
+                </a:solidFill>
+              </a:rPr>
+              <a:t>✗  Photocopy &amp; A4 paper cost for every antibiotic form</a:t>
+            </a:r>
+          </a:p>
+        </p:txBody>
+      </p:sp>
+      <p:sp>
+        <p:nvSpPr>
+          <p:cNvPr id="34" name="TextBox 33"/>
           <p:cNvSpPr txBox="1"/>
           <p:nvPr/>
         </p:nvSpPr>
         <p:spPr>
           <a:xfrm>
-            <a:off x="9235440" y="4937760"/>
-            <a:ext cx="2468880" cy="1005840"/>
+            <a:off x="6035040" y="5733287"/>
+            <a:ext cx="5577840" cy="502920"/>
           </a:xfrm>
           <a:prstGeom prst="rect">
             <a:avLst/>
@@ -9684,12 +10868,12 @@
           <a:p>
             <a:pPr algn="l"/>
             <a:r>
-              <a:rPr sz="1100" b="0" i="0">
-                <a:solidFill>
-                  <a:srgbClr val="4A5568"/>
-                </a:solidFill>
-              </a:rPr>
-              <a:t>Every approval, rejection, and dispensing is timestamped and attributed.</a:t>
+              <a:rPr sz="1200" b="0" i="0">
+                <a:solidFill>
+                  <a:srgbClr val="1A7A40"/>
+                </a:solidFill>
+              </a:rPr>
+              <a:t>✓  Zero printing cost — fully paperless</a:t>
             </a:r>
           </a:p>
         </p:txBody>
@@ -9727,7 +10911,7 @@
             <a:avLst/>
           </a:prstGeom>
           <a:solidFill>
-            <a:srgbClr val="F0F4F8"/>
+            <a:srgbClr val="FFFFFF"/>
           </a:solidFill>
           <a:ln>
             <a:noFill/>
@@ -9813,7 +10997,7 @@
             <a:avLst/>
           </a:prstGeom>
           <a:solidFill>
-            <a:srgbClr val="8E44AD"/>
+            <a:srgbClr val="F39C12"/>
           </a:solidFill>
           <a:ln>
             <a:noFill/>
@@ -9849,8 +11033,8 @@
         </p:nvSpPr>
         <p:spPr>
           <a:xfrm>
-            <a:off x="502920" y="228600"/>
-            <a:ext cx="9144000" cy="731520"/>
+            <a:off x="502920" y="201168"/>
+            <a:ext cx="10058400" cy="777240"/>
           </a:xfrm>
           <a:prstGeom prst="rect">
             <a:avLst/>
@@ -9870,7 +11054,7 @@
                   <a:srgbClr val="FFFFFF"/>
                 </a:solidFill>
               </a:rPr>
-              <a:t>Technology Stack</a:t>
+              <a:t>What Each Role Sees &amp; Does</a:t>
             </a:r>
           </a:p>
         </p:txBody>
@@ -9883,8 +11067,8 @@
         </p:nvSpPr>
         <p:spPr>
           <a:xfrm>
-            <a:off x="502920" y="777240"/>
-            <a:ext cx="10058400" cy="457200"/>
+            <a:off x="502920" y="804672"/>
+            <a:ext cx="10058400" cy="438912"/>
           </a:xfrm>
           <a:prstGeom prst="rect">
             <a:avLst/>
@@ -9904,7 +11088,7 @@
                   <a:srgbClr val="B0C8E8"/>
                 </a:solidFill>
               </a:rPr>
-              <a:t>Modern, proven, cloud-native — zero infrastructure to manage</a:t>
+              <a:t>Purpose-built view for each team — no clutter, no confusion</a:t>
             </a:r>
           </a:p>
         </p:txBody>
@@ -9917,14 +11101,14 @@
         </p:nvSpPr>
         <p:spPr>
           <a:xfrm>
-            <a:off x="457200" y="1463040"/>
-            <a:ext cx="2651760" cy="5029200"/>
-          </a:xfrm>
-          <a:prstGeom prst="rect">
-            <a:avLst/>
-          </a:prstGeom>
-          <a:solidFill>
-            <a:srgbClr val="FFFFFF"/>
+            <a:off x="411480" y="1417320"/>
+            <a:ext cx="3566160" cy="5120640"/>
+          </a:xfrm>
+          <a:prstGeom prst="rect">
+            <a:avLst/>
+          </a:prstGeom>
+          <a:solidFill>
+            <a:srgbClr val="F0F4F8"/>
           </a:solidFill>
           <a:ln>
             <a:noFill/>
@@ -9960,8 +11144,8 @@
         </p:nvSpPr>
         <p:spPr>
           <a:xfrm>
-            <a:off x="457200" y="1463040"/>
-            <a:ext cx="2651760" cy="411480"/>
+            <a:off x="411480" y="1417320"/>
+            <a:ext cx="3566160" cy="64008"/>
           </a:xfrm>
           <a:prstGeom prst="rect">
             <a:avLst/>
@@ -10003,8 +11187,8 @@
         </p:nvSpPr>
         <p:spPr>
           <a:xfrm>
-            <a:off x="594360" y="1508760"/>
-            <a:ext cx="2377440" cy="365760"/>
+            <a:off x="594360" y="1600200"/>
+            <a:ext cx="3291840" cy="685800"/>
           </a:xfrm>
           <a:prstGeom prst="rect">
             <a:avLst/>
@@ -10019,12 +11203,13 @@
           <a:p>
             <a:pPr algn="l"/>
             <a:r>
-              <a:rPr sz="1500" b="1" i="0">
-                <a:solidFill>
-                  <a:srgbClr val="FFFFFF"/>
-                </a:solidFill>
-              </a:rPr>
-              <a:t>Frontend</a:t>
+              <a:rPr sz="1600" b="1" i="0">
+                <a:solidFill>
+                  <a:srgbClr val="1B4F8A"/>
+                </a:solidFill>
+              </a:rPr>
+              <a:t>👨‍⚕️  Medical Officer
+(MO)</a:t>
             </a:r>
           </a:p>
         </p:txBody>
@@ -10037,8 +11222,8 @@
         </p:nvSpPr>
         <p:spPr>
           <a:xfrm>
-            <a:off x="640080" y="2011680"/>
-            <a:ext cx="2377440" cy="4389120"/>
+            <a:off x="594360" y="2377440"/>
+            <a:ext cx="3291840" cy="4069080"/>
           </a:xfrm>
           <a:prstGeom prst="rect">
             <a:avLst/>
@@ -10062,7 +11247,7 @@
                   <a:srgbClr val="4A5568"/>
                 </a:solidFill>
               </a:rPr>
-              <a:t>▸ React 18 + TypeScript</a:t>
+              <a:t>• Submit quota drug requests for patients</a:t>
             </a:r>
           </a:p>
           <a:p>
@@ -10077,7 +11262,7 @@
                   <a:srgbClr val="4A5568"/>
                 </a:solidFill>
               </a:rPr>
-              <a:t>▸ Vite (SWC) · Port 8080</a:t>
+              <a:t>• Fill and submit antibiotic approval forms</a:t>
             </a:r>
           </a:p>
           <a:p>
@@ -10092,7 +11277,7 @@
                   <a:srgbClr val="4A5568"/>
                 </a:solidFill>
               </a:rPr>
-              <a:t>▸ React Router v6</a:t>
+              <a:t>• Track live status of submitted requests</a:t>
             </a:r>
           </a:p>
           <a:p>
@@ -10107,7 +11292,7 @@
                   <a:srgbClr val="4A5568"/>
                 </a:solidFill>
               </a:rPr>
-              <a:t>▸ TanStack Query (server state)</a:t>
+              <a:t>• View pending count badge on dashboard</a:t>
             </a:r>
           </a:p>
         </p:txBody>
@@ -10120,14 +11305,14 @@
         </p:nvSpPr>
         <p:spPr>
           <a:xfrm>
-            <a:off x="3291840" y="1463040"/>
-            <a:ext cx="2651760" cy="5029200"/>
-          </a:xfrm>
-          <a:prstGeom prst="rect">
-            <a:avLst/>
-          </a:prstGeom>
-          <a:solidFill>
-            <a:srgbClr val="FFFFFF"/>
+            <a:off x="4325112" y="1417320"/>
+            <a:ext cx="3566160" cy="5120640"/>
+          </a:xfrm>
+          <a:prstGeom prst="rect">
+            <a:avLst/>
+          </a:prstGeom>
+          <a:solidFill>
+            <a:srgbClr val="F0F4F8"/>
           </a:solidFill>
           <a:ln>
             <a:noFill/>
@@ -10163,14 +11348,14 @@
         </p:nvSpPr>
         <p:spPr>
           <a:xfrm>
-            <a:off x="3291840" y="1463040"/>
-            <a:ext cx="2651760" cy="411480"/>
-          </a:xfrm>
-          <a:prstGeom prst="rect">
-            <a:avLst/>
-          </a:prstGeom>
-          <a:solidFill>
-            <a:srgbClr val="2D86C9"/>
+            <a:off x="4325112" y="1417320"/>
+            <a:ext cx="3566160" cy="64008"/>
+          </a:xfrm>
+          <a:prstGeom prst="rect">
+            <a:avLst/>
+          </a:prstGeom>
+          <a:solidFill>
+            <a:srgbClr val="F39C12"/>
           </a:solidFill>
           <a:ln>
             <a:noFill/>
@@ -10206,8 +11391,8 @@
         </p:nvSpPr>
         <p:spPr>
           <a:xfrm>
-            <a:off x="3429000" y="1508760"/>
-            <a:ext cx="2377440" cy="365760"/>
+            <a:off x="4507992" y="1600200"/>
+            <a:ext cx="3291840" cy="685800"/>
           </a:xfrm>
           <a:prstGeom prst="rect">
             <a:avLst/>
@@ -10222,12 +11407,12 @@
           <a:p>
             <a:pPr algn="l"/>
             <a:r>
-              <a:rPr sz="1500" b="1" i="0">
-                <a:solidFill>
-                  <a:srgbClr val="FFFFFF"/>
-                </a:solidFill>
-              </a:rPr>
-              <a:t>UI / Design</a:t>
+              <a:rPr sz="1600" b="1" i="0">
+                <a:solidFill>
+                  <a:srgbClr val="F39C12"/>
+                </a:solidFill>
+              </a:rPr>
+              <a:t>🩺  FMS Specialist</a:t>
             </a:r>
           </a:p>
         </p:txBody>
@@ -10240,8 +11425,8 @@
         </p:nvSpPr>
         <p:spPr>
           <a:xfrm>
-            <a:off x="3474720" y="2011680"/>
-            <a:ext cx="2377440" cy="4389120"/>
+            <a:off x="4507992" y="2377440"/>
+            <a:ext cx="3291840" cy="4069080"/>
           </a:xfrm>
           <a:prstGeom prst="rect">
             <a:avLst/>
@@ -10265,7 +11450,7 @@
                   <a:srgbClr val="4A5568"/>
                 </a:solidFill>
               </a:rPr>
-              <a:t>▸ shadcn/ui (Radix primitives)</a:t>
+              <a:t>• Dedicated inbox for all pending MO requests</a:t>
             </a:r>
           </a:p>
           <a:p>
@@ -10280,7 +11465,7 @@
                   <a:srgbClr val="4A5568"/>
                 </a:solidFill>
               </a:rPr>
-              <a:t>▸ Tailwind CSS</a:t>
+              <a:t>• Review quota drug requests &amp; approve / reject</a:t>
             </a:r>
           </a:p>
           <a:p>
@@ -10295,7 +11480,7 @@
                   <a:srgbClr val="4A5568"/>
                 </a:solidFill>
               </a:rPr>
-              <a:t>▸ Recharts (dashboards)</a:t>
+              <a:t>• Review antibiotic forms &amp; approve / reject</a:t>
             </a:r>
           </a:p>
           <a:p>
@@ -10310,7 +11495,22 @@
                   <a:srgbClr val="4A5568"/>
                 </a:solidFill>
               </a:rPr>
-              <a:t>▸ Lucide icons</a:t>
+              <a:t>• Add specialist notes to every decision</a:t>
+            </a:r>
+          </a:p>
+          <a:p>
+            <a:pPr algn="l">
+              <a:spcBef>
+                <a:spcPts val="400"/>
+              </a:spcBef>
+            </a:pPr>
+            <a:r>
+              <a:rPr sz="1300">
+                <a:solidFill>
+                  <a:srgbClr val="4A5568"/>
+                </a:solidFill>
+              </a:rPr>
+              <a:t>• Monitor annual quota usage per drug</a:t>
             </a:r>
           </a:p>
         </p:txBody>
@@ -10323,14 +11523,14 @@
         </p:nvSpPr>
         <p:spPr>
           <a:xfrm>
-            <a:off x="6126480" y="1463040"/>
-            <a:ext cx="2651760" cy="5029200"/>
-          </a:xfrm>
-          <a:prstGeom prst="rect">
-            <a:avLst/>
-          </a:prstGeom>
-          <a:solidFill>
-            <a:srgbClr val="FFFFFF"/>
+            <a:off x="8238744" y="1417320"/>
+            <a:ext cx="3566160" cy="5120640"/>
+          </a:xfrm>
+          <a:prstGeom prst="rect">
+            <a:avLst/>
+          </a:prstGeom>
+          <a:solidFill>
+            <a:srgbClr val="F0F4F8"/>
           </a:solidFill>
           <a:ln>
             <a:noFill/>
@@ -10366,8 +11566,8 @@
         </p:nvSpPr>
         <p:spPr>
           <a:xfrm>
-            <a:off x="6126480" y="1463040"/>
-            <a:ext cx="2651760" cy="411480"/>
+            <a:off x="8238744" y="1417320"/>
+            <a:ext cx="3566160" cy="64008"/>
           </a:xfrm>
           <a:prstGeom prst="rect">
             <a:avLst/>
@@ -10409,8 +11609,8 @@
         </p:nvSpPr>
         <p:spPr>
           <a:xfrm>
-            <a:off x="6263640" y="1508760"/>
-            <a:ext cx="2377440" cy="365760"/>
+            <a:off x="8421624" y="1600200"/>
+            <a:ext cx="3291840" cy="685800"/>
           </a:xfrm>
           <a:prstGeom prst="rect">
             <a:avLst/>
@@ -10425,12 +11625,13 @@
           <a:p>
             <a:pPr algn="l"/>
             <a:r>
-              <a:rPr sz="1500" b="1" i="0">
-                <a:solidFill>
-                  <a:srgbClr val="FFFFFF"/>
-                </a:solidFill>
-              </a:rPr>
-              <a:t>Backend / Data</a:t>
+              <a:rPr sz="1600" b="1" i="0">
+                <a:solidFill>
+                  <a:srgbClr val="27AE60"/>
+                </a:solidFill>
+              </a:rPr>
+              <a:t>💊  Pharmacist /
+Admin</a:t>
             </a:r>
           </a:p>
         </p:txBody>
@@ -10443,8 +11644,8 @@
         </p:nvSpPr>
         <p:spPr>
           <a:xfrm>
-            <a:off x="6309360" y="2011680"/>
-            <a:ext cx="2377440" cy="4389120"/>
+            <a:off x="8421624" y="2377440"/>
+            <a:ext cx="3291840" cy="4069080"/>
           </a:xfrm>
           <a:prstGeom prst="rect">
             <a:avLst/>
@@ -10468,7 +11669,7 @@
                   <a:srgbClr val="4A5568"/>
                 </a:solidFill>
               </a:rPr>
-              <a:t>▸ Supabase (PostgreSQL)</a:t>
+              <a:t>• Receive approved requests automatically</a:t>
             </a:r>
           </a:p>
           <a:p>
@@ -10483,7 +11684,7 @@
                   <a:srgbClr val="4A5568"/>
                 </a:solidFill>
               </a:rPr>
-              <a:t>▸ Row-Level Security (RLS)</a:t>
+              <a:t>• Acknowledge dispensing (quota drugs)</a:t>
             </a:r>
           </a:p>
           <a:p>
@@ -10498,7 +11699,7 @@
                   <a:srgbClr val="4A5568"/>
                 </a:solidFill>
               </a:rPr>
-              <a:t>▸ Supabase Auth (JWT)</a:t>
+              <a:t>• Acknowledge antibiotic forms post-FMS</a:t>
             </a:r>
           </a:p>
           <a:p>
@@ -10513,152 +11714,9 @@
                   <a:srgbClr val="4A5568"/>
                 </a:solidFill>
               </a:rPr>
-              <a:t>▸ Real-time subscriptions</a:t>
-            </a:r>
-          </a:p>
-        </p:txBody>
-      </p:sp>
-      <p:sp>
-        <p:nvSpPr>
-          <p:cNvPr id="19" name="Rectangle 18"/>
-          <p:cNvSpPr/>
-          <p:nvPr/>
-        </p:nvSpPr>
-        <p:spPr>
-          <a:xfrm>
-            <a:off x="8961120" y="1463040"/>
-            <a:ext cx="2651760" cy="5029200"/>
-          </a:xfrm>
-          <a:prstGeom prst="rect">
-            <a:avLst/>
-          </a:prstGeom>
-          <a:solidFill>
-            <a:srgbClr val="FFFFFF"/>
-          </a:solidFill>
-          <a:ln>
-            <a:noFill/>
-          </a:ln>
-        </p:spPr>
-        <p:style>
-          <a:lnRef idx="1">
-            <a:schemeClr val="accent1"/>
-          </a:lnRef>
-          <a:fillRef idx="3">
-            <a:schemeClr val="accent1"/>
-          </a:fillRef>
-          <a:effectRef idx="2">
-            <a:schemeClr val="accent1"/>
-          </a:effectRef>
-          <a:fontRef idx="minor">
-            <a:schemeClr val="lt1"/>
-          </a:fontRef>
-        </p:style>
-        <p:txBody>
-          <a:bodyPr rtlCol="0" anchor="ctr"/>
-          <a:lstStyle/>
-          <a:p>
-            <a:pPr algn="ctr"/>
-          </a:p>
-        </p:txBody>
-      </p:sp>
-      <p:sp>
-        <p:nvSpPr>
-          <p:cNvPr id="20" name="Rectangle 19"/>
-          <p:cNvSpPr/>
-          <p:nvPr/>
-        </p:nvSpPr>
-        <p:spPr>
-          <a:xfrm>
-            <a:off x="8961120" y="1463040"/>
-            <a:ext cx="2651760" cy="411480"/>
-          </a:xfrm>
-          <a:prstGeom prst="rect">
-            <a:avLst/>
-          </a:prstGeom>
-          <a:solidFill>
-            <a:srgbClr val="F39C12"/>
-          </a:solidFill>
-          <a:ln>
-            <a:noFill/>
-          </a:ln>
-        </p:spPr>
-        <p:style>
-          <a:lnRef idx="1">
-            <a:schemeClr val="accent1"/>
-          </a:lnRef>
-          <a:fillRef idx="3">
-            <a:schemeClr val="accent1"/>
-          </a:fillRef>
-          <a:effectRef idx="2">
-            <a:schemeClr val="accent1"/>
-          </a:effectRef>
-          <a:fontRef idx="minor">
-            <a:schemeClr val="lt1"/>
-          </a:fontRef>
-        </p:style>
-        <p:txBody>
-          <a:bodyPr rtlCol="0" anchor="ctr"/>
-          <a:lstStyle/>
-          <a:p>
-            <a:pPr algn="ctr"/>
-          </a:p>
-        </p:txBody>
-      </p:sp>
-      <p:sp>
-        <p:nvSpPr>
-          <p:cNvPr id="21" name="TextBox 20"/>
-          <p:cNvSpPr txBox="1"/>
-          <p:nvPr/>
-        </p:nvSpPr>
-        <p:spPr>
-          <a:xfrm>
-            <a:off x="9098280" y="1508760"/>
-            <a:ext cx="2377440" cy="365760"/>
-          </a:xfrm>
-          <a:prstGeom prst="rect">
-            <a:avLst/>
-          </a:prstGeom>
-          <a:noFill/>
-        </p:spPr>
-        <p:txBody>
-          <a:bodyPr wrap="square">
-            <a:spAutoFit/>
-          </a:bodyPr>
-          <a:lstStyle/>
-          <a:p>
-            <a:pPr algn="l"/>
-            <a:r>
-              <a:rPr sz="1500" b="1" i="0">
-                <a:solidFill>
-                  <a:srgbClr val="FFFFFF"/>
-                </a:solidFill>
-              </a:rPr>
-              <a:t>Forms / QA</a:t>
-            </a:r>
-          </a:p>
-        </p:txBody>
-      </p:sp>
-      <p:sp>
-        <p:nvSpPr>
-          <p:cNvPr id="22" name="TextBox 21"/>
-          <p:cNvSpPr txBox="1"/>
-          <p:nvPr/>
-        </p:nvSpPr>
-        <p:spPr>
-          <a:xfrm>
-            <a:off x="9144000" y="2011680"/>
-            <a:ext cx="2377440" cy="4389120"/>
-          </a:xfrm>
-          <a:prstGeom prst="rect">
-            <a:avLst/>
-          </a:prstGeom>
-          <a:noFill/>
-        </p:spPr>
-        <p:txBody>
-          <a:bodyPr wrap="square">
-            <a:spAutoFit/>
-          </a:bodyPr>
-          <a:lstStyle/>
+              <a:t>• Manage drug master list &amp; stock receipts</a:t>
+            </a:r>
+          </a:p>
           <a:p>
             <a:pPr algn="l">
               <a:spcBef>
@@ -10671,52 +11729,7 @@
                   <a:srgbClr val="4A5568"/>
                 </a:solidFill>
               </a:rPr>
-              <a:t>▸ React Hook Form + Zod</a:t>
-            </a:r>
-          </a:p>
-          <a:p>
-            <a:pPr algn="l">
-              <a:spcBef>
-                <a:spcPts val="400"/>
-              </a:spcBef>
-            </a:pPr>
-            <a:r>
-              <a:rPr sz="1300">
-                <a:solidFill>
-                  <a:srgbClr val="4A5568"/>
-                </a:solidFill>
-              </a:rPr>
-              <a:t>▸ Vitest (unit tests)</a:t>
-            </a:r>
-          </a:p>
-          <a:p>
-            <a:pPr algn="l">
-              <a:spcBef>
-                <a:spcPts val="400"/>
-              </a:spcBef>
-            </a:pPr>
-            <a:r>
-              <a:rPr sz="1300">
-                <a:solidFill>
-                  <a:srgbClr val="4A5568"/>
-                </a:solidFill>
-              </a:rPr>
-              <a:t>▸ Playwright (E2E)</a:t>
-            </a:r>
-          </a:p>
-          <a:p>
-            <a:pPr algn="l">
-              <a:spcBef>
-                <a:spcPts val="400"/>
-              </a:spcBef>
-            </a:pPr>
-            <a:r>
-              <a:rPr sz="1300">
-                <a:solidFill>
-                  <a:srgbClr val="4A5568"/>
-                </a:solidFill>
-              </a:rPr>
-              <a:t>▸ ESLint + TypeScript strict</a:t>
+              <a:t>• View reports and patient drug records</a:t>
             </a:r>
           </a:p>
         </p:txBody>
@@ -10754,7 +11767,7 @@
             <a:avLst/>
           </a:prstGeom>
           <a:solidFill>
-            <a:srgbClr val="FFFFFF"/>
+            <a:srgbClr val="F0F4F8"/>
           </a:solidFill>
           <a:ln>
             <a:noFill/>
@@ -10840,7 +11853,7 @@
             <a:avLst/>
           </a:prstGeom>
           <a:solidFill>
-            <a:srgbClr val="E74C3C"/>
+            <a:srgbClr val="27AE60"/>
           </a:solidFill>
           <a:ln>
             <a:noFill/>
@@ -10876,8 +11889,8 @@
         </p:nvSpPr>
         <p:spPr>
           <a:xfrm>
-            <a:off x="502920" y="228600"/>
-            <a:ext cx="9144000" cy="731520"/>
+            <a:off x="502920" y="201168"/>
+            <a:ext cx="10058400" cy="777240"/>
           </a:xfrm>
           <a:prstGeom prst="rect">
             <a:avLst/>
@@ -10897,7 +11910,7 @@
                   <a:srgbClr val="FFFFFF"/>
                 </a:solidFill>
               </a:rPr>
-              <a:t>Security &amp; Compliance</a:t>
+              <a:t>Key Benefits</a:t>
             </a:r>
           </a:p>
         </p:txBody>
@@ -10910,8 +11923,8 @@
         </p:nvSpPr>
         <p:spPr>
           <a:xfrm>
-            <a:off x="502920" y="777240"/>
-            <a:ext cx="10058400" cy="457200"/>
+            <a:off x="502920" y="804672"/>
+            <a:ext cx="10058400" cy="438912"/>
           </a:xfrm>
           <a:prstGeom prst="rect">
             <a:avLst/>
@@ -10931,7 +11944,7 @@
                   <a:srgbClr val="B0C8E8"/>
                 </a:solidFill>
               </a:rPr>
-              <a:t>Healthcare-grade data protection built in from day one</a:t>
+              <a:t>Measurable improvements from day one of going live</a:t>
             </a:r>
           </a:p>
         </p:txBody>
@@ -10944,14 +11957,14 @@
         </p:nvSpPr>
         <p:spPr>
           <a:xfrm>
-            <a:off x="457200" y="1463040"/>
-            <a:ext cx="5486400" cy="1554480"/>
-          </a:xfrm>
-          <a:prstGeom prst="rect">
-            <a:avLst/>
-          </a:prstGeom>
-          <a:solidFill>
-            <a:srgbClr val="F0F4F8"/>
+            <a:off x="365760" y="1508760"/>
+            <a:ext cx="3566160" cy="2103120"/>
+          </a:xfrm>
+          <a:prstGeom prst="rect">
+            <a:avLst/>
+          </a:prstGeom>
+          <a:solidFill>
+            <a:srgbClr val="FFFFFF"/>
           </a:solidFill>
           <a:ln>
             <a:noFill/>
@@ -10981,88 +11994,20 @@
       </p:sp>
       <p:sp>
         <p:nvSpPr>
-          <p:cNvPr id="8" name="TextBox 7"/>
-          <p:cNvSpPr txBox="1"/>
-          <p:nvPr/>
-        </p:nvSpPr>
-        <p:spPr>
-          <a:xfrm>
-            <a:off x="640080" y="1554480"/>
-            <a:ext cx="5212080" cy="457200"/>
-          </a:xfrm>
-          <a:prstGeom prst="rect">
-            <a:avLst/>
-          </a:prstGeom>
-          <a:noFill/>
-        </p:spPr>
-        <p:txBody>
-          <a:bodyPr wrap="square">
-            <a:spAutoFit/>
-          </a:bodyPr>
-          <a:lstStyle/>
-          <a:p>
-            <a:pPr algn="l"/>
-            <a:r>
-              <a:rPr sz="1400" b="1" i="0">
-                <a:solidFill>
-                  <a:srgbClr val="1B4F8A"/>
-                </a:solidFill>
-              </a:rPr>
-              <a:t>🔐  Row-Level Security (RLS)</a:t>
-            </a:r>
-          </a:p>
-        </p:txBody>
-      </p:sp>
-      <p:sp>
-        <p:nvSpPr>
-          <p:cNvPr id="9" name="TextBox 8"/>
-          <p:cNvSpPr txBox="1"/>
-          <p:nvPr/>
-        </p:nvSpPr>
-        <p:spPr>
-          <a:xfrm>
-            <a:off x="640080" y="2011680"/>
-            <a:ext cx="5212080" cy="868680"/>
-          </a:xfrm>
-          <a:prstGeom prst="rect">
-            <a:avLst/>
-          </a:prstGeom>
-          <a:noFill/>
-        </p:spPr>
-        <p:txBody>
-          <a:bodyPr wrap="square">
-            <a:spAutoFit/>
-          </a:bodyPr>
-          <a:lstStyle/>
-          <a:p>
-            <a:pPr algn="l"/>
-            <a:r>
-              <a:rPr sz="1100" b="0" i="0">
-                <a:solidFill>
-                  <a:srgbClr val="4A5568"/>
-                </a:solidFill>
-              </a:rPr>
-              <a:t>Every Supabase table enforces RLS. Users can only read/write data their role permits — enforced at the database layer, not just the UI.</a:t>
-            </a:r>
-          </a:p>
-        </p:txBody>
-      </p:sp>
-      <p:sp>
-        <p:nvSpPr>
-          <p:cNvPr id="10" name="Rectangle 9"/>
+          <p:cNvPr id="8" name="Rectangle 7"/>
           <p:cNvSpPr/>
           <p:nvPr/>
         </p:nvSpPr>
         <p:spPr>
           <a:xfrm>
-            <a:off x="457200" y="3154680"/>
-            <a:ext cx="5486400" cy="1554480"/>
-          </a:xfrm>
-          <a:prstGeom prst="rect">
-            <a:avLst/>
-          </a:prstGeom>
-          <a:solidFill>
-            <a:srgbClr val="F0F4F8"/>
+            <a:off x="365760" y="1508760"/>
+            <a:ext cx="3566160" cy="64008"/>
+          </a:xfrm>
+          <a:prstGeom prst="rect">
+            <a:avLst/>
+          </a:prstGeom>
+          <a:solidFill>
+            <a:srgbClr val="27AE60"/>
           </a:solidFill>
           <a:ln>
             <a:noFill/>
@@ -11092,14 +12037,14 @@
       </p:sp>
       <p:sp>
         <p:nvSpPr>
-          <p:cNvPr id="11" name="TextBox 10"/>
+          <p:cNvPr id="9" name="TextBox 8"/>
           <p:cNvSpPr txBox="1"/>
           <p:nvPr/>
         </p:nvSpPr>
         <p:spPr>
           <a:xfrm>
-            <a:off x="640080" y="3246120"/>
-            <a:ext cx="5212080" cy="457200"/>
+            <a:off x="548640" y="1673352"/>
+            <a:ext cx="3291840" cy="502920"/>
           </a:xfrm>
           <a:prstGeom prst="rect">
             <a:avLst/>
@@ -11114,26 +12059,26 @@
           <a:p>
             <a:pPr algn="l"/>
             <a:r>
-              <a:rPr sz="1400" b="1" i="0">
-                <a:solidFill>
-                  <a:srgbClr val="1B4F8A"/>
-                </a:solidFill>
-              </a:rPr>
-              <a:t>🛡️  Role-Based Access Control</a:t>
-            </a:r>
-          </a:p>
-        </p:txBody>
-      </p:sp>
-      <p:sp>
-        <p:nvSpPr>
-          <p:cNvPr id="12" name="TextBox 11"/>
+              <a:rPr sz="1500" b="1" i="0">
+                <a:solidFill>
+                  <a:srgbClr val="27AE60"/>
+                </a:solidFill>
+              </a:rPr>
+              <a:t>💸  Cost Reduction</a:t>
+            </a:r>
+          </a:p>
+        </p:txBody>
+      </p:sp>
+      <p:sp>
+        <p:nvSpPr>
+          <p:cNvPr id="10" name="TextBox 9"/>
           <p:cNvSpPr txBox="1"/>
           <p:nvPr/>
         </p:nvSpPr>
         <p:spPr>
           <a:xfrm>
-            <a:off x="640080" y="3703320"/>
-            <a:ext cx="5212080" cy="868680"/>
+            <a:off x="548640" y="2194560"/>
+            <a:ext cx="3291840" cy="1234440"/>
           </a:xfrm>
           <a:prstGeom prst="rect">
             <a:avLst/>
@@ -11148,32 +12093,32 @@
           <a:p>
             <a:pPr algn="l"/>
             <a:r>
-              <a:rPr sz="1100" b="0" i="0">
+              <a:rPr sz="1200" b="0" i="0">
                 <a:solidFill>
                   <a:srgbClr val="4A5568"/>
                 </a:solidFill>
               </a:rPr>
-              <a:t>4 distinct roles (admin, pharmacist, MO, FMS). Route guards and sidebar navigation are role-aware. Cross-role data access is structurally impossible.</a:t>
-            </a:r>
-          </a:p>
-        </p:txBody>
-      </p:sp>
-      <p:sp>
-        <p:nvSpPr>
-          <p:cNvPr id="13" name="Rectangle 12"/>
+              <a:t>Eliminate photocopy and A4 paper costs for every antibiotic form. Savings compound across the year.</a:t>
+            </a:r>
+          </a:p>
+        </p:txBody>
+      </p:sp>
+      <p:sp>
+        <p:nvSpPr>
+          <p:cNvPr id="11" name="Rectangle 10"/>
           <p:cNvSpPr/>
           <p:nvPr/>
         </p:nvSpPr>
         <p:spPr>
           <a:xfrm>
-            <a:off x="457200" y="4846320"/>
-            <a:ext cx="5486400" cy="1554480"/>
-          </a:xfrm>
-          <a:prstGeom prst="rect">
-            <a:avLst/>
-          </a:prstGeom>
-          <a:solidFill>
-            <a:srgbClr val="F0F4F8"/>
+            <a:off x="4279392" y="1508760"/>
+            <a:ext cx="3566160" cy="2103120"/>
+          </a:xfrm>
+          <a:prstGeom prst="rect">
+            <a:avLst/>
+          </a:prstGeom>
+          <a:solidFill>
+            <a:srgbClr val="FFFFFF"/>
           </a:solidFill>
           <a:ln>
             <a:noFill/>
@@ -11203,88 +12148,20 @@
       </p:sp>
       <p:sp>
         <p:nvSpPr>
-          <p:cNvPr id="14" name="TextBox 13"/>
-          <p:cNvSpPr txBox="1"/>
-          <p:nvPr/>
-        </p:nvSpPr>
-        <p:spPr>
-          <a:xfrm>
-            <a:off x="640080" y="4937760"/>
-            <a:ext cx="5212080" cy="457200"/>
-          </a:xfrm>
-          <a:prstGeom prst="rect">
-            <a:avLst/>
-          </a:prstGeom>
-          <a:noFill/>
-        </p:spPr>
-        <p:txBody>
-          <a:bodyPr wrap="square">
-            <a:spAutoFit/>
-          </a:bodyPr>
-          <a:lstStyle/>
-          <a:p>
-            <a:pPr algn="l"/>
-            <a:r>
-              <a:rPr sz="1400" b="1" i="0">
-                <a:solidFill>
-                  <a:srgbClr val="1B4F8A"/>
-                </a:solidFill>
-              </a:rPr>
-              <a:t>📜  Full Audit Trail</a:t>
-            </a:r>
-          </a:p>
-        </p:txBody>
-      </p:sp>
-      <p:sp>
-        <p:nvSpPr>
-          <p:cNvPr id="15" name="TextBox 14"/>
-          <p:cNvSpPr txBox="1"/>
-          <p:nvPr/>
-        </p:nvSpPr>
-        <p:spPr>
-          <a:xfrm>
-            <a:off x="640080" y="5394960"/>
-            <a:ext cx="5212080" cy="868680"/>
-          </a:xfrm>
-          <a:prstGeom prst="rect">
-            <a:avLst/>
-          </a:prstGeom>
-          <a:noFill/>
-        </p:spPr>
-        <p:txBody>
-          <a:bodyPr wrap="square">
-            <a:spAutoFit/>
-          </a:bodyPr>
-          <a:lstStyle/>
-          <a:p>
-            <a:pPr algn="l"/>
-            <a:r>
-              <a:rPr sz="1100" b="0" i="0">
-                <a:solidFill>
-                  <a:srgbClr val="4A5568"/>
-                </a:solidFill>
-              </a:rPr>
-              <a:t>All dispensing approvals, rejections, and fulfilments are attributed to a user with a timestamp. AI-assisted actions log to ai_audit_logs (user, role, tokens, status).</a:t>
-            </a:r>
-          </a:p>
-        </p:txBody>
-      </p:sp>
-      <p:sp>
-        <p:nvSpPr>
-          <p:cNvPr id="16" name="Rectangle 15"/>
+          <p:cNvPr id="12" name="Rectangle 11"/>
           <p:cNvSpPr/>
           <p:nvPr/>
         </p:nvSpPr>
         <p:spPr>
           <a:xfrm>
-            <a:off x="6309360" y="1463040"/>
-            <a:ext cx="5486400" cy="1554480"/>
-          </a:xfrm>
-          <a:prstGeom prst="rect">
-            <a:avLst/>
-          </a:prstGeom>
-          <a:solidFill>
-            <a:srgbClr val="F0F4F8"/>
+            <a:off x="4279392" y="1508760"/>
+            <a:ext cx="3566160" cy="64008"/>
+          </a:xfrm>
+          <a:prstGeom prst="rect">
+            <a:avLst/>
+          </a:prstGeom>
+          <a:solidFill>
+            <a:srgbClr val="F39C12"/>
           </a:solidFill>
           <a:ln>
             <a:noFill/>
@@ -11314,14 +12191,14 @@
       </p:sp>
       <p:sp>
         <p:nvSpPr>
-          <p:cNvPr id="17" name="TextBox 16"/>
+          <p:cNvPr id="13" name="TextBox 12"/>
           <p:cNvSpPr txBox="1"/>
           <p:nvPr/>
         </p:nvSpPr>
         <p:spPr>
           <a:xfrm>
-            <a:off x="6492240" y="1554480"/>
-            <a:ext cx="5212080" cy="457200"/>
+            <a:off x="4462272" y="1673352"/>
+            <a:ext cx="3291840" cy="502920"/>
           </a:xfrm>
           <a:prstGeom prst="rect">
             <a:avLst/>
@@ -11336,26 +12213,26 @@
           <a:p>
             <a:pPr algn="l"/>
             <a:r>
-              <a:rPr sz="1400" b="1" i="0">
-                <a:solidFill>
-                  <a:srgbClr val="1B4F8A"/>
-                </a:solidFill>
-              </a:rPr>
-              <a:t>🔑  Supabase Auth (JWT)</a:t>
-            </a:r>
-          </a:p>
-        </p:txBody>
-      </p:sp>
-      <p:sp>
-        <p:nvSpPr>
-          <p:cNvPr id="18" name="TextBox 17"/>
+              <a:rPr sz="1500" b="1" i="0">
+                <a:solidFill>
+                  <a:srgbClr val="F39C12"/>
+                </a:solidFill>
+              </a:rPr>
+              <a:t>⚡  Speed</a:t>
+            </a:r>
+          </a:p>
+        </p:txBody>
+      </p:sp>
+      <p:sp>
+        <p:nvSpPr>
+          <p:cNvPr id="14" name="TextBox 13"/>
           <p:cNvSpPr txBox="1"/>
           <p:nvPr/>
         </p:nvSpPr>
         <p:spPr>
           <a:xfrm>
-            <a:off x="6492240" y="2011680"/>
-            <a:ext cx="5212080" cy="868680"/>
+            <a:off x="4462272" y="2194560"/>
+            <a:ext cx="3291840" cy="1234440"/>
           </a:xfrm>
           <a:prstGeom prst="rect">
             <a:avLst/>
@@ -11370,32 +12247,32 @@
           <a:p>
             <a:pPr algn="l"/>
             <a:r>
-              <a:rPr sz="1100" b="0" i="0">
+              <a:rPr sz="1200" b="0" i="0">
                 <a:solidFill>
                   <a:srgbClr val="4A5568"/>
                 </a:solidFill>
               </a:rPr>
-              <a:t>Industry-standard JWT-based authentication. Sessions are scoped and signed. No passwords stored in the application layer.</a:t>
-            </a:r>
-          </a:p>
-        </p:txBody>
-      </p:sp>
-      <p:sp>
-        <p:nvSpPr>
-          <p:cNvPr id="19" name="Rectangle 18"/>
+              <a:t>Requests reach FMS the moment MO submits. No walking, no waiting. FMS approves; pharmacy is notified instantly.</a:t>
+            </a:r>
+          </a:p>
+        </p:txBody>
+      </p:sp>
+      <p:sp>
+        <p:nvSpPr>
+          <p:cNvPr id="15" name="Rectangle 14"/>
           <p:cNvSpPr/>
           <p:nvPr/>
         </p:nvSpPr>
         <p:spPr>
           <a:xfrm>
-            <a:off x="6309360" y="3154680"/>
-            <a:ext cx="5486400" cy="1554480"/>
-          </a:xfrm>
-          <a:prstGeom prst="rect">
-            <a:avLst/>
-          </a:prstGeom>
-          <a:solidFill>
-            <a:srgbClr val="F0F4F8"/>
+            <a:off x="8193024" y="1508760"/>
+            <a:ext cx="3566160" cy="2103120"/>
+          </a:xfrm>
+          <a:prstGeom prst="rect">
+            <a:avLst/>
+          </a:prstGeom>
+          <a:solidFill>
+            <a:srgbClr val="FFFFFF"/>
           </a:solidFill>
           <a:ln>
             <a:noFill/>
@@ -11425,88 +12302,20 @@
       </p:sp>
       <p:sp>
         <p:nvSpPr>
-          <p:cNvPr id="20" name="TextBox 19"/>
-          <p:cNvSpPr txBox="1"/>
-          <p:nvPr/>
-        </p:nvSpPr>
-        <p:spPr>
-          <a:xfrm>
-            <a:off x="6492240" y="3246120"/>
-            <a:ext cx="5212080" cy="457200"/>
-          </a:xfrm>
-          <a:prstGeom prst="rect">
-            <a:avLst/>
-          </a:prstGeom>
-          <a:noFill/>
-        </p:spPr>
-        <p:txBody>
-          <a:bodyPr wrap="square">
-            <a:spAutoFit/>
-          </a:bodyPr>
-          <a:lstStyle/>
-          <a:p>
-            <a:pPr algn="l"/>
-            <a:r>
-              <a:rPr sz="1400" b="1" i="0">
-                <a:solidFill>
-                  <a:srgbClr val="1B4F8A"/>
-                </a:solidFill>
-              </a:rPr>
-              <a:t>🩺  Antibiotic Stewardship (NAG 2024)</a:t>
-            </a:r>
-          </a:p>
-        </p:txBody>
-      </p:sp>
-      <p:sp>
-        <p:nvSpPr>
-          <p:cNvPr id="21" name="TextBox 20"/>
-          <p:cNvSpPr txBox="1"/>
-          <p:nvPr/>
-        </p:nvSpPr>
-        <p:spPr>
-          <a:xfrm>
-            <a:off x="6492240" y="3703320"/>
-            <a:ext cx="5212080" cy="868680"/>
-          </a:xfrm>
-          <a:prstGeom prst="rect">
-            <a:avLst/>
-          </a:prstGeom>
-          <a:noFill/>
-        </p:spPr>
-        <p:txBody>
-          <a:bodyPr wrap="square">
-            <a:spAutoFit/>
-          </a:bodyPr>
-          <a:lstStyle/>
-          <a:p>
-            <a:pPr algn="l"/>
-            <a:r>
-              <a:rPr sz="1100" b="0" i="0">
-                <a:solidFill>
-                  <a:srgbClr val="4A5568"/>
-                </a:solidFill>
-              </a:rPr>
-              <a:t>Antibiotic dispensing cannot be fulfilled without FMS specialist sign-off. Clinical Pathway checklist is mandatory and stored per request.</a:t>
-            </a:r>
-          </a:p>
-        </p:txBody>
-      </p:sp>
-      <p:sp>
-        <p:nvSpPr>
-          <p:cNvPr id="22" name="Rectangle 21"/>
+          <p:cNvPr id="16" name="Rectangle 15"/>
           <p:cNvSpPr/>
           <p:nvPr/>
         </p:nvSpPr>
         <p:spPr>
           <a:xfrm>
-            <a:off x="6309360" y="4846320"/>
-            <a:ext cx="5486400" cy="1554480"/>
-          </a:xfrm>
-          <a:prstGeom prst="rect">
-            <a:avLst/>
-          </a:prstGeom>
-          <a:solidFill>
-            <a:srgbClr val="F0F4F8"/>
+            <a:off x="8193024" y="1508760"/>
+            <a:ext cx="3566160" cy="64008"/>
+          </a:xfrm>
+          <a:prstGeom prst="rect">
+            <a:avLst/>
+          </a:prstGeom>
+          <a:solidFill>
+            <a:srgbClr val="1B4F8A"/>
           </a:solidFill>
           <a:ln>
             <a:noFill/>
@@ -11536,14 +12345,14 @@
       </p:sp>
       <p:sp>
         <p:nvSpPr>
-          <p:cNvPr id="23" name="TextBox 22"/>
+          <p:cNvPr id="17" name="TextBox 16"/>
           <p:cNvSpPr txBox="1"/>
           <p:nvPr/>
         </p:nvSpPr>
         <p:spPr>
           <a:xfrm>
-            <a:off x="6492240" y="4937760"/>
-            <a:ext cx="5212080" cy="457200"/>
+            <a:off x="8375904" y="1673352"/>
+            <a:ext cx="3291840" cy="502920"/>
           </a:xfrm>
           <a:prstGeom prst="rect">
             <a:avLst/>
@@ -11558,26 +12367,26 @@
           <a:p>
             <a:pPr algn="l"/>
             <a:r>
-              <a:rPr sz="1400" b="1" i="0">
+              <a:rPr sz="1500" b="1" i="0">
                 <a:solidFill>
                   <a:srgbClr val="1B4F8A"/>
                 </a:solidFill>
               </a:rPr>
-              <a:t>📦  Controlled Drug Quotas</a:t>
-            </a:r>
-          </a:p>
-        </p:txBody>
-      </p:sp>
-      <p:sp>
-        <p:nvSpPr>
-          <p:cNvPr id="24" name="TextBox 23"/>
+              <a:t>🎯  Accuracy</a:t>
+            </a:r>
+          </a:p>
+        </p:txBody>
+      </p:sp>
+      <p:sp>
+        <p:nvSpPr>
+          <p:cNvPr id="18" name="TextBox 17"/>
           <p:cNvSpPr txBox="1"/>
           <p:nvPr/>
         </p:nvSpPr>
         <p:spPr>
           <a:xfrm>
-            <a:off x="6492240" y="5394960"/>
-            <a:ext cx="5212080" cy="868680"/>
+            <a:off x="8375904" y="2194560"/>
+            <a:ext cx="3291840" cy="1234440"/>
           </a:xfrm>
           <a:prstGeom prst="rect">
             <a:avLst/>
@@ -11592,12 +12401,474 @@
           <a:p>
             <a:pPr algn="l"/>
             <a:r>
-              <a:rPr sz="1100" b="0" i="0">
+              <a:rPr sz="1200" b="0" i="0">
                 <a:solidFill>
                   <a:srgbClr val="4A5568"/>
                 </a:solidFill>
               </a:rPr>
-              <a:t>Annual quota limits enforced at application level with real-time remaining-quota display. Prevents over-dispensing to any patient or pesara cohort.</a:t>
+              <a:t>Structured forms mean no more wrong columns or wrong tabs. Every field is validated before submission.</a:t>
+            </a:r>
+          </a:p>
+        </p:txBody>
+      </p:sp>
+      <p:sp>
+        <p:nvSpPr>
+          <p:cNvPr id="19" name="Rectangle 18"/>
+          <p:cNvSpPr/>
+          <p:nvPr/>
+        </p:nvSpPr>
+        <p:spPr>
+          <a:xfrm>
+            <a:off x="365760" y="3840480"/>
+            <a:ext cx="3566160" cy="2103120"/>
+          </a:xfrm>
+          <a:prstGeom prst="rect">
+            <a:avLst/>
+          </a:prstGeom>
+          <a:solidFill>
+            <a:srgbClr val="FFFFFF"/>
+          </a:solidFill>
+          <a:ln>
+            <a:noFill/>
+          </a:ln>
+        </p:spPr>
+        <p:style>
+          <a:lnRef idx="1">
+            <a:schemeClr val="accent1"/>
+          </a:lnRef>
+          <a:fillRef idx="3">
+            <a:schemeClr val="accent1"/>
+          </a:fillRef>
+          <a:effectRef idx="2">
+            <a:schemeClr val="accent1"/>
+          </a:effectRef>
+          <a:fontRef idx="minor">
+            <a:schemeClr val="lt1"/>
+          </a:fontRef>
+        </p:style>
+        <p:txBody>
+          <a:bodyPr rtlCol="0" anchor="ctr"/>
+          <a:lstStyle/>
+          <a:p>
+            <a:pPr algn="ctr"/>
+          </a:p>
+        </p:txBody>
+      </p:sp>
+      <p:sp>
+        <p:nvSpPr>
+          <p:cNvPr id="20" name="Rectangle 19"/>
+          <p:cNvSpPr/>
+          <p:nvPr/>
+        </p:nvSpPr>
+        <p:spPr>
+          <a:xfrm>
+            <a:off x="365760" y="3840480"/>
+            <a:ext cx="3566160" cy="64008"/>
+          </a:xfrm>
+          <a:prstGeom prst="rect">
+            <a:avLst/>
+          </a:prstGeom>
+          <a:solidFill>
+            <a:srgbClr val="2D86C9"/>
+          </a:solidFill>
+          <a:ln>
+            <a:noFill/>
+          </a:ln>
+        </p:spPr>
+        <p:style>
+          <a:lnRef idx="1">
+            <a:schemeClr val="accent1"/>
+          </a:lnRef>
+          <a:fillRef idx="3">
+            <a:schemeClr val="accent1"/>
+          </a:fillRef>
+          <a:effectRef idx="2">
+            <a:schemeClr val="accent1"/>
+          </a:effectRef>
+          <a:fontRef idx="minor">
+            <a:schemeClr val="lt1"/>
+          </a:fontRef>
+        </p:style>
+        <p:txBody>
+          <a:bodyPr rtlCol="0" anchor="ctr"/>
+          <a:lstStyle/>
+          <a:p>
+            <a:pPr algn="ctr"/>
+          </a:p>
+        </p:txBody>
+      </p:sp>
+      <p:sp>
+        <p:nvSpPr>
+          <p:cNvPr id="21" name="TextBox 20"/>
+          <p:cNvSpPr txBox="1"/>
+          <p:nvPr/>
+        </p:nvSpPr>
+        <p:spPr>
+          <a:xfrm>
+            <a:off x="548640" y="4005072"/>
+            <a:ext cx="3291840" cy="502920"/>
+          </a:xfrm>
+          <a:prstGeom prst="rect">
+            <a:avLst/>
+          </a:prstGeom>
+          <a:noFill/>
+        </p:spPr>
+        <p:txBody>
+          <a:bodyPr wrap="square">
+            <a:spAutoFit/>
+          </a:bodyPr>
+          <a:lstStyle/>
+          <a:p>
+            <a:pPr algn="l"/>
+            <a:r>
+              <a:rPr sz="1500" b="1" i="0">
+                <a:solidFill>
+                  <a:srgbClr val="2D86C9"/>
+                </a:solidFill>
+              </a:rPr>
+              <a:t>🔍  Searchability</a:t>
+            </a:r>
+          </a:p>
+        </p:txBody>
+      </p:sp>
+      <p:sp>
+        <p:nvSpPr>
+          <p:cNvPr id="22" name="TextBox 21"/>
+          <p:cNvSpPr txBox="1"/>
+          <p:nvPr/>
+        </p:nvSpPr>
+        <p:spPr>
+          <a:xfrm>
+            <a:off x="548640" y="4526280"/>
+            <a:ext cx="3291840" cy="1234440"/>
+          </a:xfrm>
+          <a:prstGeom prst="rect">
+            <a:avLst/>
+          </a:prstGeom>
+          <a:noFill/>
+        </p:spPr>
+        <p:txBody>
+          <a:bodyPr wrap="square">
+            <a:spAutoFit/>
+          </a:bodyPr>
+          <a:lstStyle/>
+          <a:p>
+            <a:pPr algn="l"/>
+            <a:r>
+              <a:rPr sz="1200" b="0" i="0">
+                <a:solidFill>
+                  <a:srgbClr val="4A5568"/>
+                </a:solidFill>
+              </a:rPr>
+              <a:t>Find any quota drug request or antibiotic form in seconds by patient IC, drug name, or date.</a:t>
+            </a:r>
+          </a:p>
+        </p:txBody>
+      </p:sp>
+      <p:sp>
+        <p:nvSpPr>
+          <p:cNvPr id="23" name="Rectangle 22"/>
+          <p:cNvSpPr/>
+          <p:nvPr/>
+        </p:nvSpPr>
+        <p:spPr>
+          <a:xfrm>
+            <a:off x="4279392" y="3840480"/>
+            <a:ext cx="3566160" cy="2103120"/>
+          </a:xfrm>
+          <a:prstGeom prst="rect">
+            <a:avLst/>
+          </a:prstGeom>
+          <a:solidFill>
+            <a:srgbClr val="FFFFFF"/>
+          </a:solidFill>
+          <a:ln>
+            <a:noFill/>
+          </a:ln>
+        </p:spPr>
+        <p:style>
+          <a:lnRef idx="1">
+            <a:schemeClr val="accent1"/>
+          </a:lnRef>
+          <a:fillRef idx="3">
+            <a:schemeClr val="accent1"/>
+          </a:fillRef>
+          <a:effectRef idx="2">
+            <a:schemeClr val="accent1"/>
+          </a:effectRef>
+          <a:fontRef idx="minor">
+            <a:schemeClr val="lt1"/>
+          </a:fontRef>
+        </p:style>
+        <p:txBody>
+          <a:bodyPr rtlCol="0" anchor="ctr"/>
+          <a:lstStyle/>
+          <a:p>
+            <a:pPr algn="ctr"/>
+          </a:p>
+        </p:txBody>
+      </p:sp>
+      <p:sp>
+        <p:nvSpPr>
+          <p:cNvPr id="24" name="Rectangle 23"/>
+          <p:cNvSpPr/>
+          <p:nvPr/>
+        </p:nvSpPr>
+        <p:spPr>
+          <a:xfrm>
+            <a:off x="4279392" y="3840480"/>
+            <a:ext cx="3566160" cy="64008"/>
+          </a:xfrm>
+          <a:prstGeom prst="rect">
+            <a:avLst/>
+          </a:prstGeom>
+          <a:solidFill>
+            <a:srgbClr val="8E44AD"/>
+          </a:solidFill>
+          <a:ln>
+            <a:noFill/>
+          </a:ln>
+        </p:spPr>
+        <p:style>
+          <a:lnRef idx="1">
+            <a:schemeClr val="accent1"/>
+          </a:lnRef>
+          <a:fillRef idx="3">
+            <a:schemeClr val="accent1"/>
+          </a:fillRef>
+          <a:effectRef idx="2">
+            <a:schemeClr val="accent1"/>
+          </a:effectRef>
+          <a:fontRef idx="minor">
+            <a:schemeClr val="lt1"/>
+          </a:fontRef>
+        </p:style>
+        <p:txBody>
+          <a:bodyPr rtlCol="0" anchor="ctr"/>
+          <a:lstStyle/>
+          <a:p>
+            <a:pPr algn="ctr"/>
+          </a:p>
+        </p:txBody>
+      </p:sp>
+      <p:sp>
+        <p:nvSpPr>
+          <p:cNvPr id="25" name="TextBox 24"/>
+          <p:cNvSpPr txBox="1"/>
+          <p:nvPr/>
+        </p:nvSpPr>
+        <p:spPr>
+          <a:xfrm>
+            <a:off x="4462272" y="4005072"/>
+            <a:ext cx="3291840" cy="502920"/>
+          </a:xfrm>
+          <a:prstGeom prst="rect">
+            <a:avLst/>
+          </a:prstGeom>
+          <a:noFill/>
+        </p:spPr>
+        <p:txBody>
+          <a:bodyPr wrap="square">
+            <a:spAutoFit/>
+          </a:bodyPr>
+          <a:lstStyle/>
+          <a:p>
+            <a:pPr algn="l"/>
+            <a:r>
+              <a:rPr sz="1500" b="1" i="0">
+                <a:solidFill>
+                  <a:srgbClr val="8E44AD"/>
+                </a:solidFill>
+              </a:rPr>
+              <a:t>📜  Compliance &amp; Audit</a:t>
+            </a:r>
+          </a:p>
+        </p:txBody>
+      </p:sp>
+      <p:sp>
+        <p:nvSpPr>
+          <p:cNvPr id="26" name="TextBox 25"/>
+          <p:cNvSpPr txBox="1"/>
+          <p:nvPr/>
+        </p:nvSpPr>
+        <p:spPr>
+          <a:xfrm>
+            <a:off x="4462272" y="4526280"/>
+            <a:ext cx="3291840" cy="1234440"/>
+          </a:xfrm>
+          <a:prstGeom prst="rect">
+            <a:avLst/>
+          </a:prstGeom>
+          <a:noFill/>
+        </p:spPr>
+        <p:txBody>
+          <a:bodyPr wrap="square">
+            <a:spAutoFit/>
+          </a:bodyPr>
+          <a:lstStyle/>
+          <a:p>
+            <a:pPr algn="l"/>
+            <a:r>
+              <a:rPr sz="1200" b="0" i="0">
+                <a:solidFill>
+                  <a:srgbClr val="4A5568"/>
+                </a:solidFill>
+              </a:rPr>
+              <a:t>Every action is attributed to a named user with a timestamp. Full audit trail for MOH inspections.</a:t>
+            </a:r>
+          </a:p>
+        </p:txBody>
+      </p:sp>
+      <p:sp>
+        <p:nvSpPr>
+          <p:cNvPr id="27" name="Rectangle 26"/>
+          <p:cNvSpPr/>
+          <p:nvPr/>
+        </p:nvSpPr>
+        <p:spPr>
+          <a:xfrm>
+            <a:off x="8193024" y="3840480"/>
+            <a:ext cx="3566160" cy="2103120"/>
+          </a:xfrm>
+          <a:prstGeom prst="rect">
+            <a:avLst/>
+          </a:prstGeom>
+          <a:solidFill>
+            <a:srgbClr val="FFFFFF"/>
+          </a:solidFill>
+          <a:ln>
+            <a:noFill/>
+          </a:ln>
+        </p:spPr>
+        <p:style>
+          <a:lnRef idx="1">
+            <a:schemeClr val="accent1"/>
+          </a:lnRef>
+          <a:fillRef idx="3">
+            <a:schemeClr val="accent1"/>
+          </a:fillRef>
+          <a:effectRef idx="2">
+            <a:schemeClr val="accent1"/>
+          </a:effectRef>
+          <a:fontRef idx="minor">
+            <a:schemeClr val="lt1"/>
+          </a:fontRef>
+        </p:style>
+        <p:txBody>
+          <a:bodyPr rtlCol="0" anchor="ctr"/>
+          <a:lstStyle/>
+          <a:p>
+            <a:pPr algn="ctr"/>
+          </a:p>
+        </p:txBody>
+      </p:sp>
+      <p:sp>
+        <p:nvSpPr>
+          <p:cNvPr id="28" name="Rectangle 27"/>
+          <p:cNvSpPr/>
+          <p:nvPr/>
+        </p:nvSpPr>
+        <p:spPr>
+          <a:xfrm>
+            <a:off x="8193024" y="3840480"/>
+            <a:ext cx="3566160" cy="64008"/>
+          </a:xfrm>
+          <a:prstGeom prst="rect">
+            <a:avLst/>
+          </a:prstGeom>
+          <a:solidFill>
+            <a:srgbClr val="E74C3C"/>
+          </a:solidFill>
+          <a:ln>
+            <a:noFill/>
+          </a:ln>
+        </p:spPr>
+        <p:style>
+          <a:lnRef idx="1">
+            <a:schemeClr val="accent1"/>
+          </a:lnRef>
+          <a:fillRef idx="3">
+            <a:schemeClr val="accent1"/>
+          </a:fillRef>
+          <a:effectRef idx="2">
+            <a:schemeClr val="accent1"/>
+          </a:effectRef>
+          <a:fontRef idx="minor">
+            <a:schemeClr val="lt1"/>
+          </a:fontRef>
+        </p:style>
+        <p:txBody>
+          <a:bodyPr rtlCol="0" anchor="ctr"/>
+          <a:lstStyle/>
+          <a:p>
+            <a:pPr algn="ctr"/>
+          </a:p>
+        </p:txBody>
+      </p:sp>
+      <p:sp>
+        <p:nvSpPr>
+          <p:cNvPr id="29" name="TextBox 28"/>
+          <p:cNvSpPr txBox="1"/>
+          <p:nvPr/>
+        </p:nvSpPr>
+        <p:spPr>
+          <a:xfrm>
+            <a:off x="8375904" y="4005072"/>
+            <a:ext cx="3291840" cy="502920"/>
+          </a:xfrm>
+          <a:prstGeom prst="rect">
+            <a:avLst/>
+          </a:prstGeom>
+          <a:noFill/>
+        </p:spPr>
+        <p:txBody>
+          <a:bodyPr wrap="square">
+            <a:spAutoFit/>
+          </a:bodyPr>
+          <a:lstStyle/>
+          <a:p>
+            <a:pPr algn="l"/>
+            <a:r>
+              <a:rPr sz="1500" b="1" i="0">
+                <a:solidFill>
+                  <a:srgbClr val="E74C3C"/>
+                </a:solidFill>
+              </a:rPr>
+              <a:t>📊  Quota Visibility</a:t>
+            </a:r>
+          </a:p>
+        </p:txBody>
+      </p:sp>
+      <p:sp>
+        <p:nvSpPr>
+          <p:cNvPr id="30" name="TextBox 29"/>
+          <p:cNvSpPr txBox="1"/>
+          <p:nvPr/>
+        </p:nvSpPr>
+        <p:spPr>
+          <a:xfrm>
+            <a:off x="8375904" y="4526280"/>
+            <a:ext cx="3291840" cy="1234440"/>
+          </a:xfrm>
+          <a:prstGeom prst="rect">
+            <a:avLst/>
+          </a:prstGeom>
+          <a:noFill/>
+        </p:spPr>
+        <p:txBody>
+          <a:bodyPr wrap="square">
+            <a:spAutoFit/>
+          </a:bodyPr>
+          <a:lstStyle/>
+          <a:p>
+            <a:pPr algn="l"/>
+            <a:r>
+              <a:rPr sz="1200" b="0" i="0">
+                <a:solidFill>
+                  <a:srgbClr val="4A5568"/>
+                </a:solidFill>
+              </a:rPr>
+              <a:t>Real-time annual quota counter per drug. FMS and pharmacist always know how much quota remains.</a:t>
             </a:r>
           </a:p>
         </p:txBody>
@@ -11635,7 +12906,7 @@
             <a:avLst/>
           </a:prstGeom>
           <a:solidFill>
-            <a:srgbClr val="F0F4F8"/>
+            <a:srgbClr val="FFFFFF"/>
           </a:solidFill>
           <a:ln>
             <a:noFill/>
@@ -11721,7 +12992,7 @@
             <a:avLst/>
           </a:prstGeom>
           <a:solidFill>
-            <a:srgbClr val="F39C12"/>
+            <a:srgbClr val="8E44AD"/>
           </a:solidFill>
           <a:ln>
             <a:noFill/>
@@ -11757,8 +13028,8 @@
         </p:nvSpPr>
         <p:spPr>
           <a:xfrm>
-            <a:off x="502920" y="228600"/>
-            <a:ext cx="9144000" cy="731520"/>
+            <a:off x="502920" y="201168"/>
+            <a:ext cx="10058400" cy="777240"/>
           </a:xfrm>
           <a:prstGeom prst="rect">
             <a:avLst/>
@@ -11778,7 +13049,7 @@
                   <a:srgbClr val="FFFFFF"/>
                 </a:solidFill>
               </a:rPr>
-              <a:t>Deployment &amp; Operations</a:t>
+              <a:t>Technology Stack</a:t>
             </a:r>
           </a:p>
         </p:txBody>
@@ -11791,8 +13062,8 @@
         </p:nvSpPr>
         <p:spPr>
           <a:xfrm>
-            <a:off x="502920" y="777240"/>
-            <a:ext cx="10058400" cy="457200"/>
+            <a:off x="502920" y="804672"/>
+            <a:ext cx="10058400" cy="438912"/>
           </a:xfrm>
           <a:prstGeom prst="rect">
             <a:avLst/>
@@ -11812,7 +13083,7 @@
                   <a:srgbClr val="B0C8E8"/>
                 </a:solidFill>
               </a:rPr>
-              <a:t>Cloud-first — live in minutes, no servers to maintain</a:t>
+              <a:t>Modern, cloud-native — zero servers to manage, accessible from any browser</a:t>
             </a:r>
           </a:p>
         </p:txBody>
@@ -11825,14 +13096,14 @@
         </p:nvSpPr>
         <p:spPr>
           <a:xfrm>
-            <a:off x="457200" y="1508760"/>
-            <a:ext cx="3383280" cy="5029200"/>
-          </a:xfrm>
-          <a:prstGeom prst="rect">
-            <a:avLst/>
-          </a:prstGeom>
-          <a:solidFill>
-            <a:srgbClr val="FFFFFF"/>
+            <a:off x="457200" y="1463040"/>
+            <a:ext cx="2651760" cy="5120640"/>
+          </a:xfrm>
+          <a:prstGeom prst="rect">
+            <a:avLst/>
+          </a:prstGeom>
+          <a:solidFill>
+            <a:srgbClr val="F0F4F8"/>
           </a:solidFill>
           <a:ln>
             <a:noFill/>
@@ -11868,8 +13139,8 @@
         </p:nvSpPr>
         <p:spPr>
           <a:xfrm>
-            <a:off x="457200" y="1508760"/>
-            <a:ext cx="3383280" cy="73152"/>
+            <a:off x="457200" y="1463040"/>
+            <a:ext cx="2651760" cy="457200"/>
           </a:xfrm>
           <a:prstGeom prst="rect">
             <a:avLst/>
@@ -11911,8 +13182,8 @@
         </p:nvSpPr>
         <p:spPr>
           <a:xfrm>
-            <a:off x="640080" y="1691640"/>
-            <a:ext cx="3108960" cy="548640"/>
+            <a:off x="594360" y="1527048"/>
+            <a:ext cx="2377440" cy="365760"/>
           </a:xfrm>
           <a:prstGeom prst="rect">
             <a:avLst/>
@@ -11927,12 +13198,12 @@
           <a:p>
             <a:pPr algn="l"/>
             <a:r>
-              <a:rPr sz="1600" b="1" i="0">
-                <a:solidFill>
-                  <a:srgbClr val="1B4F8A"/>
-                </a:solidFill>
-              </a:rPr>
-              <a:t>☁️  Frontend Hosting</a:t>
+              <a:rPr sz="1500" b="1" i="0">
+                <a:solidFill>
+                  <a:srgbClr val="FFFFFF"/>
+                </a:solidFill>
+              </a:rPr>
+              <a:t>Frontend</a:t>
             </a:r>
           </a:p>
         </p:txBody>
@@ -11945,8 +13216,8 @@
         </p:nvSpPr>
         <p:spPr>
           <a:xfrm>
-            <a:off x="640080" y="2331720"/>
-            <a:ext cx="3108960" cy="4023360"/>
+            <a:off x="640080" y="2057400"/>
+            <a:ext cx="2377440" cy="4434840"/>
           </a:xfrm>
           <a:prstGeom prst="rect">
             <a:avLst/>
@@ -11965,12 +13236,12 @@
               </a:spcBef>
             </a:pPr>
             <a:r>
-              <a:rPr sz="1200">
+              <a:rPr sz="1300">
                 <a:solidFill>
                   <a:srgbClr val="4A5568"/>
                 </a:solidFill>
               </a:rPr>
-              <a:t>✓  Deployed on Vercel (vercel.json configured)</a:t>
+              <a:t>▸  React 18 + TypeScript</a:t>
             </a:r>
           </a:p>
           <a:p>
@@ -11980,12 +13251,12 @@
               </a:spcBef>
             </a:pPr>
             <a:r>
-              <a:rPr sz="1200">
+              <a:rPr sz="1300">
                 <a:solidFill>
                   <a:srgbClr val="4A5568"/>
                 </a:solidFill>
               </a:rPr>
-              <a:t>✓  Global CDN — fast load anywhere in Malaysia</a:t>
+              <a:t>▸  Vite · React Router v6</a:t>
             </a:r>
           </a:p>
           <a:p>
@@ -11995,12 +13266,12 @@
               </a:spcBef>
             </a:pPr>
             <a:r>
-              <a:rPr sz="1200">
+              <a:rPr sz="1300">
                 <a:solidFill>
                   <a:srgbClr val="4A5568"/>
                 </a:solidFill>
               </a:rPr>
-              <a:t>✓  Preview deployments per branch</a:t>
+              <a:t>▸  TanStack Query (real-time)</a:t>
             </a:r>
           </a:p>
           <a:p>
@@ -12010,12 +13281,12 @@
               </a:spcBef>
             </a:pPr>
             <a:r>
-              <a:rPr sz="1200">
+              <a:rPr sz="1300">
                 <a:solidFill>
                   <a:srgbClr val="4A5568"/>
                 </a:solidFill>
               </a:rPr>
-              <a:t>✓  Zero-downtime rollouts</a:t>
+              <a:t>▸  Auto-refresh every 15 – 30 s</a:t>
             </a:r>
           </a:p>
         </p:txBody>
@@ -12028,14 +13299,14 @@
         </p:nvSpPr>
         <p:spPr>
           <a:xfrm>
-            <a:off x="4206239" y="1508760"/>
-            <a:ext cx="3383280" cy="5029200"/>
-          </a:xfrm>
-          <a:prstGeom prst="rect">
-            <a:avLst/>
-          </a:prstGeom>
-          <a:solidFill>
-            <a:srgbClr val="FFFFFF"/>
+            <a:off x="3291840" y="1463040"/>
+            <a:ext cx="2651760" cy="5120640"/>
+          </a:xfrm>
+          <a:prstGeom prst="rect">
+            <a:avLst/>
+          </a:prstGeom>
+          <a:solidFill>
+            <a:srgbClr val="F0F4F8"/>
           </a:solidFill>
           <a:ln>
             <a:noFill/>
@@ -12071,14 +13342,14 @@
         </p:nvSpPr>
         <p:spPr>
           <a:xfrm>
-            <a:off x="4206239" y="1508760"/>
-            <a:ext cx="3383280" cy="73152"/>
-          </a:xfrm>
-          <a:prstGeom prst="rect">
-            <a:avLst/>
-          </a:prstGeom>
-          <a:solidFill>
-            <a:srgbClr val="27AE60"/>
+            <a:off x="3291840" y="1463040"/>
+            <a:ext cx="2651760" cy="457200"/>
+          </a:xfrm>
+          <a:prstGeom prst="rect">
+            <a:avLst/>
+          </a:prstGeom>
+          <a:solidFill>
+            <a:srgbClr val="2D86C9"/>
           </a:solidFill>
           <a:ln>
             <a:noFill/>
@@ -12114,8 +13385,8 @@
         </p:nvSpPr>
         <p:spPr>
           <a:xfrm>
-            <a:off x="4389119" y="1691640"/>
-            <a:ext cx="3108960" cy="548640"/>
+            <a:off x="3429000" y="1527048"/>
+            <a:ext cx="2377440" cy="365760"/>
           </a:xfrm>
           <a:prstGeom prst="rect">
             <a:avLst/>
@@ -12130,12 +13401,12 @@
           <a:p>
             <a:pPr algn="l"/>
             <a:r>
-              <a:rPr sz="1600" b="1" i="0">
-                <a:solidFill>
-                  <a:srgbClr val="27AE60"/>
-                </a:solidFill>
-              </a:rPr>
-              <a:t>🗄️  Database &amp; Auth</a:t>
+              <a:rPr sz="1500" b="1" i="0">
+                <a:solidFill>
+                  <a:srgbClr val="FFFFFF"/>
+                </a:solidFill>
+              </a:rPr>
+              <a:t>UI / Design</a:t>
             </a:r>
           </a:p>
         </p:txBody>
@@ -12148,8 +13419,8 @@
         </p:nvSpPr>
         <p:spPr>
           <a:xfrm>
-            <a:off x="4389119" y="2331720"/>
-            <a:ext cx="3108960" cy="4023360"/>
+            <a:off x="3474720" y="2057400"/>
+            <a:ext cx="2377440" cy="4434840"/>
           </a:xfrm>
           <a:prstGeom prst="rect">
             <a:avLst/>
@@ -12168,12 +13439,12 @@
               </a:spcBef>
             </a:pPr>
             <a:r>
-              <a:rPr sz="1200">
+              <a:rPr sz="1300">
                 <a:solidFill>
                   <a:srgbClr val="4A5568"/>
                 </a:solidFill>
               </a:rPr>
-              <a:t>✓  Supabase managed PostgreSQL</a:t>
+              <a:t>▸  shadcn/ui (Radix)</a:t>
             </a:r>
           </a:p>
           <a:p>
@@ -12183,12 +13454,12 @@
               </a:spcBef>
             </a:pPr>
             <a:r>
-              <a:rPr sz="1200">
+              <a:rPr sz="1300">
                 <a:solidFill>
                   <a:srgbClr val="4A5568"/>
                 </a:solidFill>
               </a:rPr>
-              <a:t>✓  Automatic daily backups</a:t>
+              <a:t>▸  Tailwind CSS</a:t>
             </a:r>
           </a:p>
           <a:p>
@@ -12198,12 +13469,12 @@
               </a:spcBef>
             </a:pPr>
             <a:r>
-              <a:rPr sz="1200">
+              <a:rPr sz="1300">
                 <a:solidFill>
                   <a:srgbClr val="4A5568"/>
                 </a:solidFill>
               </a:rPr>
-              <a:t>✓  Built-in connection pooling</a:t>
+              <a:t>▸  Recharts (quota graphs)</a:t>
             </a:r>
           </a:p>
           <a:p>
@@ -12213,12 +13484,12 @@
               </a:spcBef>
             </a:pPr>
             <a:r>
-              <a:rPr sz="1200">
+              <a:rPr sz="1300">
                 <a:solidFill>
                   <a:srgbClr val="4A5568"/>
                 </a:solidFill>
               </a:rPr>
-              <a:t>✓  Point-in-time recovery available</a:t>
+              <a:t>▸  Malay-language UI</a:t>
             </a:r>
           </a:p>
         </p:txBody>
@@ -12231,14 +13502,14 @@
         </p:nvSpPr>
         <p:spPr>
           <a:xfrm>
-            <a:off x="7955278" y="1508760"/>
-            <a:ext cx="3383280" cy="5029200"/>
-          </a:xfrm>
-          <a:prstGeom prst="rect">
-            <a:avLst/>
-          </a:prstGeom>
-          <a:solidFill>
-            <a:srgbClr val="FFFFFF"/>
+            <a:off x="6126480" y="1463040"/>
+            <a:ext cx="2651760" cy="5120640"/>
+          </a:xfrm>
+          <a:prstGeom prst="rect">
+            <a:avLst/>
+          </a:prstGeom>
+          <a:solidFill>
+            <a:srgbClr val="F0F4F8"/>
           </a:solidFill>
           <a:ln>
             <a:noFill/>
@@ -12274,14 +13545,14 @@
         </p:nvSpPr>
         <p:spPr>
           <a:xfrm>
-            <a:off x="7955278" y="1508760"/>
-            <a:ext cx="3383280" cy="73152"/>
-          </a:xfrm>
-          <a:prstGeom prst="rect">
-            <a:avLst/>
-          </a:prstGeom>
-          <a:solidFill>
-            <a:srgbClr val="F39C12"/>
+            <a:off x="6126480" y="1463040"/>
+            <a:ext cx="2651760" cy="457200"/>
+          </a:xfrm>
+          <a:prstGeom prst="rect">
+            <a:avLst/>
+          </a:prstGeom>
+          <a:solidFill>
+            <a:srgbClr val="27AE60"/>
           </a:solidFill>
           <a:ln>
             <a:noFill/>
@@ -12317,8 +13588,8 @@
         </p:nvSpPr>
         <p:spPr>
           <a:xfrm>
-            <a:off x="8138158" y="1691640"/>
-            <a:ext cx="3108960" cy="548640"/>
+            <a:off x="6263640" y="1527048"/>
+            <a:ext cx="2377440" cy="365760"/>
           </a:xfrm>
           <a:prstGeom prst="rect">
             <a:avLst/>
@@ -12333,12 +13604,12 @@
           <a:p>
             <a:pPr algn="l"/>
             <a:r>
-              <a:rPr sz="1600" b="1" i="0">
-                <a:solidFill>
-                  <a:srgbClr val="F39C12"/>
-                </a:solidFill>
-              </a:rPr>
-              <a:t>⚙️  DevOps</a:t>
+              <a:rPr sz="1500" b="1" i="0">
+                <a:solidFill>
+                  <a:srgbClr val="FFFFFF"/>
+                </a:solidFill>
+              </a:rPr>
+              <a:t>Backend / Data</a:t>
             </a:r>
           </a:p>
         </p:txBody>
@@ -12351,8 +13622,8 @@
         </p:nvSpPr>
         <p:spPr>
           <a:xfrm>
-            <a:off x="8138158" y="2331720"/>
-            <a:ext cx="3108960" cy="4023360"/>
+            <a:off x="6309360" y="2057400"/>
+            <a:ext cx="2377440" cy="4434840"/>
           </a:xfrm>
           <a:prstGeom prst="rect">
             <a:avLst/>
@@ -12371,12 +13642,12 @@
               </a:spcBef>
             </a:pPr>
             <a:r>
-              <a:rPr sz="1200">
+              <a:rPr sz="1300">
                 <a:solidFill>
                   <a:srgbClr val="4A5568"/>
                 </a:solidFill>
               </a:rPr>
-              <a:t>✓  CI/CD via Vercel git integration</a:t>
+              <a:t>▸  Supabase (PostgreSQL)</a:t>
             </a:r>
           </a:p>
           <a:p>
@@ -12386,12 +13657,12 @@
               </a:spcBef>
             </a:pPr>
             <a:r>
-              <a:rPr sz="1200">
+              <a:rPr sz="1300">
                 <a:solidFill>
                   <a:srgbClr val="4A5568"/>
                 </a:solidFill>
               </a:rPr>
-              <a:t>✓  Supabase migrations versioned in repo</a:t>
+              <a:t>▸  Row-Level Security (RLS)</a:t>
             </a:r>
           </a:p>
           <a:p>
@@ -12401,12 +13672,12 @@
               </a:spcBef>
             </a:pPr>
             <a:r>
-              <a:rPr sz="1200">
+              <a:rPr sz="1300">
                 <a:solidFill>
                   <a:srgbClr val="4A5568"/>
                 </a:solidFill>
               </a:rPr>
-              <a:t>✓  Environment variables via .env (VITE_SUPABASE_*)</a:t>
+              <a:t>▸  Supabase Auth (JWT)</a:t>
             </a:r>
           </a:p>
           <a:p>
@@ -12416,12 +13687,215 @@
               </a:spcBef>
             </a:pPr>
             <a:r>
-              <a:rPr sz="1200">
+              <a:rPr sz="1300">
                 <a:solidFill>
                   <a:srgbClr val="4A5568"/>
                 </a:solidFill>
               </a:rPr>
-              <a:t>✓  Health monitored via Supabase dashboard</a:t>
+              <a:t>▸  Cloud-hosted, auto-backup</a:t>
+            </a:r>
+          </a:p>
+        </p:txBody>
+      </p:sp>
+      <p:sp>
+        <p:nvSpPr>
+          <p:cNvPr id="19" name="Rectangle 18"/>
+          <p:cNvSpPr/>
+          <p:nvPr/>
+        </p:nvSpPr>
+        <p:spPr>
+          <a:xfrm>
+            <a:off x="8961120" y="1463040"/>
+            <a:ext cx="2651760" cy="5120640"/>
+          </a:xfrm>
+          <a:prstGeom prst="rect">
+            <a:avLst/>
+          </a:prstGeom>
+          <a:solidFill>
+            <a:srgbClr val="F0F4F8"/>
+          </a:solidFill>
+          <a:ln>
+            <a:noFill/>
+          </a:ln>
+        </p:spPr>
+        <p:style>
+          <a:lnRef idx="1">
+            <a:schemeClr val="accent1"/>
+          </a:lnRef>
+          <a:fillRef idx="3">
+            <a:schemeClr val="accent1"/>
+          </a:fillRef>
+          <a:effectRef idx="2">
+            <a:schemeClr val="accent1"/>
+          </a:effectRef>
+          <a:fontRef idx="minor">
+            <a:schemeClr val="lt1"/>
+          </a:fontRef>
+        </p:style>
+        <p:txBody>
+          <a:bodyPr rtlCol="0" anchor="ctr"/>
+          <a:lstStyle/>
+          <a:p>
+            <a:pPr algn="ctr"/>
+          </a:p>
+        </p:txBody>
+      </p:sp>
+      <p:sp>
+        <p:nvSpPr>
+          <p:cNvPr id="20" name="Rectangle 19"/>
+          <p:cNvSpPr/>
+          <p:nvPr/>
+        </p:nvSpPr>
+        <p:spPr>
+          <a:xfrm>
+            <a:off x="8961120" y="1463040"/>
+            <a:ext cx="2651760" cy="457200"/>
+          </a:xfrm>
+          <a:prstGeom prst="rect">
+            <a:avLst/>
+          </a:prstGeom>
+          <a:solidFill>
+            <a:srgbClr val="F39C12"/>
+          </a:solidFill>
+          <a:ln>
+            <a:noFill/>
+          </a:ln>
+        </p:spPr>
+        <p:style>
+          <a:lnRef idx="1">
+            <a:schemeClr val="accent1"/>
+          </a:lnRef>
+          <a:fillRef idx="3">
+            <a:schemeClr val="accent1"/>
+          </a:fillRef>
+          <a:effectRef idx="2">
+            <a:schemeClr val="accent1"/>
+          </a:effectRef>
+          <a:fontRef idx="minor">
+            <a:schemeClr val="lt1"/>
+          </a:fontRef>
+        </p:style>
+        <p:txBody>
+          <a:bodyPr rtlCol="0" anchor="ctr"/>
+          <a:lstStyle/>
+          <a:p>
+            <a:pPr algn="ctr"/>
+          </a:p>
+        </p:txBody>
+      </p:sp>
+      <p:sp>
+        <p:nvSpPr>
+          <p:cNvPr id="21" name="TextBox 20"/>
+          <p:cNvSpPr txBox="1"/>
+          <p:nvPr/>
+        </p:nvSpPr>
+        <p:spPr>
+          <a:xfrm>
+            <a:off x="9098280" y="1527048"/>
+            <a:ext cx="2377440" cy="365760"/>
+          </a:xfrm>
+          <a:prstGeom prst="rect">
+            <a:avLst/>
+          </a:prstGeom>
+          <a:noFill/>
+        </p:spPr>
+        <p:txBody>
+          <a:bodyPr wrap="square">
+            <a:spAutoFit/>
+          </a:bodyPr>
+          <a:lstStyle/>
+          <a:p>
+            <a:pPr algn="l"/>
+            <a:r>
+              <a:rPr sz="1500" b="1" i="0">
+                <a:solidFill>
+                  <a:srgbClr val="FFFFFF"/>
+                </a:solidFill>
+              </a:rPr>
+              <a:t>Quality</a:t>
+            </a:r>
+          </a:p>
+        </p:txBody>
+      </p:sp>
+      <p:sp>
+        <p:nvSpPr>
+          <p:cNvPr id="22" name="TextBox 21"/>
+          <p:cNvSpPr txBox="1"/>
+          <p:nvPr/>
+        </p:nvSpPr>
+        <p:spPr>
+          <a:xfrm>
+            <a:off x="9144000" y="2057400"/>
+            <a:ext cx="2377440" cy="4434840"/>
+          </a:xfrm>
+          <a:prstGeom prst="rect">
+            <a:avLst/>
+          </a:prstGeom>
+          <a:noFill/>
+        </p:spPr>
+        <p:txBody>
+          <a:bodyPr wrap="square">
+            <a:spAutoFit/>
+          </a:bodyPr>
+          <a:lstStyle/>
+          <a:p>
+            <a:pPr algn="l">
+              <a:spcBef>
+                <a:spcPts val="400"/>
+              </a:spcBef>
+            </a:pPr>
+            <a:r>
+              <a:rPr sz="1300">
+                <a:solidFill>
+                  <a:srgbClr val="4A5568"/>
+                </a:solidFill>
+              </a:rPr>
+              <a:t>▸  React Hook Form + Zod</a:t>
+            </a:r>
+          </a:p>
+          <a:p>
+            <a:pPr algn="l">
+              <a:spcBef>
+                <a:spcPts val="400"/>
+              </a:spcBef>
+            </a:pPr>
+            <a:r>
+              <a:rPr sz="1300">
+                <a:solidFill>
+                  <a:srgbClr val="4A5568"/>
+                </a:solidFill>
+              </a:rPr>
+              <a:t>▸  Vitest unit tests</a:t>
+            </a:r>
+          </a:p>
+          <a:p>
+            <a:pPr algn="l">
+              <a:spcBef>
+                <a:spcPts val="400"/>
+              </a:spcBef>
+            </a:pPr>
+            <a:r>
+              <a:rPr sz="1300">
+                <a:solidFill>
+                  <a:srgbClr val="4A5568"/>
+                </a:solidFill>
+              </a:rPr>
+              <a:t>▸  Playwright E2E tests</a:t>
+            </a:r>
+          </a:p>
+          <a:p>
+            <a:pPr algn="l">
+              <a:spcBef>
+                <a:spcPts val="400"/>
+              </a:spcBef>
+            </a:pPr>
+            <a:r>
+              <a:rPr sz="1300">
+                <a:solidFill>
+                  <a:srgbClr val="4A5568"/>
+                </a:solidFill>
+              </a:rPr>
+              <a:t>▸  TypeScript strict mode</a:t>
             </a:r>
           </a:p>
         </p:txBody>
